--- a/docs/deck.pptx
+++ b/docs/deck.pptx
@@ -7904,7 +7904,7 @@
                             <a:srgbClr val="2C3E50"/>
                           </a:solidFill>
                         </a:rPr>
-                        <a:t>0.9058 ± 0.0172</a:t>
+                        <a:t>0.9066 ± 0.0174</a:t>
                       </a:r>
                     </a:p>
                   </a:txBody>
@@ -8053,7 +8053,7 @@
                             <a:srgbClr val="2C3E50"/>
                           </a:solidFill>
                         </a:rPr>
-                        <a:t>0.9012 ± 0.0220</a:t>
+                        <a:t>0.9010 ± 0.0225</a:t>
                       </a:r>
                     </a:p>
                   </a:txBody>
@@ -8202,7 +8202,7 @@
                             <a:srgbClr val="2C3E50"/>
                           </a:solidFill>
                         </a:rPr>
-                        <a:t>0.8443 ± 0.0239</a:t>
+                        <a:t>0.8402 ± 0.0254</a:t>
                       </a:r>
                     </a:p>
                   </a:txBody>
@@ -8351,7 +8351,7 @@
                             <a:srgbClr val="2C3E50"/>
                           </a:solidFill>
                         </a:rPr>
-                        <a:t>0.8322 ± 0.0296</a:t>
+                        <a:t>0.8301 ± 0.0298</a:t>
                       </a:r>
                     </a:p>
                   </a:txBody>
@@ -8500,7 +8500,7 @@
                             <a:srgbClr val="2C3E50"/>
                           </a:solidFill>
                         </a:rPr>
-                        <a:t>0.8268 ± 0.0241</a:t>
+                        <a:t>0.8169 ± 0.0263</a:t>
                       </a:r>
                     </a:p>
                   </a:txBody>
@@ -8544,7 +8544,7 @@
                             <a:srgbClr val="2C3E50"/>
                           </a:solidFill>
                         </a:rPr>
-                        <a:t>ftSg__LSTMattn</a:t>
+                        <a:t>ftSg__BRF100</a:t>
                       </a:r>
                     </a:p>
                   </a:txBody>
@@ -8607,7 +8607,7 @@
                             <a:srgbClr val="2C3E50"/>
                           </a:solidFill>
                         </a:rPr>
-                        <a:t>DL: LSTM+attention</a:t>
+                        <a:t>OvR(BalancedRF)</a:t>
                       </a:r>
                     </a:p>
                   </a:txBody>
@@ -8628,7 +8628,7 @@
                             <a:srgbClr val="2C3E50"/>
                           </a:solidFill>
                         </a:rPr>
-                        <a:t>LSTM + attention (paper)</a:t>
+                        <a:t>n=100 class_weight=balanced (paper)</a:t>
                       </a:r>
                     </a:p>
                   </a:txBody>
@@ -8649,7 +8649,7 @@
                             <a:srgbClr val="2C3E50"/>
                           </a:solidFill>
                         </a:rPr>
-                        <a:t>0.8249 ± 0.0259</a:t>
+                        <a:t>0.8148 ± 0.0253</a:t>
                       </a:r>
                     </a:p>
                   </a:txBody>
@@ -8693,7 +8693,7 @@
                             <a:srgbClr val="2C3E50"/>
                           </a:solidFill>
                         </a:rPr>
-                        <a:t>ftSg__BRF100</a:t>
+                        <a:t>w2vCbow__BRF100</a:t>
                       </a:r>
                     </a:p>
                   </a:txBody>
@@ -8714,7 +8714,7 @@
                             <a:srgbClr val="2C3E50"/>
                           </a:solidFill>
                         </a:rPr>
-                        <a:t>FastText</a:t>
+                        <a:t>Word2Vec</a:t>
                       </a:r>
                     </a:p>
                   </a:txBody>
@@ -8735,7 +8735,7 @@
                             <a:srgbClr val="2C3E50"/>
                           </a:solidFill>
                         </a:rPr>
-                        <a:t>skip-gram · mean-pooled</a:t>
+                        <a:t>CBOW · mean-pooled</a:t>
                       </a:r>
                     </a:p>
                   </a:txBody>
@@ -8798,7 +8798,7 @@
                             <a:srgbClr val="2C3E50"/>
                           </a:solidFill>
                         </a:rPr>
-                        <a:t>0.8221 ± 0.0237</a:t>
+                        <a:t>0.8095 ± 0.0303</a:t>
                       </a:r>
                     </a:p>
                   </a:txBody>
@@ -8842,7 +8842,7 @@
                             <a:srgbClr val="2C3E50"/>
                           </a:solidFill>
                         </a:rPr>
-                        <a:t>ftCbow__Trans</a:t>
+                        <a:t>ftCbow__LSTMattn</a:t>
                       </a:r>
                     </a:p>
                   </a:txBody>
@@ -8905,7 +8905,7 @@
                             <a:srgbClr val="2C3E50"/>
                           </a:solidFill>
                         </a:rPr>
-                        <a:t>DL: transformer</a:t>
+                        <a:t>DL: LSTM+attention</a:t>
                       </a:r>
                     </a:p>
                   </a:txBody>
@@ -8926,7 +8926,7 @@
                             <a:srgbClr val="2C3E50"/>
                           </a:solidFill>
                         </a:rPr>
-                        <a:t>4-block transformer (paper)</a:t>
+                        <a:t>LSTM + attention (paper)</a:t>
                       </a:r>
                     </a:p>
                   </a:txBody>
@@ -8947,7 +8947,7 @@
                             <a:srgbClr val="2C3E50"/>
                           </a:solidFill>
                         </a:rPr>
-                        <a:t>0.8204 ± 0.0302</a:t>
+                        <a:t>0.7883 ± 0.0214</a:t>
                       </a:r>
                     </a:p>
                   </a:txBody>
@@ -8991,7 +8991,7 @@
                             <a:srgbClr val="2C3E50"/>
                           </a:solidFill>
                         </a:rPr>
-                        <a:t>ftCbow__LSTMattn</a:t>
+                        <a:t>ftSg__LSTMattn</a:t>
                       </a:r>
                     </a:p>
                   </a:txBody>
@@ -9033,7 +9033,7 @@
                             <a:srgbClr val="2C3E50"/>
                           </a:solidFill>
                         </a:rPr>
-                        <a:t>CBOW · mean-pooled</a:t>
+                        <a:t>skip-gram · mean-pooled</a:t>
                       </a:r>
                     </a:p>
                   </a:txBody>
@@ -9096,7 +9096,7 @@
                             <a:srgbClr val="2C3E50"/>
                           </a:solidFill>
                         </a:rPr>
-                        <a:t>0.8184 ± 0.0235</a:t>
+                        <a:t>0.7860 ± 0.0234</a:t>
                       </a:r>
                     </a:p>
                   </a:txBody>
@@ -9140,7 +9140,7 @@
                             <a:srgbClr val="2C3E50"/>
                           </a:solidFill>
                         </a:rPr>
-                        <a:t>w2vSg__LSTMattn</a:t>
+                        <a:t>d2vDm__BRF100</a:t>
                       </a:r>
                     </a:p>
                   </a:txBody>
@@ -9161,7 +9161,7 @@
                             <a:srgbClr val="2C3E50"/>
                           </a:solidFill>
                         </a:rPr>
-                        <a:t>Word2Vec</a:t>
+                        <a:t>Doc2Vec</a:t>
                       </a:r>
                     </a:p>
                   </a:txBody>
@@ -9182,7 +9182,7 @@
                             <a:srgbClr val="2C3E50"/>
                           </a:solidFill>
                         </a:rPr>
-                        <a:t>skip-gram · mean-pooled</a:t>
+                        <a:t>DM · doc-vector</a:t>
                       </a:r>
                     </a:p>
                   </a:txBody>
@@ -9203,7 +9203,7 @@
                             <a:srgbClr val="2C3E50"/>
                           </a:solidFill>
                         </a:rPr>
-                        <a:t>DL: LSTM+attention</a:t>
+                        <a:t>OvR(BalancedRF)</a:t>
                       </a:r>
                     </a:p>
                   </a:txBody>
@@ -9224,7 +9224,7 @@
                             <a:srgbClr val="2C3E50"/>
                           </a:solidFill>
                         </a:rPr>
-                        <a:t>LSTM + attention (paper)</a:t>
+                        <a:t>n=100 class_weight=balanced (paper)</a:t>
                       </a:r>
                     </a:p>
                   </a:txBody>
@@ -9245,7 +9245,7 @@
                             <a:srgbClr val="2C3E50"/>
                           </a:solidFill>
                         </a:rPr>
-                        <a:t>0.8183 ± 0.0232</a:t>
+                        <a:t>0.7825 ± 0.0317</a:t>
                       </a:r>
                     </a:p>
                   </a:txBody>
@@ -9289,7 +9289,7 @@
                             <a:srgbClr val="2C3E50"/>
                           </a:solidFill>
                         </a:rPr>
-                        <a:t>w2vCbow__BRF100</a:t>
+                        <a:t>w2vSg__LSTMattn</a:t>
                       </a:r>
                     </a:p>
                   </a:txBody>
@@ -9331,7 +9331,7 @@
                             <a:srgbClr val="2C3E50"/>
                           </a:solidFill>
                         </a:rPr>
-                        <a:t>CBOW · mean-pooled</a:t>
+                        <a:t>skip-gram · mean-pooled</a:t>
                       </a:r>
                     </a:p>
                   </a:txBody>
@@ -9352,7 +9352,7 @@
                             <a:srgbClr val="2C3E50"/>
                           </a:solidFill>
                         </a:rPr>
-                        <a:t>OvR(BalancedRF)</a:t>
+                        <a:t>DL: LSTM+attention</a:t>
                       </a:r>
                     </a:p>
                   </a:txBody>
@@ -9373,7 +9373,7 @@
                             <a:srgbClr val="2C3E50"/>
                           </a:solidFill>
                         </a:rPr>
-                        <a:t>n=100 class_weight=balanced (paper)</a:t>
+                        <a:t>LSTM + attention (paper)</a:t>
                       </a:r>
                     </a:p>
                   </a:txBody>
@@ -9394,7 +9394,7 @@
                             <a:srgbClr val="2C3E50"/>
                           </a:solidFill>
                         </a:rPr>
-                        <a:t>0.8146 ± 0.0276</a:t>
+                        <a:t>0.7821 ± 0.0219</a:t>
                       </a:r>
                     </a:p>
                   </a:txBody>
@@ -9438,7 +9438,7 @@
                             <a:srgbClr val="2C3E50"/>
                           </a:solidFill>
                         </a:rPr>
-                        <a:t>w2vCbow__LSTMattn</a:t>
+                        <a:t>ftCbow__Trans</a:t>
                       </a:r>
                     </a:p>
                   </a:txBody>
@@ -9459,7 +9459,7 @@
                             <a:srgbClr val="2C3E50"/>
                           </a:solidFill>
                         </a:rPr>
-                        <a:t>Word2Vec</a:t>
+                        <a:t>FastText</a:t>
                       </a:r>
                     </a:p>
                   </a:txBody>
@@ -9501,7 +9501,7 @@
                             <a:srgbClr val="2C3E50"/>
                           </a:solidFill>
                         </a:rPr>
-                        <a:t>DL: LSTM+attention</a:t>
+                        <a:t>DL: transformer</a:t>
                       </a:r>
                     </a:p>
                   </a:txBody>
@@ -9522,7 +9522,7 @@
                             <a:srgbClr val="2C3E50"/>
                           </a:solidFill>
                         </a:rPr>
-                        <a:t>LSTM + attention (paper)</a:t>
+                        <a:t>4-block transformer (paper)</a:t>
                       </a:r>
                     </a:p>
                   </a:txBody>
@@ -9543,7 +9543,7 @@
                             <a:srgbClr val="2C3E50"/>
                           </a:solidFill>
                         </a:rPr>
-                        <a:t>0.8118 ± 0.0226</a:t>
+                        <a:t>0.7819 ± 0.0323</a:t>
                       </a:r>
                     </a:p>
                   </a:txBody>
@@ -9587,7 +9587,7 @@
                             <a:srgbClr val="2C3E50"/>
                           </a:solidFill>
                         </a:rPr>
-                        <a:t>ftSg__Trans</a:t>
+                        <a:t>ftSg__JustAttn</a:t>
                       </a:r>
                     </a:p>
                   </a:txBody>
@@ -9650,7 +9650,7 @@
                             <a:srgbClr val="2C3E50"/>
                           </a:solidFill>
                         </a:rPr>
-                        <a:t>DL: transformer</a:t>
+                        <a:t>DL: attention</a:t>
                       </a:r>
                     </a:p>
                   </a:txBody>
@@ -9671,7 +9671,7 @@
                             <a:srgbClr val="2C3E50"/>
                           </a:solidFill>
                         </a:rPr>
-                        <a:t>4-block transformer (paper)</a:t>
+                        <a:t>attention-only (paper)</a:t>
                       </a:r>
                     </a:p>
                   </a:txBody>
@@ -9692,7 +9692,7 @@
                             <a:srgbClr val="2C3E50"/>
                           </a:solidFill>
                         </a:rPr>
-                        <a:t>0.8113 ± 0.0263</a:t>
+                        <a:t>0.7796 ± 0.0302</a:t>
                       </a:r>
                     </a:p>
                   </a:txBody>
@@ -9736,7 +9736,7 @@
                             <a:srgbClr val="2C3E50"/>
                           </a:solidFill>
                         </a:rPr>
-                        <a:t>d2vDm__LSTMattn</a:t>
+                        <a:t>ftSg__LSTM</a:t>
                       </a:r>
                     </a:p>
                   </a:txBody>
@@ -9757,7 +9757,7 @@
                             <a:srgbClr val="2C3E50"/>
                           </a:solidFill>
                         </a:rPr>
-                        <a:t>Doc2Vec</a:t>
+                        <a:t>FastText</a:t>
                       </a:r>
                     </a:p>
                   </a:txBody>
@@ -9778,7 +9778,7 @@
                             <a:srgbClr val="2C3E50"/>
                           </a:solidFill>
                         </a:rPr>
-                        <a:t>DM · doc-vector</a:t>
+                        <a:t>skip-gram · mean-pooled</a:t>
                       </a:r>
                     </a:p>
                   </a:txBody>
@@ -9799,7 +9799,7 @@
                             <a:srgbClr val="2C3E50"/>
                           </a:solidFill>
                         </a:rPr>
-                        <a:t>DL: LSTM+attention</a:t>
+                        <a:t>DL: LSTM</a:t>
                       </a:r>
                     </a:p>
                   </a:txBody>
@@ -9820,7 +9820,7 @@
                             <a:srgbClr val="2C3E50"/>
                           </a:solidFill>
                         </a:rPr>
-                        <a:t>LSTM + attention (paper)</a:t>
+                        <a:t>vanilla LSTM (paper)</a:t>
                       </a:r>
                     </a:p>
                   </a:txBody>
@@ -9841,7 +9841,7 @@
                             <a:srgbClr val="2C3E50"/>
                           </a:solidFill>
                         </a:rPr>
-                        <a:t>0.8082 ± 0.0266</a:t>
+                        <a:t>0.7784 ± 0.0275</a:t>
                       </a:r>
                     </a:p>
                   </a:txBody>
@@ -9885,7 +9885,7 @@
                             <a:srgbClr val="2C3E50"/>
                           </a:solidFill>
                         </a:rPr>
-                        <a:t>w2vCbow__Trans</a:t>
+                        <a:t>d2vDm__LSTMattn</a:t>
                       </a:r>
                     </a:p>
                   </a:txBody>
@@ -9906,7 +9906,7 @@
                             <a:srgbClr val="2C3E50"/>
                           </a:solidFill>
                         </a:rPr>
-                        <a:t>Word2Vec</a:t>
+                        <a:t>Doc2Vec</a:t>
                       </a:r>
                     </a:p>
                   </a:txBody>
@@ -9927,7 +9927,7 @@
                             <a:srgbClr val="2C3E50"/>
                           </a:solidFill>
                         </a:rPr>
-                        <a:t>CBOW · mean-pooled</a:t>
+                        <a:t>DM · doc-vector</a:t>
                       </a:r>
                     </a:p>
                   </a:txBody>
@@ -9948,7 +9948,7 @@
                             <a:srgbClr val="2C3E50"/>
                           </a:solidFill>
                         </a:rPr>
-                        <a:t>DL: transformer</a:t>
+                        <a:t>DL: LSTM+attention</a:t>
                       </a:r>
                     </a:p>
                   </a:txBody>
@@ -9969,7 +9969,7 @@
                             <a:srgbClr val="2C3E50"/>
                           </a:solidFill>
                         </a:rPr>
-                        <a:t>4-block transformer (paper)</a:t>
+                        <a:t>LSTM + attention (paper)</a:t>
                       </a:r>
                     </a:p>
                   </a:txBody>
@@ -9990,7 +9990,7 @@
                             <a:srgbClr val="2C3E50"/>
                           </a:solidFill>
                         </a:rPr>
-                        <a:t>0.8043 ± 0.0204</a:t>
+                        <a:t>0.7713 ± 0.0329</a:t>
                       </a:r>
                     </a:p>
                   </a:txBody>
@@ -10034,7 +10034,7 @@
                             <a:srgbClr val="2C3E50"/>
                           </a:solidFill>
                         </a:rPr>
-                        <a:t>w2vSg__Trans</a:t>
+                        <a:t>w2vCbow__LSTMattn</a:t>
                       </a:r>
                     </a:p>
                   </a:txBody>
@@ -10076,7 +10076,7 @@
                             <a:srgbClr val="2C3E50"/>
                           </a:solidFill>
                         </a:rPr>
-                        <a:t>skip-gram · mean-pooled</a:t>
+                        <a:t>CBOW · mean-pooled</a:t>
                       </a:r>
                     </a:p>
                   </a:txBody>
@@ -10097,7 +10097,7 @@
                             <a:srgbClr val="2C3E50"/>
                           </a:solidFill>
                         </a:rPr>
-                        <a:t>DL: transformer</a:t>
+                        <a:t>DL: LSTM+attention</a:t>
                       </a:r>
                     </a:p>
                   </a:txBody>
@@ -10118,7 +10118,7 @@
                             <a:srgbClr val="2C3E50"/>
                           </a:solidFill>
                         </a:rPr>
-                        <a:t>4-block transformer (paper)</a:t>
+                        <a:t>LSTM + attention (paper)</a:t>
                       </a:r>
                     </a:p>
                   </a:txBody>
@@ -10139,7 +10139,7 @@
                             <a:srgbClr val="2C3E50"/>
                           </a:solidFill>
                         </a:rPr>
-                        <a:t>0.7988 ± 0.0322</a:t>
+                        <a:t>0.7711 ± 0.0324</a:t>
                       </a:r>
                     </a:p>
                   </a:txBody>
@@ -10183,7 +10183,7 @@
                             <a:srgbClr val="2C3E50"/>
                           </a:solidFill>
                         </a:rPr>
-                        <a:t>ftSg__JustAttn</a:t>
+                        <a:t>w2vSg__Trans</a:t>
                       </a:r>
                     </a:p>
                   </a:txBody>
@@ -10204,7 +10204,7 @@
                             <a:srgbClr val="2C3E50"/>
                           </a:solidFill>
                         </a:rPr>
-                        <a:t>FastText</a:t>
+                        <a:t>Word2Vec</a:t>
                       </a:r>
                     </a:p>
                   </a:txBody>
@@ -10246,7 +10246,7 @@
                             <a:srgbClr val="2C3E50"/>
                           </a:solidFill>
                         </a:rPr>
-                        <a:t>DL: attention</a:t>
+                        <a:t>DL: transformer</a:t>
                       </a:r>
                     </a:p>
                   </a:txBody>
@@ -10267,7 +10267,7 @@
                             <a:srgbClr val="2C3E50"/>
                           </a:solidFill>
                         </a:rPr>
-                        <a:t>attention-only (paper)</a:t>
+                        <a:t>4-block transformer (paper)</a:t>
                       </a:r>
                     </a:p>
                   </a:txBody>
@@ -10288,7 +10288,7 @@
                             <a:srgbClr val="2C3E50"/>
                           </a:solidFill>
                         </a:rPr>
-                        <a:t>0.7986 ± 0.0239</a:t>
+                        <a:t>0.7693 ± 0.0392</a:t>
                       </a:r>
                     </a:p>
                   </a:txBody>
@@ -10332,7 +10332,7 @@
                             <a:srgbClr val="2C3E50"/>
                           </a:solidFill>
                         </a:rPr>
-                        <a:t>w2vSg__JustAttn</a:t>
+                        <a:t>ftSg__Trans</a:t>
                       </a:r>
                     </a:p>
                   </a:txBody>
@@ -10353,7 +10353,7 @@
                             <a:srgbClr val="2C3E50"/>
                           </a:solidFill>
                         </a:rPr>
-                        <a:t>Word2Vec</a:t>
+                        <a:t>FastText</a:t>
                       </a:r>
                     </a:p>
                   </a:txBody>
@@ -10395,7 +10395,7 @@
                             <a:srgbClr val="2C3E50"/>
                           </a:solidFill>
                         </a:rPr>
-                        <a:t>DL: attention</a:t>
+                        <a:t>DL: transformer</a:t>
                       </a:r>
                     </a:p>
                   </a:txBody>
@@ -10416,7 +10416,7 @@
                             <a:srgbClr val="2C3E50"/>
                           </a:solidFill>
                         </a:rPr>
-                        <a:t>attention-only (paper)</a:t>
+                        <a:t>4-block transformer (paper)</a:t>
                       </a:r>
                     </a:p>
                   </a:txBody>
@@ -10437,7 +10437,7 @@
                             <a:srgbClr val="2C3E50"/>
                           </a:solidFill>
                         </a:rPr>
-                        <a:t>0.7891 ± 0.0311</a:t>
+                        <a:t>0.7689 ± 0.0415</a:t>
                       </a:r>
                     </a:p>
                   </a:txBody>
@@ -10481,7 +10481,7 @@
                             <a:srgbClr val="2C3E50"/>
                           </a:solidFill>
                         </a:rPr>
-                        <a:t>ftCbow__JustAttn</a:t>
+                        <a:t>w2vSg__LSTM</a:t>
                       </a:r>
                     </a:p>
                   </a:txBody>
@@ -10502,7 +10502,7 @@
                             <a:srgbClr val="2C3E50"/>
                           </a:solidFill>
                         </a:rPr>
-                        <a:t>FastText</a:t>
+                        <a:t>Word2Vec</a:t>
                       </a:r>
                     </a:p>
                   </a:txBody>
@@ -10523,7 +10523,7 @@
                             <a:srgbClr val="2C3E50"/>
                           </a:solidFill>
                         </a:rPr>
-                        <a:t>CBOW · mean-pooled</a:t>
+                        <a:t>skip-gram · mean-pooled</a:t>
                       </a:r>
                     </a:p>
                   </a:txBody>
@@ -10544,7 +10544,7 @@
                             <a:srgbClr val="2C3E50"/>
                           </a:solidFill>
                         </a:rPr>
-                        <a:t>DL: attention</a:t>
+                        <a:t>DL: LSTM</a:t>
                       </a:r>
                     </a:p>
                   </a:txBody>
@@ -10565,7 +10565,7 @@
                             <a:srgbClr val="2C3E50"/>
                           </a:solidFill>
                         </a:rPr>
-                        <a:t>attention-only (paper)</a:t>
+                        <a:t>vanilla LSTM (paper)</a:t>
                       </a:r>
                     </a:p>
                   </a:txBody>
@@ -10586,7 +10586,7 @@
                             <a:srgbClr val="2C3E50"/>
                           </a:solidFill>
                         </a:rPr>
-                        <a:t>0.7872 ± 0.0427</a:t>
+                        <a:t>0.7683 ± 0.0320</a:t>
                       </a:r>
                     </a:p>
                   </a:txBody>
@@ -10630,7 +10630,7 @@
                             <a:srgbClr val="2C3E50"/>
                           </a:solidFill>
                         </a:rPr>
-                        <a:t>d2vDm__Trans</a:t>
+                        <a:t>w2vSg__JustAttn</a:t>
                       </a:r>
                     </a:p>
                   </a:txBody>
@@ -10651,7 +10651,7 @@
                             <a:srgbClr val="2C3E50"/>
                           </a:solidFill>
                         </a:rPr>
-                        <a:t>Doc2Vec</a:t>
+                        <a:t>Word2Vec</a:t>
                       </a:r>
                     </a:p>
                   </a:txBody>
@@ -10672,7 +10672,7 @@
                             <a:srgbClr val="2C3E50"/>
                           </a:solidFill>
                         </a:rPr>
-                        <a:t>DM · doc-vector</a:t>
+                        <a:t>skip-gram · mean-pooled</a:t>
                       </a:r>
                     </a:p>
                   </a:txBody>
@@ -10693,7 +10693,7 @@
                             <a:srgbClr val="2C3E50"/>
                           </a:solidFill>
                         </a:rPr>
-                        <a:t>DL: transformer</a:t>
+                        <a:t>DL: attention</a:t>
                       </a:r>
                     </a:p>
                   </a:txBody>
@@ -10714,7 +10714,7 @@
                             <a:srgbClr val="2C3E50"/>
                           </a:solidFill>
                         </a:rPr>
-                        <a:t>4-block transformer (paper)</a:t>
+                        <a:t>attention-only (paper)</a:t>
                       </a:r>
                     </a:p>
                   </a:txBody>
@@ -10735,7 +10735,7 @@
                             <a:srgbClr val="2C3E50"/>
                           </a:solidFill>
                         </a:rPr>
-                        <a:t>0.7819 ± 0.0365</a:t>
+                        <a:t>0.7652 ± 0.0324</a:t>
                       </a:r>
                     </a:p>
                   </a:txBody>
@@ -10779,7 +10779,7 @@
                             <a:srgbClr val="2C3E50"/>
                           </a:solidFill>
                         </a:rPr>
-                        <a:t>w2vCbow__JustAttn</a:t>
+                        <a:t>w2vCbow__Trans</a:t>
                       </a:r>
                     </a:p>
                   </a:txBody>
@@ -10842,7 +10842,7 @@
                             <a:srgbClr val="2C3E50"/>
                           </a:solidFill>
                         </a:rPr>
-                        <a:t>DL: attention</a:t>
+                        <a:t>DL: transformer</a:t>
                       </a:r>
                     </a:p>
                   </a:txBody>
@@ -10863,7 +10863,7 @@
                             <a:srgbClr val="2C3E50"/>
                           </a:solidFill>
                         </a:rPr>
-                        <a:t>attention-only (paper)</a:t>
+                        <a:t>4-block transformer (paper)</a:t>
                       </a:r>
                     </a:p>
                   </a:txBody>
@@ -10884,7 +10884,7 @@
                             <a:srgbClr val="2C3E50"/>
                           </a:solidFill>
                         </a:rPr>
-                        <a:t>0.7761 ± 0.0404</a:t>
+                        <a:t>0.7619 ± 0.0417</a:t>
                       </a:r>
                     </a:p>
                   </a:txBody>
@@ -10928,7 +10928,7 @@
                             <a:srgbClr val="2C3E50"/>
                           </a:solidFill>
                         </a:rPr>
-                        <a:t>d2vDbow__BRF100</a:t>
+                        <a:t>w2vCbow__JustAttn</a:t>
                       </a:r>
                     </a:p>
                   </a:txBody>
@@ -10949,7 +10949,7 @@
                             <a:srgbClr val="2C3E50"/>
                           </a:solidFill>
                         </a:rPr>
-                        <a:t>Doc2Vec</a:t>
+                        <a:t>Word2Vec</a:t>
                       </a:r>
                     </a:p>
                   </a:txBody>
@@ -10970,7 +10970,7 @@
                             <a:srgbClr val="2C3E50"/>
                           </a:solidFill>
                         </a:rPr>
-                        <a:t>DBOW · doc-vector</a:t>
+                        <a:t>CBOW · mean-pooled</a:t>
                       </a:r>
                     </a:p>
                   </a:txBody>
@@ -10991,7 +10991,7 @@
                             <a:srgbClr val="2C3E50"/>
                           </a:solidFill>
                         </a:rPr>
-                        <a:t>OvR(BalancedRF)</a:t>
+                        <a:t>DL: attention</a:t>
                       </a:r>
                     </a:p>
                   </a:txBody>
@@ -11012,7 +11012,7 @@
                             <a:srgbClr val="2C3E50"/>
                           </a:solidFill>
                         </a:rPr>
-                        <a:t>n=100 class_weight=balanced (paper)</a:t>
+                        <a:t>attention-only (paper)</a:t>
                       </a:r>
                     </a:p>
                   </a:txBody>
@@ -11033,7 +11033,7 @@
                             <a:srgbClr val="2C3E50"/>
                           </a:solidFill>
                         </a:rPr>
-                        <a:t>0.7707 ± 0.0244</a:t>
+                        <a:t>0.7559 ± 0.0371</a:t>
                       </a:r>
                     </a:p>
                   </a:txBody>
@@ -11077,7 +11077,7 @@
                             <a:srgbClr val="2C3E50"/>
                           </a:solidFill>
                         </a:rPr>
-                        <a:t>d2vDm__JustAttn</a:t>
+                        <a:t>w2vCbow__LSTM</a:t>
                       </a:r>
                     </a:p>
                   </a:txBody>
@@ -11098,7 +11098,7 @@
                             <a:srgbClr val="2C3E50"/>
                           </a:solidFill>
                         </a:rPr>
-                        <a:t>Doc2Vec</a:t>
+                        <a:t>Word2Vec</a:t>
                       </a:r>
                     </a:p>
                   </a:txBody>
@@ -11119,7 +11119,7 @@
                             <a:srgbClr val="2C3E50"/>
                           </a:solidFill>
                         </a:rPr>
-                        <a:t>DM · doc-vector</a:t>
+                        <a:t>CBOW · mean-pooled</a:t>
                       </a:r>
                     </a:p>
                   </a:txBody>
@@ -11140,7 +11140,7 @@
                             <a:srgbClr val="2C3E50"/>
                           </a:solidFill>
                         </a:rPr>
-                        <a:t>DL: attention</a:t>
+                        <a:t>DL: LSTM</a:t>
                       </a:r>
                     </a:p>
                   </a:txBody>
@@ -11161,7 +11161,7 @@
                             <a:srgbClr val="2C3E50"/>
                           </a:solidFill>
                         </a:rPr>
-                        <a:t>attention-only (paper)</a:t>
+                        <a:t>vanilla LSTM (paper)</a:t>
                       </a:r>
                     </a:p>
                   </a:txBody>
@@ -11182,7 +11182,7 @@
                             <a:srgbClr val="2C3E50"/>
                           </a:solidFill>
                         </a:rPr>
-                        <a:t>0.7573 ± 0.0360</a:t>
+                        <a:t>0.7518 ± 0.0343</a:t>
                       </a:r>
                     </a:p>
                   </a:txBody>
@@ -11226,7 +11226,7 @@
                             <a:srgbClr val="2C3E50"/>
                           </a:solidFill>
                         </a:rPr>
-                        <a:t>ftSg__LSTM</a:t>
+                        <a:t>ftCbow__LSTM</a:t>
                       </a:r>
                     </a:p>
                   </a:txBody>
@@ -11268,7 +11268,7 @@
                             <a:srgbClr val="2C3E50"/>
                           </a:solidFill>
                         </a:rPr>
-                        <a:t>skip-gram · mean-pooled</a:t>
+                        <a:t>CBOW · mean-pooled</a:t>
                       </a:r>
                     </a:p>
                   </a:txBody>
@@ -11331,7 +11331,7 @@
                             <a:srgbClr val="2C3E50"/>
                           </a:solidFill>
                         </a:rPr>
-                        <a:t>0.6938 ± 0.1013</a:t>
+                        <a:t>0.7517 ± 0.0192</a:t>
                       </a:r>
                     </a:p>
                   </a:txBody>
@@ -11375,7 +11375,7 @@
                             <a:srgbClr val="2C3E50"/>
                           </a:solidFill>
                         </a:rPr>
-                        <a:t>w2vSg__LSTM</a:t>
+                        <a:t>d2vDm__Trans</a:t>
                       </a:r>
                     </a:p>
                   </a:txBody>
@@ -11396,7 +11396,7 @@
                             <a:srgbClr val="2C3E50"/>
                           </a:solidFill>
                         </a:rPr>
-                        <a:t>Word2Vec</a:t>
+                        <a:t>Doc2Vec</a:t>
                       </a:r>
                     </a:p>
                   </a:txBody>
@@ -11417,7 +11417,7 @@
                             <a:srgbClr val="2C3E50"/>
                           </a:solidFill>
                         </a:rPr>
-                        <a:t>skip-gram · mean-pooled</a:t>
+                        <a:t>DM · doc-vector</a:t>
                       </a:r>
                     </a:p>
                   </a:txBody>
@@ -11438,7 +11438,7 @@
                             <a:srgbClr val="2C3E50"/>
                           </a:solidFill>
                         </a:rPr>
-                        <a:t>DL: LSTM</a:t>
+                        <a:t>DL: transformer</a:t>
                       </a:r>
                     </a:p>
                   </a:txBody>
@@ -11459,7 +11459,7 @@
                             <a:srgbClr val="2C3E50"/>
                           </a:solidFill>
                         </a:rPr>
-                        <a:t>vanilla LSTM (paper)</a:t>
+                        <a:t>4-block transformer (paper)</a:t>
                       </a:r>
                     </a:p>
                   </a:txBody>
@@ -11480,7 +11480,7 @@
                             <a:srgbClr val="2C3E50"/>
                           </a:solidFill>
                         </a:rPr>
-                        <a:t>0.6856 ± 0.1023</a:t>
+                        <a:t>0.7495 ± 0.0411</a:t>
                       </a:r>
                     </a:p>
                   </a:txBody>
@@ -11524,7 +11524,7 @@
                             <a:srgbClr val="2C3E50"/>
                           </a:solidFill>
                         </a:rPr>
-                        <a:t>w2vCbow__LSTM</a:t>
+                        <a:t>d2vDbow__BRF100</a:t>
                       </a:r>
                     </a:p>
                   </a:txBody>
@@ -11545,7 +11545,7 @@
                             <a:srgbClr val="2C3E50"/>
                           </a:solidFill>
                         </a:rPr>
-                        <a:t>Word2Vec</a:t>
+                        <a:t>Doc2Vec</a:t>
                       </a:r>
                     </a:p>
                   </a:txBody>
@@ -11566,7 +11566,7 @@
                             <a:srgbClr val="2C3E50"/>
                           </a:solidFill>
                         </a:rPr>
-                        <a:t>CBOW · mean-pooled</a:t>
+                        <a:t>DBOW · doc-vector</a:t>
                       </a:r>
                     </a:p>
                   </a:txBody>
@@ -11587,7 +11587,7 @@
                             <a:srgbClr val="2C3E50"/>
                           </a:solidFill>
                         </a:rPr>
-                        <a:t>DL: LSTM</a:t>
+                        <a:t>OvR(BalancedRF)</a:t>
                       </a:r>
                     </a:p>
                   </a:txBody>
@@ -11608,7 +11608,7 @@
                             <a:srgbClr val="2C3E50"/>
                           </a:solidFill>
                         </a:rPr>
-                        <a:t>vanilla LSTM (paper)</a:t>
+                        <a:t>n=100 class_weight=balanced (paper)</a:t>
                       </a:r>
                     </a:p>
                   </a:txBody>
@@ -11629,7 +11629,7 @@
                             <a:srgbClr val="2C3E50"/>
                           </a:solidFill>
                         </a:rPr>
-                        <a:t>0.6454 ± 0.0847</a:t>
+                        <a:t>0.7491 ± 0.0334</a:t>
                       </a:r>
                     </a:p>
                   </a:txBody>
@@ -11673,7 +11673,7 @@
                             <a:srgbClr val="2C3E50"/>
                           </a:solidFill>
                         </a:rPr>
-                        <a:t>ftCbow__LSTM</a:t>
+                        <a:t>ftCbow__JustAttn</a:t>
                       </a:r>
                     </a:p>
                   </a:txBody>
@@ -11736,7 +11736,7 @@
                             <a:srgbClr val="2C3E50"/>
                           </a:solidFill>
                         </a:rPr>
-                        <a:t>DL: LSTM</a:t>
+                        <a:t>DL: attention</a:t>
                       </a:r>
                     </a:p>
                   </a:txBody>
@@ -11757,7 +11757,7 @@
                             <a:srgbClr val="2C3E50"/>
                           </a:solidFill>
                         </a:rPr>
-                        <a:t>vanilla LSTM (paper)</a:t>
+                        <a:t>attention-only (paper)</a:t>
                       </a:r>
                     </a:p>
                   </a:txBody>
@@ -11778,7 +11778,7 @@
                             <a:srgbClr val="2C3E50"/>
                           </a:solidFill>
                         </a:rPr>
-                        <a:t>0.6315 ± 0.0845</a:t>
+                        <a:t>0.7404 ± 0.0487</a:t>
                       </a:r>
                     </a:p>
                   </a:txBody>
@@ -11822,7 +11822,7 @@
                             <a:srgbClr val="2C3E50"/>
                           </a:solidFill>
                         </a:rPr>
-                        <a:t>d2vDm__LSTM</a:t>
+                        <a:t>d2vDm__JustAttn</a:t>
                       </a:r>
                     </a:p>
                   </a:txBody>
@@ -11885,7 +11885,7 @@
                             <a:srgbClr val="2C3E50"/>
                           </a:solidFill>
                         </a:rPr>
-                        <a:t>DL: LSTM</a:t>
+                        <a:t>DL: attention</a:t>
                       </a:r>
                     </a:p>
                   </a:txBody>
@@ -11906,7 +11906,7 @@
                             <a:srgbClr val="2C3E50"/>
                           </a:solidFill>
                         </a:rPr>
-                        <a:t>vanilla LSTM (paper)</a:t>
+                        <a:t>attention-only (paper)</a:t>
                       </a:r>
                     </a:p>
                   </a:txBody>
@@ -11927,7 +11927,7 @@
                             <a:srgbClr val="2C3E50"/>
                           </a:solidFill>
                         </a:rPr>
-                        <a:t>0.6256 ± 0.0767</a:t>
+                        <a:t>0.7320 ± 0.0315</a:t>
                       </a:r>
                     </a:p>
                   </a:txBody>
@@ -11971,7 +11971,7 @@
                             <a:srgbClr val="2C3E50"/>
                           </a:solidFill>
                         </a:rPr>
-                        <a:t>d2vDm__BRF100</a:t>
+                        <a:t>d2vDm__LSTM</a:t>
                       </a:r>
                     </a:p>
                   </a:txBody>
@@ -12034,7 +12034,7 @@
                             <a:srgbClr val="2C3E50"/>
                           </a:solidFill>
                         </a:rPr>
-                        <a:t>OvR(BalancedRF)</a:t>
+                        <a:t>DL: LSTM</a:t>
                       </a:r>
                     </a:p>
                   </a:txBody>
@@ -12055,7 +12055,7 @@
                             <a:srgbClr val="2C3E50"/>
                           </a:solidFill>
                         </a:rPr>
-                        <a:t>n=100 class_weight=balanced (paper)</a:t>
+                        <a:t>vanilla LSTM (paper)</a:t>
                       </a:r>
                     </a:p>
                   </a:txBody>
@@ -12076,7 +12076,7 @@
                             <a:srgbClr val="2C3E50"/>
                           </a:solidFill>
                         </a:rPr>
-                        <a:t>0.5880 ± 0.0311</a:t>
+                        <a:t>0.7206 ± 0.0308</a:t>
                       </a:r>
                     </a:p>
                   </a:txBody>
@@ -12376,7 +12376,7 @@
                             <a:srgbClr val="2C3E50"/>
                           </a:solidFill>
                         </a:rPr>
-                        <a:t>0.8750</a:t>
+                        <a:t>0.8734</a:t>
                       </a:r>
                     </a:p>
                   </a:txBody>
@@ -12397,7 +12397,7 @@
                             <a:srgbClr val="2C3E50"/>
                           </a:solidFill>
                         </a:rPr>
-                        <a:t>0.0373</a:t>
+                        <a:t>0.0399</a:t>
                       </a:r>
                     </a:p>
                   </a:txBody>
@@ -12483,7 +12483,7 @@
                             <a:srgbClr val="2C3E50"/>
                           </a:solidFill>
                         </a:rPr>
-                        <a:t>0.7947</a:t>
+                        <a:t>0.7928</a:t>
                       </a:r>
                     </a:p>
                   </a:txBody>
@@ -12504,7 +12504,7 @@
                             <a:srgbClr val="2C3E50"/>
                           </a:solidFill>
                         </a:rPr>
-                        <a:t>0.0835</a:t>
+                        <a:t>0.0514</a:t>
                       </a:r>
                     </a:p>
                   </a:txBody>
@@ -12590,7 +12590,7 @@
                             <a:srgbClr val="2C3E50"/>
                           </a:solidFill>
                         </a:rPr>
-                        <a:t>0.7771</a:t>
+                        <a:t>0.7752</a:t>
                       </a:r>
                     </a:p>
                   </a:txBody>
@@ -12611,7 +12611,7 @@
                             <a:srgbClr val="2C3E50"/>
                           </a:solidFill>
                         </a:rPr>
-                        <a:t>0.0756</a:t>
+                        <a:t>0.0386</a:t>
                       </a:r>
                     </a:p>
                   </a:txBody>
@@ -12697,7 +12697,7 @@
                             <a:srgbClr val="2C3E50"/>
                           </a:solidFill>
                         </a:rPr>
-                        <a:t>0.7219</a:t>
+                        <a:t>0.7508</a:t>
                       </a:r>
                     </a:p>
                   </a:txBody>
@@ -12718,7 +12718,7 @@
                             <a:srgbClr val="2C3E50"/>
                           </a:solidFill>
                         </a:rPr>
-                        <a:t>0.0936</a:t>
+                        <a:t>0.0394</a:t>
                       </a:r>
                     </a:p>
                   </a:txBody>
@@ -13093,7 +13093,7 @@
                             <a:srgbClr val="2C3E50"/>
                           </a:solidFill>
                         </a:rPr>
-                        <a:t>0.9035</a:t>
+                        <a:t>0.9038</a:t>
                       </a:r>
                     </a:p>
                   </a:txBody>
@@ -13114,7 +13114,7 @@
                             <a:srgbClr val="2C3E50"/>
                           </a:solidFill>
                         </a:rPr>
-                        <a:t>0.0197</a:t>
+                        <a:t>0.0201</a:t>
                       </a:r>
                     </a:p>
                   </a:txBody>
@@ -13179,7 +13179,7 @@
                             <a:srgbClr val="2C3E50"/>
                           </a:solidFill>
                         </a:rPr>
-                        <a:t>DL: LSTM+attention</a:t>
+                        <a:t>OvR(BalancedRF)</a:t>
                       </a:r>
                     </a:p>
                   </a:txBody>
@@ -13200,7 +13200,7 @@
                             <a:srgbClr val="2C3E50"/>
                           </a:solidFill>
                         </a:rPr>
-                        <a:t>0.8163</a:t>
+                        <a:t>0.8062</a:t>
                       </a:r>
                     </a:p>
                   </a:txBody>
@@ -13221,7 +13221,7 @@
                             <a:srgbClr val="2C3E50"/>
                           </a:solidFill>
                         </a:rPr>
-                        <a:t>0.0247</a:t>
+                        <a:t>0.0405</a:t>
                       </a:r>
                     </a:p>
                   </a:txBody>
@@ -13242,7 +13242,7 @@
                             <a:srgbClr val="2C3E50"/>
                           </a:solidFill>
                         </a:rPr>
-                        <a:t>5</a:t>
+                        <a:t>7</a:t>
                       </a:r>
                     </a:p>
                   </a:txBody>
@@ -13263,7 +13263,7 @@
                             <a:srgbClr val="2C3E50"/>
                           </a:solidFill>
                         </a:rPr>
-                        <a:t>125</a:t>
+                        <a:t>175</a:t>
                       </a:r>
                     </a:p>
                   </a:txBody>
@@ -13286,7 +13286,7 @@
                             <a:srgbClr val="2C3E50"/>
                           </a:solidFill>
                         </a:rPr>
-                        <a:t>DL: transformer</a:t>
+                        <a:t>DL: LSTM+attention</a:t>
                       </a:r>
                     </a:p>
                   </a:txBody>
@@ -13307,7 +13307,7 @@
                             <a:srgbClr val="2C3E50"/>
                           </a:solidFill>
                         </a:rPr>
-                        <a:t>0.8033</a:t>
+                        <a:t>0.7798</a:t>
                       </a:r>
                     </a:p>
                   </a:txBody>
@@ -13328,7 +13328,7 @@
                             <a:srgbClr val="2C3E50"/>
                           </a:solidFill>
                         </a:rPr>
-                        <a:t>0.0319</a:t>
+                        <a:t>0.0275</a:t>
                       </a:r>
                     </a:p>
                   </a:txBody>
@@ -13393,7 +13393,7 @@
                             <a:srgbClr val="2C3E50"/>
                           </a:solidFill>
                         </a:rPr>
-                        <a:t>OvR(BalancedRF)</a:t>
+                        <a:t>DL: transformer</a:t>
                       </a:r>
                     </a:p>
                   </a:txBody>
@@ -13414,7 +13414,7 @@
                             <a:srgbClr val="2C3E50"/>
                           </a:solidFill>
                         </a:rPr>
-                        <a:t>0.7855</a:t>
+                        <a:t>0.7663</a:t>
                       </a:r>
                     </a:p>
                   </a:txBody>
@@ -13435,7 +13435,7 @@
                             <a:srgbClr val="2C3E50"/>
                           </a:solidFill>
                         </a:rPr>
-                        <a:t>0.0877</a:t>
+                        <a:t>0.0401</a:t>
                       </a:r>
                     </a:p>
                   </a:txBody>
@@ -13456,7 +13456,7 @@
                             <a:srgbClr val="2C3E50"/>
                           </a:solidFill>
                         </a:rPr>
-                        <a:t>7</a:t>
+                        <a:t>5</a:t>
                       </a:r>
                     </a:p>
                   </a:txBody>
@@ -13477,7 +13477,7 @@
                             <a:srgbClr val="2C3E50"/>
                           </a:solidFill>
                         </a:rPr>
-                        <a:t>175</a:t>
+                        <a:t>125</a:t>
                       </a:r>
                     </a:p>
                   </a:txBody>
@@ -13521,7 +13521,7 @@
                             <a:srgbClr val="2C3E50"/>
                           </a:solidFill>
                         </a:rPr>
-                        <a:t>0.7817</a:t>
+                        <a:t>0.7546</a:t>
                       </a:r>
                     </a:p>
                   </a:txBody>
@@ -13542,7 +13542,7 @@
                             <a:srgbClr val="2C3E50"/>
                           </a:solidFill>
                         </a:rPr>
-                        <a:t>0.0377</a:t>
+                        <a:t>0.0399</a:t>
                       </a:r>
                     </a:p>
                   </a:txBody>
@@ -13628,7 +13628,7 @@
                             <a:srgbClr val="2C3E50"/>
                           </a:solidFill>
                         </a:rPr>
-                        <a:t>0.6564</a:t>
+                        <a:t>0.7542</a:t>
                       </a:r>
                     </a:p>
                   </a:txBody>
@@ -13649,7 +13649,7 @@
                             <a:srgbClr val="2C3E50"/>
                           </a:solidFill>
                         </a:rPr>
-                        <a:t>0.0933</a:t>
+                        <a:t>0.0349</a:t>
                       </a:r>
                     </a:p>
                   </a:txBody>
@@ -13854,7 +13854,7 @@
                   <a:srgbClr val="7F8C8D"/>
                 </a:solidFill>
               </a:rPr>
-              <a:t>Why our shallow winner is cheap. Grand total across all 725 fits: 16158 s = 4.49 h on Apple M4 Max</a:t>
+              <a:t>Why our shallow winner is cheap. Grand total across all 725 fits: 13562 s = 3.77 h on Apple M4 Max</a:t>
             </a:r>
           </a:p>
         </p:txBody>
@@ -13875,8 +13875,8 @@
         </p:blipFill>
         <p:spPr>
           <a:xfrm>
-            <a:off x="2409122" y="1371600"/>
-            <a:ext cx="7373449" cy="3291840"/>
+            <a:off x="2407420" y="1371600"/>
+            <a:ext cx="7376853" cy="3291840"/>
           </a:xfrm>
           <a:prstGeom prst="rect">
             <a:avLst/>
@@ -16385,7 +16385,7 @@
                   <a:srgbClr val="7F8C8D"/>
                 </a:solidFill>
               </a:rPr>
-              <a:t>X-axis = Δ accuracy (retrained mean − original mean, should be ≈ 0). Restricted to the 29 configs with a COMPLETE 25-trial retrain in rep_1 (excluded: 0 partial/missing transformer configs).</a:t>
+              <a:t>X-axis = Δ accuracy (rep_2 mean − rep_1 mean, should be ≈ 0 for reproducibility). 5×5 RSKF data splits are FIXED across reps; only model-init seed (REPRO_REP_SEED) varies. Restricted to the 29/29 configs with a COMPLETE 25-trial run in both reps.</a:t>
             </a:r>
           </a:p>
         </p:txBody>
@@ -16406,8 +16406,8 @@
         </p:blipFill>
         <p:spPr>
           <a:xfrm>
-            <a:off x="2513631" y="1417320"/>
-            <a:ext cx="7164432" cy="4480560"/>
+            <a:off x="1650161" y="1417320"/>
+            <a:ext cx="8891372" cy="4480560"/>
           </a:xfrm>
           <a:prstGeom prst="rect">
             <a:avLst/>
@@ -16450,7 +16450,7 @@
                   <a:srgbClr val="2C3E50"/>
                 </a:solidFill>
               </a:rPr>
-              <a:t>WHAT THIS IS — the question is: rerunning the SAME (config, seed, fold) on the SAME data, do we get the same accuracy? Our sklearn winners (green) reproduce BIT-IDENTICALLY; paper's BRF (navy) drifts ≤0.0017 (imblearn thread-order non-det); paper deep configs (orange) drift ≤0.04 (TF GPU op-order non-det). None of these change rankings.</a:t>
+              <a:t>WHAT THIS IS — re-running the SAME (config, seed, fold) with a DIFFERENT model-init seed (REPRO_REP_SEED), do we get the same accuracy? Our ExtraTrees winners (green) are random_state-seeded so they're identical across reps (Δ=0). Balanced RF baselines (navy) and DL configs (orange) show small Δ from imblearn thread non-determinism and weight-init+GPU op-order non-determinism respectively. Top rankings are stable.</a:t>
             </a:r>
           </a:p>
         </p:txBody>
@@ -16570,7 +16570,7 @@
                   <a:srgbClr val="7F8C8D"/>
                 </a:solidFill>
               </a:rPr>
-              <a:t>OvR(ExtraTrees 500, log2) on seed-42 5-fold out-of-fold predictions  (n=1030 PULs, acc=0.9029)</a:t>
+              <a:t>OvR(ExtraTrees 500, log2) on seed-42 5-fold out-of-fold predictions  (n=1030 PULs, acc=0.9058)</a:t>
             </a:r>
           </a:p>
         </p:txBody>
@@ -17160,7 +17160,7 @@
                             <a:srgbClr val="2C3E50"/>
                           </a:solidFill>
                         </a:rPr>
-                        <a:t>0.920</a:t>
+                        <a:t>0.928</a:t>
                       </a:r>
                     </a:p>
                   </a:txBody>
@@ -17181,7 +17181,7 @@
                             <a:srgbClr val="2C3E50"/>
                           </a:solidFill>
                         </a:rPr>
-                        <a:t>0.963</a:t>
+                        <a:t>0.967</a:t>
                       </a:r>
                     </a:p>
                   </a:txBody>
@@ -17202,7 +17202,7 @@
                             <a:srgbClr val="2C3E50"/>
                           </a:solidFill>
                         </a:rPr>
-                        <a:t>0.941</a:t>
+                        <a:t>0.947</a:t>
                       </a:r>
                     </a:p>
                   </a:txBody>
@@ -17267,49 +17267,49 @@
                             <a:srgbClr val="2C3E50"/>
                           </a:solidFill>
                         </a:rPr>
+                        <a:t>0.919</a:t>
+                      </a:r>
+                    </a:p>
+                  </a:txBody>
+                  <a:tcPr>
+                    <a:solidFill>
+                      <a:srgbClr val="ECF0F1"/>
+                    </a:solidFill>
+                  </a:tcPr>
+                </a:tc>
+                <a:tc>
+                  <a:txBody>
+                    <a:bodyPr/>
+                    <a:lstStyle/>
+                    <a:p>
+                      <a:r>
+                        <a:rPr sz="1000">
+                          <a:solidFill>
+                            <a:srgbClr val="2C3E50"/>
+                          </a:solidFill>
+                        </a:rPr>
+                        <a:t>0.938</a:t>
+                      </a:r>
+                    </a:p>
+                  </a:txBody>
+                  <a:tcPr>
+                    <a:solidFill>
+                      <a:srgbClr val="ECF0F1"/>
+                    </a:solidFill>
+                  </a:tcPr>
+                </a:tc>
+                <a:tc>
+                  <a:txBody>
+                    <a:bodyPr/>
+                    <a:lstStyle/>
+                    <a:p>
+                      <a:r>
+                        <a:rPr sz="1000">
+                          <a:solidFill>
+                            <a:srgbClr val="2C3E50"/>
+                          </a:solidFill>
+                        </a:rPr>
                         <a:t>0.929</a:t>
-                      </a:r>
-                    </a:p>
-                  </a:txBody>
-                  <a:tcPr>
-                    <a:solidFill>
-                      <a:srgbClr val="ECF0F1"/>
-                    </a:solidFill>
-                  </a:tcPr>
-                </a:tc>
-                <a:tc>
-                  <a:txBody>
-                    <a:bodyPr/>
-                    <a:lstStyle/>
-                    <a:p>
-                      <a:r>
-                        <a:rPr sz="1000">
-                          <a:solidFill>
-                            <a:srgbClr val="2C3E50"/>
-                          </a:solidFill>
-                        </a:rPr>
-                        <a:t>0.938</a:t>
-                      </a:r>
-                    </a:p>
-                  </a:txBody>
-                  <a:tcPr>
-                    <a:solidFill>
-                      <a:srgbClr val="ECF0F1"/>
-                    </a:solidFill>
-                  </a:tcPr>
-                </a:tc>
-                <a:tc>
-                  <a:txBody>
-                    <a:bodyPr/>
-                    <a:lstStyle/>
-                    <a:p>
-                      <a:r>
-                        <a:rPr sz="1000">
-                          <a:solidFill>
-                            <a:srgbClr val="2C3E50"/>
-                          </a:solidFill>
-                        </a:rPr>
-                        <a:t>0.933</a:t>
                       </a:r>
                     </a:p>
                   </a:txBody>
@@ -17481,7 +17481,7 @@
                             <a:srgbClr val="2C3E50"/>
                           </a:solidFill>
                         </a:rPr>
-                        <a:t>0.929</a:t>
+                        <a:t>0.939</a:t>
                       </a:r>
                     </a:p>
                   </a:txBody>
@@ -17502,7 +17502,7 @@
                             <a:srgbClr val="2C3E50"/>
                           </a:solidFill>
                         </a:rPr>
-                        <a:t>0.902</a:t>
+                        <a:t>0.912</a:t>
                       </a:r>
                     </a:p>
                   </a:txBody>
@@ -17523,7 +17523,7 @@
                             <a:srgbClr val="2C3E50"/>
                           </a:solidFill>
                         </a:rPr>
-                        <a:t>0.915</a:t>
+                        <a:t>0.925</a:t>
                       </a:r>
                     </a:p>
                   </a:txBody>
@@ -17588,7 +17588,7 @@
                             <a:srgbClr val="2C3E50"/>
                           </a:solidFill>
                         </a:rPr>
-                        <a:t>0.933</a:t>
+                        <a:t>0.949</a:t>
                       </a:r>
                     </a:p>
                   </a:txBody>
@@ -17630,7 +17630,7 @@
                             <a:srgbClr val="2C3E50"/>
                           </a:solidFill>
                         </a:rPr>
-                        <a:t>0.911</a:t>
+                        <a:t>0.918</a:t>
                       </a:r>
                     </a:p>
                   </a:txBody>
@@ -17695,7 +17695,7 @@
                             <a:srgbClr val="2C3E50"/>
                           </a:solidFill>
                         </a:rPr>
-                        <a:t>0.889</a:t>
+                        <a:t>0.897</a:t>
                       </a:r>
                     </a:p>
                   </a:txBody>
@@ -17716,7 +17716,7 @@
                             <a:srgbClr val="2C3E50"/>
                           </a:solidFill>
                         </a:rPr>
-                        <a:t>0.911</a:t>
+                        <a:t>0.919</a:t>
                       </a:r>
                     </a:p>
                   </a:txBody>
@@ -17737,7 +17737,7 @@
                             <a:srgbClr val="2C3E50"/>
                           </a:solidFill>
                         </a:rPr>
-                        <a:t>0.900</a:t>
+                        <a:t>0.908</a:t>
                       </a:r>
                     </a:p>
                   </a:txBody>
@@ -17802,7 +17802,7 @@
                             <a:srgbClr val="2C3E50"/>
                           </a:solidFill>
                         </a:rPr>
-                        <a:t>0.900</a:t>
+                        <a:t>0.871</a:t>
                       </a:r>
                     </a:p>
                   </a:txBody>
@@ -17844,7 +17844,7 @@
                             <a:srgbClr val="2C3E50"/>
                           </a:solidFill>
                         </a:rPr>
-                        <a:t>0.818</a:t>
+                        <a:t>0.806</a:t>
                       </a:r>
                     </a:p>
                   </a:txBody>
@@ -17909,7 +17909,7 @@
                             <a:srgbClr val="2C3E50"/>
                           </a:solidFill>
                         </a:rPr>
-                        <a:t>0.812</a:t>
+                        <a:t>0.824</a:t>
                       </a:r>
                     </a:p>
                   </a:txBody>
@@ -17951,7 +17951,7 @@
                             <a:srgbClr val="2C3E50"/>
                           </a:solidFill>
                         </a:rPr>
-                        <a:t>0.794</a:t>
+                        <a:t>0.800</a:t>
                       </a:r>
                     </a:p>
                   </a:txBody>
@@ -18016,7 +18016,7 @@
                             <a:srgbClr val="2C3E50"/>
                           </a:solidFill>
                         </a:rPr>
-                        <a:t>0.783</a:t>
+                        <a:t>0.794</a:t>
                       </a:r>
                     </a:p>
                   </a:txBody>
@@ -18058,7 +18058,7 @@
                             <a:srgbClr val="2C3E50"/>
                           </a:solidFill>
                         </a:rPr>
-                        <a:t>0.788</a:t>
+                        <a:t>0.794</a:t>
                       </a:r>
                     </a:p>
                   </a:txBody>
@@ -18123,7 +18123,7 @@
                             <a:srgbClr val="2C3E50"/>
                           </a:solidFill>
                         </a:rPr>
-                        <a:t>0.808</a:t>
+                        <a:t>0.750</a:t>
                       </a:r>
                     </a:p>
                   </a:txBody>
@@ -18165,7 +18165,7 @@
                             <a:srgbClr val="2C3E50"/>
                           </a:solidFill>
                         </a:rPr>
-                        <a:t>0.737</a:t>
+                        <a:t>0.712</a:t>
                       </a:r>
                     </a:p>
                   </a:txBody>

--- a/docs/deck.pptx
+++ b/docs/deck.pptx
@@ -26,6 +26,9 @@
     <p:sldId id="274" r:id="rId25"/>
     <p:sldId id="275" r:id="rId26"/>
     <p:sldId id="276" r:id="rId27"/>
+    <p:sldId id="277" r:id="rId28"/>
+    <p:sldId id="278" r:id="rId29"/>
+    <p:sldId id="279" r:id="rId30"/>
   </p:sldIdLst>
   <p:sldSz cx="12191695" cy="6858000" type="screen4x3"/>
   <p:notesSz cx="6858000" cy="9144000"/>
@@ -7181,6 +7184,561 @@
                   <a:srgbClr val="1A3A5C"/>
                 </a:solidFill>
               </a:rPr>
+              <a:t>Rank-K redemption — TRUE substrate is recovered fast as K grows</a:t>
+            </a:r>
+          </a:p>
+        </p:txBody>
+      </p:sp>
+      <p:sp>
+        <p:nvSpPr>
+          <p:cNvPr id="3" name="TextBox 2"/>
+          <p:cNvSpPr txBox="1"/>
+          <p:nvPr/>
+        </p:nvSpPr>
+        <p:spPr>
+          <a:xfrm>
+            <a:off x="548640" y="960120"/>
+            <a:ext cx="11094415" cy="365760"/>
+          </a:xfrm>
+          <a:prstGeom prst="rect">
+            <a:avLst/>
+          </a:prstGeom>
+          <a:noFill/>
+        </p:spPr>
+        <p:txBody>
+          <a:bodyPr wrap="square">
+            <a:spAutoFit/>
+          </a:bodyPr>
+          <a:lstStyle/>
+          <a:p>
+            <a:pPr algn="l"/>
+            <a:r>
+              <a:rPr sz="1400">
+                <a:solidFill>
+                  <a:srgbClr val="7F8C8D"/>
+                </a:solidFill>
+              </a:rPr>
+              <a:t>Cumulative top-K accuracy on 1030 held-out PULs (rep_1 OOF). When top-1 is wrong, the TRUE label is usually rank 2 or 3 — meaningful for triage workflows where biologists review the top few candidates.</a:t>
+            </a:r>
+          </a:p>
+        </p:txBody>
+      </p:sp>
+      <p:pic>
+        <p:nvPicPr>
+          <p:cNvPr id="4" name="Picture 3" descr="fig11_rank_redemption.png"/>
+          <p:cNvPicPr>
+            <a:picLocks noChangeAspect="1"/>
+          </p:cNvPicPr>
+          <p:nvPr/>
+        </p:nvPicPr>
+        <p:blipFill>
+          <a:blip r:embed="rId2"/>
+          <a:stretch>
+            <a:fillRect/>
+          </a:stretch>
+        </p:blipFill>
+        <p:spPr>
+          <a:xfrm>
+            <a:off x="2271992" y="1417320"/>
+            <a:ext cx="7647709" cy="4206240"/>
+          </a:xfrm>
+          <a:prstGeom prst="rect">
+            <a:avLst/>
+          </a:prstGeom>
+        </p:spPr>
+      </p:pic>
+      <p:sp>
+        <p:nvSpPr>
+          <p:cNvPr id="5" name="TextBox 4"/>
+          <p:cNvSpPr txBox="1"/>
+          <p:nvPr/>
+        </p:nvSpPr>
+        <p:spPr>
+          <a:xfrm>
+            <a:off x="365760" y="6126480"/>
+            <a:ext cx="11430000" cy="502920"/>
+          </a:xfrm>
+          <a:prstGeom prst="rect">
+            <a:avLst/>
+          </a:prstGeom>
+          <a:solidFill>
+            <a:srgbClr val="FFF9E6"/>
+          </a:solidFill>
+          <a:ln w="6350">
+            <a:solidFill>
+              <a:srgbClr val="2C3E50"/>
+            </a:solidFill>
+          </a:ln>
+        </p:spPr>
+        <p:txBody>
+          <a:bodyPr wrap="square">
+            <a:spAutoFit/>
+          </a:bodyPr>
+          <a:lstStyle/>
+          <a:p>
+            <a:pPr algn="l"/>
+            <a:r>
+              <a:rPr sz="1050" b="1">
+                <a:solidFill>
+                  <a:srgbClr val="2C3E50"/>
+                </a:solidFill>
+              </a:rPr>
+              <a:t>HEADLINE — top-1 = 0.906, top-2 = 0.956 (+5.0 pp), top-3 = 0.976 (+2.0 pp), top-5 = 0.981. Per-substrate: alginate is 100% at K=1; fructan is the hardest (top-1 = 0.677) but jumps to 0.903 by K=3 — i.e. when the model is wrong on fructan, the true class is almost always rank 2 or 3. Mean true-rank across all substrates = 1.39 (median 1). Calibrated probs make these ranks deployment-meaningful — see Slide 9.</a:t>
+            </a:r>
+          </a:p>
+        </p:txBody>
+      </p:sp>
+      <p:sp>
+        <p:nvSpPr>
+          <p:cNvPr id="6" name="TextBox 5"/>
+          <p:cNvSpPr txBox="1"/>
+          <p:nvPr/>
+        </p:nvSpPr>
+        <p:spPr>
+          <a:xfrm>
+            <a:off x="457200" y="6492240"/>
+            <a:ext cx="11277295" cy="274320"/>
+          </a:xfrm>
+          <a:prstGeom prst="rect">
+            <a:avLst/>
+          </a:prstGeom>
+          <a:noFill/>
+        </p:spPr>
+        <p:txBody>
+          <a:bodyPr wrap="none">
+            <a:spAutoFit/>
+          </a:bodyPr>
+          <a:lstStyle/>
+          <a:p>
+            <a:pPr algn="l"/>
+            <a:r>
+              <a:rPr sz="900" i="1">
+                <a:solidFill>
+                  <a:srgbClr val="7F8C8D"/>
+                </a:solidFill>
+              </a:rPr>
+              <a:t>subFinder substrate prediction — rep_1 reference run</a:t>
+            </a:r>
+          </a:p>
+        </p:txBody>
+      </p:sp>
+    </p:spTree>
+  </p:cSld>
+  <p:clrMapOvr>
+    <a:masterClrMapping/>
+  </p:clrMapOvr>
+</p:sld>
+</file>
+
+<file path=ppt/slides/slide15.xml><?xml version="1.0" encoding="utf-8"?>
+<p:sld xmlns:a="http://schemas.openxmlformats.org/drawingml/2006/main" xmlns:p="http://schemas.openxmlformats.org/presentationml/2006/main" xmlns:r="http://schemas.openxmlformats.org/officeDocument/2006/relationships">
+  <p:cSld>
+    <p:spTree>
+      <p:nvGrpSpPr>
+        <p:cNvPr id="1" name=""/>
+        <p:cNvGrpSpPr/>
+        <p:nvPr/>
+      </p:nvGrpSpPr>
+      <p:grpSpPr/>
+      <p:sp>
+        <p:nvSpPr>
+          <p:cNvPr id="2" name="TextBox 1"/>
+          <p:cNvSpPr txBox="1"/>
+          <p:nvPr/>
+        </p:nvSpPr>
+        <p:spPr>
+          <a:xfrm>
+            <a:off x="548640" y="320040"/>
+            <a:ext cx="11094415" cy="822960"/>
+          </a:xfrm>
+          <a:prstGeom prst="rect">
+            <a:avLst/>
+          </a:prstGeom>
+          <a:noFill/>
+        </p:spPr>
+        <p:txBody>
+          <a:bodyPr wrap="square">
+            <a:spAutoFit/>
+          </a:bodyPr>
+          <a:lstStyle/>
+          <a:p>
+            <a:pPr algn="l"/>
+            <a:r>
+              <a:rPr sz="2800" b="1">
+                <a:solidFill>
+                  <a:srgbClr val="1A3A5C"/>
+                </a:solidFill>
+              </a:rPr>
+              <a:t>Calibration is meaningful — confidence ≈ accuracy per bin</a:t>
+            </a:r>
+          </a:p>
+        </p:txBody>
+      </p:sp>
+      <p:sp>
+        <p:nvSpPr>
+          <p:cNvPr id="3" name="TextBox 2"/>
+          <p:cNvSpPr txBox="1"/>
+          <p:nvPr/>
+        </p:nvSpPr>
+        <p:spPr>
+          <a:xfrm>
+            <a:off x="548640" y="960120"/>
+            <a:ext cx="11094415" cy="365760"/>
+          </a:xfrm>
+          <a:prstGeom prst="rect">
+            <a:avLst/>
+          </a:prstGeom>
+          <a:noFill/>
+        </p:spPr>
+        <p:txBody>
+          <a:bodyPr wrap="square">
+            <a:spAutoFit/>
+          </a:bodyPr>
+          <a:lstStyle/>
+          <a:p>
+            <a:pPr algn="l"/>
+            <a:r>
+              <a:rPr sz="1400">
+                <a:solidFill>
+                  <a:srgbClr val="7F8C8D"/>
+                </a:solidFill>
+              </a:rPr>
+              <a:t>10-bin reliability histogram on calibrated probabilities (T ≈ 0.70). Sage = correct, red = incorrect. High-confidence predictions (≥0.8) ARE correct in ≥97% of cases — supports a triage/review workflow with a high-precision auto-accept threshold.</a:t>
+            </a:r>
+          </a:p>
+        </p:txBody>
+      </p:sp>
+      <p:pic>
+        <p:nvPicPr>
+          <p:cNvPr id="4" name="Picture 3" descr="fig12_confidence_vs_correct.png"/>
+          <p:cNvPicPr>
+            <a:picLocks noChangeAspect="1"/>
+          </p:cNvPicPr>
+          <p:nvPr/>
+        </p:nvPicPr>
+        <p:blipFill>
+          <a:blip r:embed="rId2"/>
+          <a:stretch>
+            <a:fillRect/>
+          </a:stretch>
+        </p:blipFill>
+        <p:spPr>
+          <a:xfrm>
+            <a:off x="2271992" y="1417320"/>
+            <a:ext cx="7647709" cy="4206240"/>
+          </a:xfrm>
+          <a:prstGeom prst="rect">
+            <a:avLst/>
+          </a:prstGeom>
+        </p:spPr>
+      </p:pic>
+      <p:sp>
+        <p:nvSpPr>
+          <p:cNvPr id="5" name="TextBox 4"/>
+          <p:cNvSpPr txBox="1"/>
+          <p:nvPr/>
+        </p:nvSpPr>
+        <p:spPr>
+          <a:xfrm>
+            <a:off x="365760" y="6126480"/>
+            <a:ext cx="11430000" cy="502920"/>
+          </a:xfrm>
+          <a:prstGeom prst="rect">
+            <a:avLst/>
+          </a:prstGeom>
+          <a:solidFill>
+            <a:srgbClr val="FFF9E6"/>
+          </a:solidFill>
+          <a:ln w="6350">
+            <a:solidFill>
+              <a:srgbClr val="2C3E50"/>
+            </a:solidFill>
+          </a:ln>
+        </p:spPr>
+        <p:txBody>
+          <a:bodyPr wrap="square">
+            <a:spAutoFit/>
+          </a:bodyPr>
+          <a:lstStyle/>
+          <a:p>
+            <a:pPr algn="l"/>
+            <a:r>
+              <a:rPr sz="1050" b="1">
+                <a:solidFill>
+                  <a:srgbClr val="2C3E50"/>
+                </a:solidFill>
+              </a:rPr>
+              <a:t>PER-BIN ACCURACY — 0.8-0.9 → 98.2% correct (110/112) · 0.9-1.0 → 97.3% correct (566/582). Combined ≥0.8: 97.4% correct on 694 PULs (67% of total). Bottom bins (≤0.5) show ~54-65% — the model 'knows it doesn't know'. Operational implication: route confidence ≥0.8 to auto-accept (precision ≈ 0.97), route 0.5-0.8 to expert review, refuse &lt;0.5. Same calibrator powers the deployed inference.</a:t>
+            </a:r>
+          </a:p>
+        </p:txBody>
+      </p:sp>
+      <p:sp>
+        <p:nvSpPr>
+          <p:cNvPr id="6" name="TextBox 5"/>
+          <p:cNvSpPr txBox="1"/>
+          <p:nvPr/>
+        </p:nvSpPr>
+        <p:spPr>
+          <a:xfrm>
+            <a:off x="457200" y="6492240"/>
+            <a:ext cx="11277295" cy="274320"/>
+          </a:xfrm>
+          <a:prstGeom prst="rect">
+            <a:avLst/>
+          </a:prstGeom>
+          <a:noFill/>
+        </p:spPr>
+        <p:txBody>
+          <a:bodyPr wrap="none">
+            <a:spAutoFit/>
+          </a:bodyPr>
+          <a:lstStyle/>
+          <a:p>
+            <a:pPr algn="l"/>
+            <a:r>
+              <a:rPr sz="900" i="1">
+                <a:solidFill>
+                  <a:srgbClr val="7F8C8D"/>
+                </a:solidFill>
+              </a:rPr>
+              <a:t>subFinder substrate prediction — rep_1 reference run</a:t>
+            </a:r>
+          </a:p>
+        </p:txBody>
+      </p:sp>
+    </p:spTree>
+  </p:cSld>
+  <p:clrMapOvr>
+    <a:masterClrMapping/>
+  </p:clrMapOvr>
+</p:sld>
+</file>
+
+<file path=ppt/slides/slide16.xml><?xml version="1.0" encoding="utf-8"?>
+<p:sld xmlns:a="http://schemas.openxmlformats.org/drawingml/2006/main" xmlns:p="http://schemas.openxmlformats.org/presentationml/2006/main" xmlns:r="http://schemas.openxmlformats.org/officeDocument/2006/relationships">
+  <p:cSld>
+    <p:spTree>
+      <p:nvGrpSpPr>
+        <p:cNvPr id="1" name=""/>
+        <p:cNvGrpSpPr/>
+        <p:nvPr/>
+      </p:nvGrpSpPr>
+      <p:grpSpPr/>
+      <p:sp>
+        <p:nvSpPr>
+          <p:cNvPr id="2" name="TextBox 1"/>
+          <p:cNvSpPr txBox="1"/>
+          <p:nvPr/>
+        </p:nvSpPr>
+        <p:spPr>
+          <a:xfrm>
+            <a:off x="548640" y="320040"/>
+            <a:ext cx="11094415" cy="822960"/>
+          </a:xfrm>
+          <a:prstGeom prst="rect">
+            <a:avLst/>
+          </a:prstGeom>
+          <a:noFill/>
+        </p:spPr>
+        <p:txBody>
+          <a:bodyPr wrap="square">
+            <a:spAutoFit/>
+          </a:bodyPr>
+          <a:lstStyle/>
+          <a:p>
+            <a:pPr algn="l"/>
+            <a:r>
+              <a:rPr sz="2800" b="1">
+                <a:solidFill>
+                  <a:srgbClr val="1A3A5C"/>
+                </a:solidFill>
+              </a:rPr>
+              <a:t>Case studies — 6 hand-picked PUL predictions showing the value of top-K + sig genes</a:t>
+            </a:r>
+          </a:p>
+        </p:txBody>
+      </p:sp>
+      <p:sp>
+        <p:nvSpPr>
+          <p:cNvPr id="3" name="TextBox 2"/>
+          <p:cNvSpPr txBox="1"/>
+          <p:nvPr/>
+        </p:nvSpPr>
+        <p:spPr>
+          <a:xfrm>
+            <a:off x="548640" y="960120"/>
+            <a:ext cx="11094415" cy="365760"/>
+          </a:xfrm>
+          <a:prstGeom prst="rect">
+            <a:avLst/>
+          </a:prstGeom>
+          <a:noFill/>
+        </p:spPr>
+        <p:txBody>
+          <a:bodyPr wrap="square">
+            <a:spAutoFit/>
+          </a:bodyPr>
+          <a:lstStyle/>
+          <a:p>
+            <a:pPr algn="l"/>
+            <a:r>
+              <a:rPr sz="1400">
+                <a:solidFill>
+                  <a:srgbClr val="7F8C8D"/>
+                </a:solidFill>
+              </a:rPr>
+              <a:t>Each card: TRUE substrate, model's top-3 (calibrated probs), and the gene sequence. Mix of confident-correct, low-conf-correct, rank-2/3 redemptions, and a confident-wrong failure mode.</a:t>
+            </a:r>
+          </a:p>
+        </p:txBody>
+      </p:sp>
+      <p:pic>
+        <p:nvPicPr>
+          <p:cNvPr id="4" name="Picture 3" descr="fig13_case_study_cards.png"/>
+          <p:cNvPicPr>
+            <a:picLocks noChangeAspect="1"/>
+          </p:cNvPicPr>
+          <p:nvPr/>
+        </p:nvPicPr>
+        <p:blipFill>
+          <a:blip r:embed="rId2"/>
+          <a:stretch>
+            <a:fillRect/>
+          </a:stretch>
+        </p:blipFill>
+        <p:spPr>
+          <a:xfrm>
+            <a:off x="3888976" y="1325880"/>
+            <a:ext cx="4413741" cy="4480560"/>
+          </a:xfrm>
+          <a:prstGeom prst="rect">
+            <a:avLst/>
+          </a:prstGeom>
+        </p:spPr>
+      </p:pic>
+      <p:sp>
+        <p:nvSpPr>
+          <p:cNvPr id="5" name="TextBox 4"/>
+          <p:cNvSpPr txBox="1"/>
+          <p:nvPr/>
+        </p:nvSpPr>
+        <p:spPr>
+          <a:xfrm>
+            <a:off x="365760" y="6126480"/>
+            <a:ext cx="11430000" cy="502920"/>
+          </a:xfrm>
+          <a:prstGeom prst="rect">
+            <a:avLst/>
+          </a:prstGeom>
+          <a:solidFill>
+            <a:srgbClr val="FFF9E6"/>
+          </a:solidFill>
+          <a:ln w="6350">
+            <a:solidFill>
+              <a:srgbClr val="2C3E50"/>
+            </a:solidFill>
+          </a:ln>
+        </p:spPr>
+        <p:txBody>
+          <a:bodyPr wrap="square">
+            <a:spAutoFit/>
+          </a:bodyPr>
+          <a:lstStyle/>
+          <a:p>
+            <a:pPr algn="l"/>
+            <a:r>
+              <a:rPr sz="1050" b="1">
+                <a:solidFill>
+                  <a:srgbClr val="2C3E50"/>
+                </a:solidFill>
+              </a:rPr>
+              <a:t>READING THE CARDS — green = top-1 is TRUE · amber = TRUE recovered at rank 2 or 3 · red = TRUE missing from top-3. Confident+correct (alginate, 0.96) shows clean signal: PL6/PL17 are canonical alginate lyases. Rank-2 redemption (alpha-glucan, 0.52 vs 0.32) — model splits between α/β-glucan, GH13 nudges α. Confident-wrong (alpha-glucan classified as fructan, p=1.0) — GH32/3.A.1.1.x are PRTS sucrose markers; ambiguous substrate.</a:t>
+            </a:r>
+          </a:p>
+        </p:txBody>
+      </p:sp>
+      <p:sp>
+        <p:nvSpPr>
+          <p:cNvPr id="6" name="TextBox 5"/>
+          <p:cNvSpPr txBox="1"/>
+          <p:nvPr/>
+        </p:nvSpPr>
+        <p:spPr>
+          <a:xfrm>
+            <a:off x="457200" y="6492240"/>
+            <a:ext cx="11277295" cy="274320"/>
+          </a:xfrm>
+          <a:prstGeom prst="rect">
+            <a:avLst/>
+          </a:prstGeom>
+          <a:noFill/>
+        </p:spPr>
+        <p:txBody>
+          <a:bodyPr wrap="none">
+            <a:spAutoFit/>
+          </a:bodyPr>
+          <a:lstStyle/>
+          <a:p>
+            <a:pPr algn="l"/>
+            <a:r>
+              <a:rPr sz="900" i="1">
+                <a:solidFill>
+                  <a:srgbClr val="7F8C8D"/>
+                </a:solidFill>
+              </a:rPr>
+              <a:t>subFinder substrate prediction — rep_1 reference run</a:t>
+            </a:r>
+          </a:p>
+        </p:txBody>
+      </p:sp>
+    </p:spTree>
+  </p:cSld>
+  <p:clrMapOvr>
+    <a:masterClrMapping/>
+  </p:clrMapOvr>
+</p:sld>
+</file>
+
+<file path=ppt/slides/slide17.xml><?xml version="1.0" encoding="utf-8"?>
+<p:sld xmlns:a="http://schemas.openxmlformats.org/drawingml/2006/main" xmlns:p="http://schemas.openxmlformats.org/presentationml/2006/main" xmlns:r="http://schemas.openxmlformats.org/officeDocument/2006/relationships">
+  <p:cSld>
+    <p:spTree>
+      <p:nvGrpSpPr>
+        <p:cNvPr id="1" name=""/>
+        <p:cNvGrpSpPr/>
+        <p:nvPr/>
+      </p:nvGrpSpPr>
+      <p:grpSpPr/>
+      <p:sp>
+        <p:nvSpPr>
+          <p:cNvPr id="2" name="TextBox 1"/>
+          <p:cNvSpPr txBox="1"/>
+          <p:nvPr/>
+        </p:nvSpPr>
+        <p:spPr>
+          <a:xfrm>
+            <a:off x="548640" y="320040"/>
+            <a:ext cx="11094415" cy="822960"/>
+          </a:xfrm>
+          <a:prstGeom prst="rect">
+            <a:avLst/>
+          </a:prstGeom>
+          <a:noFill/>
+        </p:spPr>
+        <p:txBody>
+          <a:bodyPr wrap="square">
+            <a:spAutoFit/>
+          </a:bodyPr>
+          <a:lstStyle/>
+          <a:p>
+            <a:pPr algn="l"/>
+            <a:r>
+              <a:rPr sz="2800" b="1">
+                <a:solidFill>
+                  <a:srgbClr val="1A3A5C"/>
+                </a:solidFill>
+              </a:rPr>
               <a:t>Internal robustness — accuracy vs train-vocab OOV proportion</a:t>
             </a:r>
           </a:p>
@@ -7327,7 +7885,7 @@
 </p:sld>
 </file>
 
-<file path=ppt/slides/slide15.xml><?xml version="1.0" encoding="utf-8"?>
+<file path=ppt/slides/slide18.xml><?xml version="1.0" encoding="utf-8"?>
 <p:sld xmlns:a="http://schemas.openxmlformats.org/drawingml/2006/main" xmlns:p="http://schemas.openxmlformats.org/presentationml/2006/main" xmlns:r="http://schemas.openxmlformats.org/officeDocument/2006/relationships">
   <p:cSld>
     <p:spTree>
@@ -7512,7 +8070,7 @@
 </p:sld>
 </file>
 
-<file path=ppt/slides/slide16.xml><?xml version="1.0" encoding="utf-8"?>
+<file path=ppt/slides/slide19.xml><?xml version="1.0" encoding="utf-8"?>
 <p:sld xmlns:a="http://schemas.openxmlformats.org/drawingml/2006/main" xmlns:p="http://schemas.openxmlformats.org/presentationml/2006/main" xmlns:r="http://schemas.openxmlformats.org/officeDocument/2006/relationships">
   <p:cSld>
     <p:spTree>
@@ -12133,7 +12691,7 @@
 </p:sld>
 </file>
 
-<file path=ppt/slides/slide17.xml><?xml version="1.0" encoding="utf-8"?>
+<file path=ppt/slides/slide2.xml><?xml version="1.0" encoding="utf-8"?>
 <p:sld xmlns:a="http://schemas.openxmlformats.org/drawingml/2006/main" xmlns:p="http://schemas.openxmlformats.org/presentationml/2006/main" xmlns:r="http://schemas.openxmlformats.org/officeDocument/2006/relationships">
   <p:cSld>
     <p:spTree>
@@ -12172,7 +12730,7 @@
                   <a:srgbClr val="1A3A5C"/>
                 </a:solidFill>
               </a:rPr>
-              <a:t>Appendix · Performance by featurizer family</a:t>
+              <a:t>Problem setup</a:t>
             </a:r>
           </a:p>
         </p:txBody>
@@ -12206,585 +12764,21 @@
                   <a:srgbClr val="7F8C8D"/>
                 </a:solidFill>
               </a:rPr>
-              <a:t>Averaged over all (config, seed, fold) trials sharing the same featurizer family</a:t>
+              <a:t>Predict one of 12 polysaccharide substrate classes from a PUL's gene-token sequence</a:t>
             </a:r>
           </a:p>
         </p:txBody>
       </p:sp>
-      <p:graphicFrame>
-        <p:nvGraphicFramePr>
-          <p:cNvPr id="4" name="Table 3"/>
-          <p:cNvGraphicFramePr>
-            <a:graphicFrameLocks noGrp="1"/>
-          </p:cNvGraphicFramePr>
-          <p:nvPr/>
-        </p:nvGraphicFramePr>
-        <p:xfrm>
-          <a:off x="1371600" y="1463040"/>
-          <a:ext cx="9418320" cy="3291840"/>
-        </p:xfrm>
-        <a:graphic>
-          <a:graphicData uri="http://schemas.openxmlformats.org/drawingml/2006/table">
-            <a:tbl>
-              <a:tblPr firstRow="1" bandRow="1">
-                <a:tableStyleId>{5C22544A-7EE6-4342-B048-85BDC9FD1C3A}</a:tableStyleId>
-              </a:tblPr>
-              <a:tblGrid>
-                <a:gridCol w="2560320"/>
-                <a:gridCol w="1828800"/>
-                <a:gridCol w="1371600"/>
-                <a:gridCol w="1645920"/>
-                <a:gridCol w="2011680"/>
-              </a:tblGrid>
-              <a:tr h="658368">
-                <a:tc>
-                  <a:txBody>
-                    <a:bodyPr/>
-                    <a:lstStyle/>
-                    <a:p>
-                      <a:r>
-                        <a:rPr b="1" sz="1200">
-                          <a:solidFill>
-                            <a:srgbClr val="FFFFFF"/>
-                          </a:solidFill>
-                        </a:rPr>
-                        <a:t>featurizer family</a:t>
-                      </a:r>
-                    </a:p>
-                  </a:txBody>
-                  <a:tcPr>
-                    <a:solidFill>
-                      <a:srgbClr val="1A3A5C"/>
-                    </a:solidFill>
-                  </a:tcPr>
-                </a:tc>
-                <a:tc>
-                  <a:txBody>
-                    <a:bodyPr/>
-                    <a:lstStyle/>
-                    <a:p>
-                      <a:r>
-                        <a:rPr b="1" sz="1200">
-                          <a:solidFill>
-                            <a:srgbClr val="FFFFFF"/>
-                          </a:solidFill>
-                        </a:rPr>
-                        <a:t>mean accuracy</a:t>
-                      </a:r>
-                    </a:p>
-                  </a:txBody>
-                  <a:tcPr>
-                    <a:solidFill>
-                      <a:srgbClr val="1A3A5C"/>
-                    </a:solidFill>
-                  </a:tcPr>
-                </a:tc>
-                <a:tc>
-                  <a:txBody>
-                    <a:bodyPr/>
-                    <a:lstStyle/>
-                    <a:p>
-                      <a:r>
-                        <a:rPr b="1" sz="1200">
-                          <a:solidFill>
-                            <a:srgbClr val="FFFFFF"/>
-                          </a:solidFill>
-                        </a:rPr>
-                        <a:t>std</a:t>
-                      </a:r>
-                    </a:p>
-                  </a:txBody>
-                  <a:tcPr>
-                    <a:solidFill>
-                      <a:srgbClr val="1A3A5C"/>
-                    </a:solidFill>
-                  </a:tcPr>
-                </a:tc>
-                <a:tc>
-                  <a:txBody>
-                    <a:bodyPr/>
-                    <a:lstStyle/>
-                    <a:p>
-                      <a:r>
-                        <a:rPr b="1" sz="1200">
-                          <a:solidFill>
-                            <a:srgbClr val="FFFFFF"/>
-                          </a:solidFill>
-                        </a:rPr>
-                        <a:t>n configs</a:t>
-                      </a:r>
-                    </a:p>
-                  </a:txBody>
-                  <a:tcPr>
-                    <a:solidFill>
-                      <a:srgbClr val="1A3A5C"/>
-                    </a:solidFill>
-                  </a:tcPr>
-                </a:tc>
-                <a:tc>
-                  <a:txBody>
-                    <a:bodyPr/>
-                    <a:lstStyle/>
-                    <a:p>
-                      <a:r>
-                        <a:rPr b="1" sz="1200">
-                          <a:solidFill>
-                            <a:srgbClr val="FFFFFF"/>
-                          </a:solidFill>
-                        </a:rPr>
-                        <a:t>n trials</a:t>
-                      </a:r>
-                    </a:p>
-                  </a:txBody>
-                  <a:tcPr>
-                    <a:solidFill>
-                      <a:srgbClr val="1A3A5C"/>
-                    </a:solidFill>
-                  </a:tcPr>
-                </a:tc>
-              </a:tr>
-              <a:tr h="658368">
-                <a:tc>
-                  <a:txBody>
-                    <a:bodyPr/>
-                    <a:lstStyle/>
-                    <a:p>
-                      <a:r>
-                        <a:rPr sz="1100">
-                          <a:solidFill>
-                            <a:srgbClr val="2C3E50"/>
-                          </a:solidFill>
-                        </a:rPr>
-                        <a:t>CountVec</a:t>
-                      </a:r>
-                    </a:p>
-                  </a:txBody>
-                  <a:tcPr>
-                    <a:solidFill>
-                      <a:srgbClr val="FFFFFF"/>
-                    </a:solidFill>
-                  </a:tcPr>
-                </a:tc>
-                <a:tc>
-                  <a:txBody>
-                    <a:bodyPr/>
-                    <a:lstStyle/>
-                    <a:p>
-                      <a:r>
-                        <a:rPr sz="1100">
-                          <a:solidFill>
-                            <a:srgbClr val="2C3E50"/>
-                          </a:solidFill>
-                        </a:rPr>
-                        <a:t>0.8734</a:t>
-                      </a:r>
-                    </a:p>
-                  </a:txBody>
-                  <a:tcPr>
-                    <a:solidFill>
-                      <a:srgbClr val="FFFFFF"/>
-                    </a:solidFill>
-                  </a:tcPr>
-                </a:tc>
-                <a:tc>
-                  <a:txBody>
-                    <a:bodyPr/>
-                    <a:lstStyle/>
-                    <a:p>
-                      <a:r>
-                        <a:rPr sz="1100">
-                          <a:solidFill>
-                            <a:srgbClr val="2C3E50"/>
-                          </a:solidFill>
-                        </a:rPr>
-                        <a:t>0.0399</a:t>
-                      </a:r>
-                    </a:p>
-                  </a:txBody>
-                  <a:tcPr>
-                    <a:solidFill>
-                      <a:srgbClr val="FFFFFF"/>
-                    </a:solidFill>
-                  </a:tcPr>
-                </a:tc>
-                <a:tc>
-                  <a:txBody>
-                    <a:bodyPr/>
-                    <a:lstStyle/>
-                    <a:p>
-                      <a:r>
-                        <a:rPr sz="1100">
-                          <a:solidFill>
-                            <a:srgbClr val="2C3E50"/>
-                          </a:solidFill>
-                        </a:rPr>
-                        <a:t>2</a:t>
-                      </a:r>
-                    </a:p>
-                  </a:txBody>
-                  <a:tcPr>
-                    <a:solidFill>
-                      <a:srgbClr val="FFFFFF"/>
-                    </a:solidFill>
-                  </a:tcPr>
-                </a:tc>
-                <a:tc>
-                  <a:txBody>
-                    <a:bodyPr/>
-                    <a:lstStyle/>
-                    <a:p>
-                      <a:r>
-                        <a:rPr sz="1100">
-                          <a:solidFill>
-                            <a:srgbClr val="2C3E50"/>
-                          </a:solidFill>
-                        </a:rPr>
-                        <a:t>50</a:t>
-                      </a:r>
-                    </a:p>
-                  </a:txBody>
-                  <a:tcPr>
-                    <a:solidFill>
-                      <a:srgbClr val="FFFFFF"/>
-                    </a:solidFill>
-                  </a:tcPr>
-                </a:tc>
-              </a:tr>
-              <a:tr h="658368">
-                <a:tc>
-                  <a:txBody>
-                    <a:bodyPr/>
-                    <a:lstStyle/>
-                    <a:p>
-                      <a:r>
-                        <a:rPr sz="1100">
-                          <a:solidFill>
-                            <a:srgbClr val="2C3E50"/>
-                          </a:solidFill>
-                        </a:rPr>
-                        <a:t>FastText</a:t>
-                      </a:r>
-                    </a:p>
-                  </a:txBody>
-                  <a:tcPr>
-                    <a:solidFill>
-                      <a:srgbClr val="ECF0F1"/>
-                    </a:solidFill>
-                  </a:tcPr>
-                </a:tc>
-                <a:tc>
-                  <a:txBody>
-                    <a:bodyPr/>
-                    <a:lstStyle/>
-                    <a:p>
-                      <a:r>
-                        <a:rPr sz="1100">
-                          <a:solidFill>
-                            <a:srgbClr val="2C3E50"/>
-                          </a:solidFill>
-                        </a:rPr>
-                        <a:t>0.7928</a:t>
-                      </a:r>
-                    </a:p>
-                  </a:txBody>
-                  <a:tcPr>
-                    <a:solidFill>
-                      <a:srgbClr val="ECF0F1"/>
-                    </a:solidFill>
-                  </a:tcPr>
-                </a:tc>
-                <a:tc>
-                  <a:txBody>
-                    <a:bodyPr/>
-                    <a:lstStyle/>
-                    <a:p>
-                      <a:r>
-                        <a:rPr sz="1100">
-                          <a:solidFill>
-                            <a:srgbClr val="2C3E50"/>
-                          </a:solidFill>
-                        </a:rPr>
-                        <a:t>0.0514</a:t>
-                      </a:r>
-                    </a:p>
-                  </a:txBody>
-                  <a:tcPr>
-                    <a:solidFill>
-                      <a:srgbClr val="ECF0F1"/>
-                    </a:solidFill>
-                  </a:tcPr>
-                </a:tc>
-                <a:tc>
-                  <a:txBody>
-                    <a:bodyPr/>
-                    <a:lstStyle/>
-                    <a:p>
-                      <a:r>
-                        <a:rPr sz="1100">
-                          <a:solidFill>
-                            <a:srgbClr val="2C3E50"/>
-                          </a:solidFill>
-                        </a:rPr>
-                        <a:t>11</a:t>
-                      </a:r>
-                    </a:p>
-                  </a:txBody>
-                  <a:tcPr>
-                    <a:solidFill>
-                      <a:srgbClr val="ECF0F1"/>
-                    </a:solidFill>
-                  </a:tcPr>
-                </a:tc>
-                <a:tc>
-                  <a:txBody>
-                    <a:bodyPr/>
-                    <a:lstStyle/>
-                    <a:p>
-                      <a:r>
-                        <a:rPr sz="1100">
-                          <a:solidFill>
-                            <a:srgbClr val="2C3E50"/>
-                          </a:solidFill>
-                        </a:rPr>
-                        <a:t>275</a:t>
-                      </a:r>
-                    </a:p>
-                  </a:txBody>
-                  <a:tcPr>
-                    <a:solidFill>
-                      <a:srgbClr val="ECF0F1"/>
-                    </a:solidFill>
-                  </a:tcPr>
-                </a:tc>
-              </a:tr>
-              <a:tr h="658368">
-                <a:tc>
-                  <a:txBody>
-                    <a:bodyPr/>
-                    <a:lstStyle/>
-                    <a:p>
-                      <a:r>
-                        <a:rPr sz="1100">
-                          <a:solidFill>
-                            <a:srgbClr val="2C3E50"/>
-                          </a:solidFill>
-                        </a:rPr>
-                        <a:t>Word2Vec</a:t>
-                      </a:r>
-                    </a:p>
-                  </a:txBody>
-                  <a:tcPr>
-                    <a:solidFill>
-                      <a:srgbClr val="FFFFFF"/>
-                    </a:solidFill>
-                  </a:tcPr>
-                </a:tc>
-                <a:tc>
-                  <a:txBody>
-                    <a:bodyPr/>
-                    <a:lstStyle/>
-                    <a:p>
-                      <a:r>
-                        <a:rPr sz="1100">
-                          <a:solidFill>
-                            <a:srgbClr val="2C3E50"/>
-                          </a:solidFill>
-                        </a:rPr>
-                        <a:t>0.7752</a:t>
-                      </a:r>
-                    </a:p>
-                  </a:txBody>
-                  <a:tcPr>
-                    <a:solidFill>
-                      <a:srgbClr val="FFFFFF"/>
-                    </a:solidFill>
-                  </a:tcPr>
-                </a:tc>
-                <a:tc>
-                  <a:txBody>
-                    <a:bodyPr/>
-                    <a:lstStyle/>
-                    <a:p>
-                      <a:r>
-                        <a:rPr sz="1100">
-                          <a:solidFill>
-                            <a:srgbClr val="2C3E50"/>
-                          </a:solidFill>
-                        </a:rPr>
-                        <a:t>0.0386</a:t>
-                      </a:r>
-                    </a:p>
-                  </a:txBody>
-                  <a:tcPr>
-                    <a:solidFill>
-                      <a:srgbClr val="FFFFFF"/>
-                    </a:solidFill>
-                  </a:tcPr>
-                </a:tc>
-                <a:tc>
-                  <a:txBody>
-                    <a:bodyPr/>
-                    <a:lstStyle/>
-                    <a:p>
-                      <a:r>
-                        <a:rPr sz="1100">
-                          <a:solidFill>
-                            <a:srgbClr val="2C3E50"/>
-                          </a:solidFill>
-                        </a:rPr>
-                        <a:t>10</a:t>
-                      </a:r>
-                    </a:p>
-                  </a:txBody>
-                  <a:tcPr>
-                    <a:solidFill>
-                      <a:srgbClr val="FFFFFF"/>
-                    </a:solidFill>
-                  </a:tcPr>
-                </a:tc>
-                <a:tc>
-                  <a:txBody>
-                    <a:bodyPr/>
-                    <a:lstStyle/>
-                    <a:p>
-                      <a:r>
-                        <a:rPr sz="1100">
-                          <a:solidFill>
-                            <a:srgbClr val="2C3E50"/>
-                          </a:solidFill>
-                        </a:rPr>
-                        <a:t>250</a:t>
-                      </a:r>
-                    </a:p>
-                  </a:txBody>
-                  <a:tcPr>
-                    <a:solidFill>
-                      <a:srgbClr val="FFFFFF"/>
-                    </a:solidFill>
-                  </a:tcPr>
-                </a:tc>
-              </a:tr>
-              <a:tr h="658368">
-                <a:tc>
-                  <a:txBody>
-                    <a:bodyPr/>
-                    <a:lstStyle/>
-                    <a:p>
-                      <a:r>
-                        <a:rPr sz="1100">
-                          <a:solidFill>
-                            <a:srgbClr val="2C3E50"/>
-                          </a:solidFill>
-                        </a:rPr>
-                        <a:t>Doc2Vec</a:t>
-                      </a:r>
-                    </a:p>
-                  </a:txBody>
-                  <a:tcPr>
-                    <a:solidFill>
-                      <a:srgbClr val="ECF0F1"/>
-                    </a:solidFill>
-                  </a:tcPr>
-                </a:tc>
-                <a:tc>
-                  <a:txBody>
-                    <a:bodyPr/>
-                    <a:lstStyle/>
-                    <a:p>
-                      <a:r>
-                        <a:rPr sz="1100">
-                          <a:solidFill>
-                            <a:srgbClr val="2C3E50"/>
-                          </a:solidFill>
-                        </a:rPr>
-                        <a:t>0.7508</a:t>
-                      </a:r>
-                    </a:p>
-                  </a:txBody>
-                  <a:tcPr>
-                    <a:solidFill>
-                      <a:srgbClr val="ECF0F1"/>
-                    </a:solidFill>
-                  </a:tcPr>
-                </a:tc>
-                <a:tc>
-                  <a:txBody>
-                    <a:bodyPr/>
-                    <a:lstStyle/>
-                    <a:p>
-                      <a:r>
-                        <a:rPr sz="1100">
-                          <a:solidFill>
-                            <a:srgbClr val="2C3E50"/>
-                          </a:solidFill>
-                        </a:rPr>
-                        <a:t>0.0394</a:t>
-                      </a:r>
-                    </a:p>
-                  </a:txBody>
-                  <a:tcPr>
-                    <a:solidFill>
-                      <a:srgbClr val="ECF0F1"/>
-                    </a:solidFill>
-                  </a:tcPr>
-                </a:tc>
-                <a:tc>
-                  <a:txBody>
-                    <a:bodyPr/>
-                    <a:lstStyle/>
-                    <a:p>
-                      <a:r>
-                        <a:rPr sz="1100">
-                          <a:solidFill>
-                            <a:srgbClr val="2C3E50"/>
-                          </a:solidFill>
-                        </a:rPr>
-                        <a:t>6</a:t>
-                      </a:r>
-                    </a:p>
-                  </a:txBody>
-                  <a:tcPr>
-                    <a:solidFill>
-                      <a:srgbClr val="ECF0F1"/>
-                    </a:solidFill>
-                  </a:tcPr>
-                </a:tc>
-                <a:tc>
-                  <a:txBody>
-                    <a:bodyPr/>
-                    <a:lstStyle/>
-                    <a:p>
-                      <a:r>
-                        <a:rPr sz="1100">
-                          <a:solidFill>
-                            <a:srgbClr val="2C3E50"/>
-                          </a:solidFill>
-                        </a:rPr>
-                        <a:t>150</a:t>
-                      </a:r>
-                    </a:p>
-                  </a:txBody>
-                  <a:tcPr>
-                    <a:solidFill>
-                      <a:srgbClr val="ECF0F1"/>
-                    </a:solidFill>
-                  </a:tcPr>
-                </a:tc>
-              </a:tr>
-            </a:tbl>
-          </a:graphicData>
-        </a:graphic>
-      </p:graphicFrame>
       <p:sp>
         <p:nvSpPr>
-          <p:cNvPr id="5" name="TextBox 4"/>
+          <p:cNvPr id="4" name="TextBox 3"/>
           <p:cNvSpPr txBox="1"/>
           <p:nvPr/>
         </p:nvSpPr>
         <p:spPr>
           <a:xfrm>
-            <a:off x="1371600" y="5029200"/>
-            <a:ext cx="9418320" cy="914400"/>
+            <a:off x="548640" y="1645920"/>
+            <a:ext cx="10515600" cy="4572000"/>
           </a:xfrm>
           <a:prstGeom prst="rect">
             <a:avLst/>
@@ -12797,20 +12791,102 @@
           </a:bodyPr>
           <a:lstStyle/>
           <a:p>
+            <a:pPr algn="l">
+              <a:spcAft>
+                <a:spcPts val="1400"/>
+              </a:spcAft>
+            </a:pPr>
             <a:r>
-              <a:rPr sz="1100" i="1">
+              <a:rPr sz="1500" b="1">
+                <a:solidFill>
+                  <a:srgbClr val="1A3A5C"/>
+                </a:solidFill>
+              </a:rPr>
+              <a:t>Dataset — </a:t>
+            </a:r>
+            <a:r>
+              <a:rPr sz="1500">
                 <a:solidFill>
                   <a:srgbClr val="2C3E50"/>
                 </a:solidFill>
               </a:rPr>
-              <a:t>Note: averages mix in different classifier choices. Pattern — CountVec leads because it carries our ExtraTrees winner; FastText/Word2Vec/Doc2Vec families are pulled down by their BRF/DL classifier pairings.</a:t>
+              <a:t>1,030 labeled PULs across 12 substrates (alginate, alpha-glucan, alpha-mannan, arabinogalactan, beta-glucan, beta-mannan, chitin, fructan, galactan, host glycan, pectin, xylan)</a:t>
+            </a:r>
+          </a:p>
+          <a:p>
+            <a:pPr algn="l">
+              <a:spcAft>
+                <a:spcPts val="1400"/>
+              </a:spcAft>
+            </a:pPr>
+            <a:r>
+              <a:rPr sz="1500" b="1">
+                <a:solidFill>
+                  <a:srgbClr val="1A3A5C"/>
+                </a:solidFill>
+              </a:rPr>
+              <a:t>Each PUL — </a:t>
+            </a:r>
+            <a:r>
+              <a:rPr sz="1500">
+                <a:solidFill>
+                  <a:srgbClr val="2C3E50"/>
+                </a:solidFill>
+              </a:rPr>
+              <a:t>a comma/pipe-separated string of CAZy family IDs, transporter classification IDs, transcription-factor types, and null padding</a:t>
+            </a:r>
+          </a:p>
+          <a:p>
+            <a:pPr algn="l">
+              <a:spcAft>
+                <a:spcPts val="1400"/>
+              </a:spcAft>
+            </a:pPr>
+            <a:r>
+              <a:rPr sz="1500" b="1">
+                <a:solidFill>
+                  <a:srgbClr val="1A3A5C"/>
+                </a:solidFill>
+              </a:rPr>
+              <a:t>Cross-validation — </a:t>
+            </a:r>
+            <a:r>
+              <a:rPr sz="1500">
+                <a:solidFill>
+                  <a:srgbClr val="2C3E50"/>
+                </a:solidFill>
+              </a:rPr>
+              <a:t>5-repeat × 5-fold Repeated Stratified K-Fold (n=25 trials per configuration) — leak-free: word-embedding models retrained per fold</a:t>
+            </a:r>
+          </a:p>
+          <a:p>
+            <a:pPr algn="l">
+              <a:spcAft>
+                <a:spcPts val="1400"/>
+              </a:spcAft>
+            </a:pPr>
+            <a:r>
+              <a:rPr sz="1500" b="1">
+                <a:solidFill>
+                  <a:srgbClr val="1A3A5C"/>
+                </a:solidFill>
+              </a:rPr>
+              <a:t>Goal — </a:t>
+            </a:r>
+            <a:r>
+              <a:rPr sz="1500">
+                <a:solidFill>
+                  <a:srgbClr val="2C3E50"/>
+                </a:solidFill>
+              </a:rPr>
+              <a:t>(1) maximise predictive accuracy, (2) emit calibrated probabilities, (3) produce per-PUL signature-gene attributions that match literature CAZy knowledge</a:t>
             </a:r>
           </a:p>
         </p:txBody>
       </p:sp>
       <p:sp>
         <p:nvSpPr>
-          <p:cNvPr id="6" name="TextBox 5"/>
+          <p:cNvPr id="5" name="TextBox 4"/>
           <p:cNvSpPr txBox="1"/>
           <p:nvPr/>
         </p:nvSpPr>
@@ -12850,7 +12926,7 @@
 </p:sld>
 </file>
 
-<file path=ppt/slides/slide18.xml><?xml version="1.0" encoding="utf-8"?>
+<file path=ppt/slides/slide20.xml><?xml version="1.0" encoding="utf-8"?>
 <p:sld xmlns:a="http://schemas.openxmlformats.org/drawingml/2006/main" xmlns:p="http://schemas.openxmlformats.org/presentationml/2006/main" xmlns:r="http://schemas.openxmlformats.org/officeDocument/2006/relationships">
   <p:cSld>
     <p:spTree>
@@ -12889,6 +12965,723 @@
                   <a:srgbClr val="1A3A5C"/>
                 </a:solidFill>
               </a:rPr>
+              <a:t>Appendix · Performance by featurizer family</a:t>
+            </a:r>
+          </a:p>
+        </p:txBody>
+      </p:sp>
+      <p:sp>
+        <p:nvSpPr>
+          <p:cNvPr id="3" name="TextBox 2"/>
+          <p:cNvSpPr txBox="1"/>
+          <p:nvPr/>
+        </p:nvSpPr>
+        <p:spPr>
+          <a:xfrm>
+            <a:off x="548640" y="960120"/>
+            <a:ext cx="11094415" cy="365760"/>
+          </a:xfrm>
+          <a:prstGeom prst="rect">
+            <a:avLst/>
+          </a:prstGeom>
+          <a:noFill/>
+        </p:spPr>
+        <p:txBody>
+          <a:bodyPr wrap="square">
+            <a:spAutoFit/>
+          </a:bodyPr>
+          <a:lstStyle/>
+          <a:p>
+            <a:pPr algn="l"/>
+            <a:r>
+              <a:rPr sz="1400">
+                <a:solidFill>
+                  <a:srgbClr val="7F8C8D"/>
+                </a:solidFill>
+              </a:rPr>
+              <a:t>Averaged over all (config, seed, fold) trials sharing the same featurizer family</a:t>
+            </a:r>
+          </a:p>
+        </p:txBody>
+      </p:sp>
+      <p:graphicFrame>
+        <p:nvGraphicFramePr>
+          <p:cNvPr id="4" name="Table 3"/>
+          <p:cNvGraphicFramePr>
+            <a:graphicFrameLocks noGrp="1"/>
+          </p:cNvGraphicFramePr>
+          <p:nvPr/>
+        </p:nvGraphicFramePr>
+        <p:xfrm>
+          <a:off x="1371600" y="1463040"/>
+          <a:ext cx="9418320" cy="3291840"/>
+        </p:xfrm>
+        <a:graphic>
+          <a:graphicData uri="http://schemas.openxmlformats.org/drawingml/2006/table">
+            <a:tbl>
+              <a:tblPr firstRow="1" bandRow="1">
+                <a:tableStyleId>{5C22544A-7EE6-4342-B048-85BDC9FD1C3A}</a:tableStyleId>
+              </a:tblPr>
+              <a:tblGrid>
+                <a:gridCol w="2560320"/>
+                <a:gridCol w="1828800"/>
+                <a:gridCol w="1371600"/>
+                <a:gridCol w="1645920"/>
+                <a:gridCol w="2011680"/>
+              </a:tblGrid>
+              <a:tr h="658368">
+                <a:tc>
+                  <a:txBody>
+                    <a:bodyPr/>
+                    <a:lstStyle/>
+                    <a:p>
+                      <a:r>
+                        <a:rPr b="1" sz="1200">
+                          <a:solidFill>
+                            <a:srgbClr val="FFFFFF"/>
+                          </a:solidFill>
+                        </a:rPr>
+                        <a:t>featurizer family</a:t>
+                      </a:r>
+                    </a:p>
+                  </a:txBody>
+                  <a:tcPr>
+                    <a:solidFill>
+                      <a:srgbClr val="1A3A5C"/>
+                    </a:solidFill>
+                  </a:tcPr>
+                </a:tc>
+                <a:tc>
+                  <a:txBody>
+                    <a:bodyPr/>
+                    <a:lstStyle/>
+                    <a:p>
+                      <a:r>
+                        <a:rPr b="1" sz="1200">
+                          <a:solidFill>
+                            <a:srgbClr val="FFFFFF"/>
+                          </a:solidFill>
+                        </a:rPr>
+                        <a:t>mean accuracy</a:t>
+                      </a:r>
+                    </a:p>
+                  </a:txBody>
+                  <a:tcPr>
+                    <a:solidFill>
+                      <a:srgbClr val="1A3A5C"/>
+                    </a:solidFill>
+                  </a:tcPr>
+                </a:tc>
+                <a:tc>
+                  <a:txBody>
+                    <a:bodyPr/>
+                    <a:lstStyle/>
+                    <a:p>
+                      <a:r>
+                        <a:rPr b="1" sz="1200">
+                          <a:solidFill>
+                            <a:srgbClr val="FFFFFF"/>
+                          </a:solidFill>
+                        </a:rPr>
+                        <a:t>std</a:t>
+                      </a:r>
+                    </a:p>
+                  </a:txBody>
+                  <a:tcPr>
+                    <a:solidFill>
+                      <a:srgbClr val="1A3A5C"/>
+                    </a:solidFill>
+                  </a:tcPr>
+                </a:tc>
+                <a:tc>
+                  <a:txBody>
+                    <a:bodyPr/>
+                    <a:lstStyle/>
+                    <a:p>
+                      <a:r>
+                        <a:rPr b="1" sz="1200">
+                          <a:solidFill>
+                            <a:srgbClr val="FFFFFF"/>
+                          </a:solidFill>
+                        </a:rPr>
+                        <a:t>n configs</a:t>
+                      </a:r>
+                    </a:p>
+                  </a:txBody>
+                  <a:tcPr>
+                    <a:solidFill>
+                      <a:srgbClr val="1A3A5C"/>
+                    </a:solidFill>
+                  </a:tcPr>
+                </a:tc>
+                <a:tc>
+                  <a:txBody>
+                    <a:bodyPr/>
+                    <a:lstStyle/>
+                    <a:p>
+                      <a:r>
+                        <a:rPr b="1" sz="1200">
+                          <a:solidFill>
+                            <a:srgbClr val="FFFFFF"/>
+                          </a:solidFill>
+                        </a:rPr>
+                        <a:t>n trials</a:t>
+                      </a:r>
+                    </a:p>
+                  </a:txBody>
+                  <a:tcPr>
+                    <a:solidFill>
+                      <a:srgbClr val="1A3A5C"/>
+                    </a:solidFill>
+                  </a:tcPr>
+                </a:tc>
+              </a:tr>
+              <a:tr h="658368">
+                <a:tc>
+                  <a:txBody>
+                    <a:bodyPr/>
+                    <a:lstStyle/>
+                    <a:p>
+                      <a:r>
+                        <a:rPr sz="1100">
+                          <a:solidFill>
+                            <a:srgbClr val="2C3E50"/>
+                          </a:solidFill>
+                        </a:rPr>
+                        <a:t>CountVec</a:t>
+                      </a:r>
+                    </a:p>
+                  </a:txBody>
+                  <a:tcPr>
+                    <a:solidFill>
+                      <a:srgbClr val="FFFFFF"/>
+                    </a:solidFill>
+                  </a:tcPr>
+                </a:tc>
+                <a:tc>
+                  <a:txBody>
+                    <a:bodyPr/>
+                    <a:lstStyle/>
+                    <a:p>
+                      <a:r>
+                        <a:rPr sz="1100">
+                          <a:solidFill>
+                            <a:srgbClr val="2C3E50"/>
+                          </a:solidFill>
+                        </a:rPr>
+                        <a:t>0.8734</a:t>
+                      </a:r>
+                    </a:p>
+                  </a:txBody>
+                  <a:tcPr>
+                    <a:solidFill>
+                      <a:srgbClr val="FFFFFF"/>
+                    </a:solidFill>
+                  </a:tcPr>
+                </a:tc>
+                <a:tc>
+                  <a:txBody>
+                    <a:bodyPr/>
+                    <a:lstStyle/>
+                    <a:p>
+                      <a:r>
+                        <a:rPr sz="1100">
+                          <a:solidFill>
+                            <a:srgbClr val="2C3E50"/>
+                          </a:solidFill>
+                        </a:rPr>
+                        <a:t>0.0399</a:t>
+                      </a:r>
+                    </a:p>
+                  </a:txBody>
+                  <a:tcPr>
+                    <a:solidFill>
+                      <a:srgbClr val="FFFFFF"/>
+                    </a:solidFill>
+                  </a:tcPr>
+                </a:tc>
+                <a:tc>
+                  <a:txBody>
+                    <a:bodyPr/>
+                    <a:lstStyle/>
+                    <a:p>
+                      <a:r>
+                        <a:rPr sz="1100">
+                          <a:solidFill>
+                            <a:srgbClr val="2C3E50"/>
+                          </a:solidFill>
+                        </a:rPr>
+                        <a:t>2</a:t>
+                      </a:r>
+                    </a:p>
+                  </a:txBody>
+                  <a:tcPr>
+                    <a:solidFill>
+                      <a:srgbClr val="FFFFFF"/>
+                    </a:solidFill>
+                  </a:tcPr>
+                </a:tc>
+                <a:tc>
+                  <a:txBody>
+                    <a:bodyPr/>
+                    <a:lstStyle/>
+                    <a:p>
+                      <a:r>
+                        <a:rPr sz="1100">
+                          <a:solidFill>
+                            <a:srgbClr val="2C3E50"/>
+                          </a:solidFill>
+                        </a:rPr>
+                        <a:t>50</a:t>
+                      </a:r>
+                    </a:p>
+                  </a:txBody>
+                  <a:tcPr>
+                    <a:solidFill>
+                      <a:srgbClr val="FFFFFF"/>
+                    </a:solidFill>
+                  </a:tcPr>
+                </a:tc>
+              </a:tr>
+              <a:tr h="658368">
+                <a:tc>
+                  <a:txBody>
+                    <a:bodyPr/>
+                    <a:lstStyle/>
+                    <a:p>
+                      <a:r>
+                        <a:rPr sz="1100">
+                          <a:solidFill>
+                            <a:srgbClr val="2C3E50"/>
+                          </a:solidFill>
+                        </a:rPr>
+                        <a:t>FastText</a:t>
+                      </a:r>
+                    </a:p>
+                  </a:txBody>
+                  <a:tcPr>
+                    <a:solidFill>
+                      <a:srgbClr val="ECF0F1"/>
+                    </a:solidFill>
+                  </a:tcPr>
+                </a:tc>
+                <a:tc>
+                  <a:txBody>
+                    <a:bodyPr/>
+                    <a:lstStyle/>
+                    <a:p>
+                      <a:r>
+                        <a:rPr sz="1100">
+                          <a:solidFill>
+                            <a:srgbClr val="2C3E50"/>
+                          </a:solidFill>
+                        </a:rPr>
+                        <a:t>0.7928</a:t>
+                      </a:r>
+                    </a:p>
+                  </a:txBody>
+                  <a:tcPr>
+                    <a:solidFill>
+                      <a:srgbClr val="ECF0F1"/>
+                    </a:solidFill>
+                  </a:tcPr>
+                </a:tc>
+                <a:tc>
+                  <a:txBody>
+                    <a:bodyPr/>
+                    <a:lstStyle/>
+                    <a:p>
+                      <a:r>
+                        <a:rPr sz="1100">
+                          <a:solidFill>
+                            <a:srgbClr val="2C3E50"/>
+                          </a:solidFill>
+                        </a:rPr>
+                        <a:t>0.0514</a:t>
+                      </a:r>
+                    </a:p>
+                  </a:txBody>
+                  <a:tcPr>
+                    <a:solidFill>
+                      <a:srgbClr val="ECF0F1"/>
+                    </a:solidFill>
+                  </a:tcPr>
+                </a:tc>
+                <a:tc>
+                  <a:txBody>
+                    <a:bodyPr/>
+                    <a:lstStyle/>
+                    <a:p>
+                      <a:r>
+                        <a:rPr sz="1100">
+                          <a:solidFill>
+                            <a:srgbClr val="2C3E50"/>
+                          </a:solidFill>
+                        </a:rPr>
+                        <a:t>11</a:t>
+                      </a:r>
+                    </a:p>
+                  </a:txBody>
+                  <a:tcPr>
+                    <a:solidFill>
+                      <a:srgbClr val="ECF0F1"/>
+                    </a:solidFill>
+                  </a:tcPr>
+                </a:tc>
+                <a:tc>
+                  <a:txBody>
+                    <a:bodyPr/>
+                    <a:lstStyle/>
+                    <a:p>
+                      <a:r>
+                        <a:rPr sz="1100">
+                          <a:solidFill>
+                            <a:srgbClr val="2C3E50"/>
+                          </a:solidFill>
+                        </a:rPr>
+                        <a:t>275</a:t>
+                      </a:r>
+                    </a:p>
+                  </a:txBody>
+                  <a:tcPr>
+                    <a:solidFill>
+                      <a:srgbClr val="ECF0F1"/>
+                    </a:solidFill>
+                  </a:tcPr>
+                </a:tc>
+              </a:tr>
+              <a:tr h="658368">
+                <a:tc>
+                  <a:txBody>
+                    <a:bodyPr/>
+                    <a:lstStyle/>
+                    <a:p>
+                      <a:r>
+                        <a:rPr sz="1100">
+                          <a:solidFill>
+                            <a:srgbClr val="2C3E50"/>
+                          </a:solidFill>
+                        </a:rPr>
+                        <a:t>Word2Vec</a:t>
+                      </a:r>
+                    </a:p>
+                  </a:txBody>
+                  <a:tcPr>
+                    <a:solidFill>
+                      <a:srgbClr val="FFFFFF"/>
+                    </a:solidFill>
+                  </a:tcPr>
+                </a:tc>
+                <a:tc>
+                  <a:txBody>
+                    <a:bodyPr/>
+                    <a:lstStyle/>
+                    <a:p>
+                      <a:r>
+                        <a:rPr sz="1100">
+                          <a:solidFill>
+                            <a:srgbClr val="2C3E50"/>
+                          </a:solidFill>
+                        </a:rPr>
+                        <a:t>0.7752</a:t>
+                      </a:r>
+                    </a:p>
+                  </a:txBody>
+                  <a:tcPr>
+                    <a:solidFill>
+                      <a:srgbClr val="FFFFFF"/>
+                    </a:solidFill>
+                  </a:tcPr>
+                </a:tc>
+                <a:tc>
+                  <a:txBody>
+                    <a:bodyPr/>
+                    <a:lstStyle/>
+                    <a:p>
+                      <a:r>
+                        <a:rPr sz="1100">
+                          <a:solidFill>
+                            <a:srgbClr val="2C3E50"/>
+                          </a:solidFill>
+                        </a:rPr>
+                        <a:t>0.0386</a:t>
+                      </a:r>
+                    </a:p>
+                  </a:txBody>
+                  <a:tcPr>
+                    <a:solidFill>
+                      <a:srgbClr val="FFFFFF"/>
+                    </a:solidFill>
+                  </a:tcPr>
+                </a:tc>
+                <a:tc>
+                  <a:txBody>
+                    <a:bodyPr/>
+                    <a:lstStyle/>
+                    <a:p>
+                      <a:r>
+                        <a:rPr sz="1100">
+                          <a:solidFill>
+                            <a:srgbClr val="2C3E50"/>
+                          </a:solidFill>
+                        </a:rPr>
+                        <a:t>10</a:t>
+                      </a:r>
+                    </a:p>
+                  </a:txBody>
+                  <a:tcPr>
+                    <a:solidFill>
+                      <a:srgbClr val="FFFFFF"/>
+                    </a:solidFill>
+                  </a:tcPr>
+                </a:tc>
+                <a:tc>
+                  <a:txBody>
+                    <a:bodyPr/>
+                    <a:lstStyle/>
+                    <a:p>
+                      <a:r>
+                        <a:rPr sz="1100">
+                          <a:solidFill>
+                            <a:srgbClr val="2C3E50"/>
+                          </a:solidFill>
+                        </a:rPr>
+                        <a:t>250</a:t>
+                      </a:r>
+                    </a:p>
+                  </a:txBody>
+                  <a:tcPr>
+                    <a:solidFill>
+                      <a:srgbClr val="FFFFFF"/>
+                    </a:solidFill>
+                  </a:tcPr>
+                </a:tc>
+              </a:tr>
+              <a:tr h="658368">
+                <a:tc>
+                  <a:txBody>
+                    <a:bodyPr/>
+                    <a:lstStyle/>
+                    <a:p>
+                      <a:r>
+                        <a:rPr sz="1100">
+                          <a:solidFill>
+                            <a:srgbClr val="2C3E50"/>
+                          </a:solidFill>
+                        </a:rPr>
+                        <a:t>Doc2Vec</a:t>
+                      </a:r>
+                    </a:p>
+                  </a:txBody>
+                  <a:tcPr>
+                    <a:solidFill>
+                      <a:srgbClr val="ECF0F1"/>
+                    </a:solidFill>
+                  </a:tcPr>
+                </a:tc>
+                <a:tc>
+                  <a:txBody>
+                    <a:bodyPr/>
+                    <a:lstStyle/>
+                    <a:p>
+                      <a:r>
+                        <a:rPr sz="1100">
+                          <a:solidFill>
+                            <a:srgbClr val="2C3E50"/>
+                          </a:solidFill>
+                        </a:rPr>
+                        <a:t>0.7508</a:t>
+                      </a:r>
+                    </a:p>
+                  </a:txBody>
+                  <a:tcPr>
+                    <a:solidFill>
+                      <a:srgbClr val="ECF0F1"/>
+                    </a:solidFill>
+                  </a:tcPr>
+                </a:tc>
+                <a:tc>
+                  <a:txBody>
+                    <a:bodyPr/>
+                    <a:lstStyle/>
+                    <a:p>
+                      <a:r>
+                        <a:rPr sz="1100">
+                          <a:solidFill>
+                            <a:srgbClr val="2C3E50"/>
+                          </a:solidFill>
+                        </a:rPr>
+                        <a:t>0.0394</a:t>
+                      </a:r>
+                    </a:p>
+                  </a:txBody>
+                  <a:tcPr>
+                    <a:solidFill>
+                      <a:srgbClr val="ECF0F1"/>
+                    </a:solidFill>
+                  </a:tcPr>
+                </a:tc>
+                <a:tc>
+                  <a:txBody>
+                    <a:bodyPr/>
+                    <a:lstStyle/>
+                    <a:p>
+                      <a:r>
+                        <a:rPr sz="1100">
+                          <a:solidFill>
+                            <a:srgbClr val="2C3E50"/>
+                          </a:solidFill>
+                        </a:rPr>
+                        <a:t>6</a:t>
+                      </a:r>
+                    </a:p>
+                  </a:txBody>
+                  <a:tcPr>
+                    <a:solidFill>
+                      <a:srgbClr val="ECF0F1"/>
+                    </a:solidFill>
+                  </a:tcPr>
+                </a:tc>
+                <a:tc>
+                  <a:txBody>
+                    <a:bodyPr/>
+                    <a:lstStyle/>
+                    <a:p>
+                      <a:r>
+                        <a:rPr sz="1100">
+                          <a:solidFill>
+                            <a:srgbClr val="2C3E50"/>
+                          </a:solidFill>
+                        </a:rPr>
+                        <a:t>150</a:t>
+                      </a:r>
+                    </a:p>
+                  </a:txBody>
+                  <a:tcPr>
+                    <a:solidFill>
+                      <a:srgbClr val="ECF0F1"/>
+                    </a:solidFill>
+                  </a:tcPr>
+                </a:tc>
+              </a:tr>
+            </a:tbl>
+          </a:graphicData>
+        </a:graphic>
+      </p:graphicFrame>
+      <p:sp>
+        <p:nvSpPr>
+          <p:cNvPr id="5" name="TextBox 4"/>
+          <p:cNvSpPr txBox="1"/>
+          <p:nvPr/>
+        </p:nvSpPr>
+        <p:spPr>
+          <a:xfrm>
+            <a:off x="1371600" y="5029200"/>
+            <a:ext cx="9418320" cy="914400"/>
+          </a:xfrm>
+          <a:prstGeom prst="rect">
+            <a:avLst/>
+          </a:prstGeom>
+          <a:noFill/>
+        </p:spPr>
+        <p:txBody>
+          <a:bodyPr wrap="square">
+            <a:spAutoFit/>
+          </a:bodyPr>
+          <a:lstStyle/>
+          <a:p>
+            <a:r>
+              <a:rPr sz="1100" i="1">
+                <a:solidFill>
+                  <a:srgbClr val="2C3E50"/>
+                </a:solidFill>
+              </a:rPr>
+              <a:t>Note: averages mix in different classifier choices. Pattern — CountVec leads because it carries our ExtraTrees winner; FastText/Word2Vec/Doc2Vec families are pulled down by their BRF/DL classifier pairings.</a:t>
+            </a:r>
+          </a:p>
+        </p:txBody>
+      </p:sp>
+      <p:sp>
+        <p:nvSpPr>
+          <p:cNvPr id="6" name="TextBox 5"/>
+          <p:cNvSpPr txBox="1"/>
+          <p:nvPr/>
+        </p:nvSpPr>
+        <p:spPr>
+          <a:xfrm>
+            <a:off x="457200" y="6492240"/>
+            <a:ext cx="11277295" cy="274320"/>
+          </a:xfrm>
+          <a:prstGeom prst="rect">
+            <a:avLst/>
+          </a:prstGeom>
+          <a:noFill/>
+        </p:spPr>
+        <p:txBody>
+          <a:bodyPr wrap="none">
+            <a:spAutoFit/>
+          </a:bodyPr>
+          <a:lstStyle/>
+          <a:p>
+            <a:pPr algn="l"/>
+            <a:r>
+              <a:rPr sz="900" i="1">
+                <a:solidFill>
+                  <a:srgbClr val="7F8C8D"/>
+                </a:solidFill>
+              </a:rPr>
+              <a:t>subFinder substrate prediction — rep_1 reference run</a:t>
+            </a:r>
+          </a:p>
+        </p:txBody>
+      </p:sp>
+    </p:spTree>
+  </p:cSld>
+  <p:clrMapOvr>
+    <a:masterClrMapping/>
+  </p:clrMapOvr>
+</p:sld>
+</file>
+
+<file path=ppt/slides/slide21.xml><?xml version="1.0" encoding="utf-8"?>
+<p:sld xmlns:a="http://schemas.openxmlformats.org/drawingml/2006/main" xmlns:p="http://schemas.openxmlformats.org/presentationml/2006/main" xmlns:r="http://schemas.openxmlformats.org/officeDocument/2006/relationships">
+  <p:cSld>
+    <p:spTree>
+      <p:nvGrpSpPr>
+        <p:cNvPr id="1" name=""/>
+        <p:cNvGrpSpPr/>
+        <p:nvPr/>
+      </p:nvGrpSpPr>
+      <p:grpSpPr/>
+      <p:sp>
+        <p:nvSpPr>
+          <p:cNvPr id="2" name="TextBox 1"/>
+          <p:cNvSpPr txBox="1"/>
+          <p:nvPr/>
+        </p:nvSpPr>
+        <p:spPr>
+          <a:xfrm>
+            <a:off x="548640" y="320040"/>
+            <a:ext cx="11094415" cy="822960"/>
+          </a:xfrm>
+          <a:prstGeom prst="rect">
+            <a:avLst/>
+          </a:prstGeom>
+          <a:noFill/>
+        </p:spPr>
+        <p:txBody>
+          <a:bodyPr wrap="square">
+            <a:spAutoFit/>
+          </a:bodyPr>
+          <a:lstStyle/>
+          <a:p>
+            <a:pPr algn="l"/>
+            <a:r>
+              <a:rPr sz="2800" b="1">
+                <a:solidFill>
+                  <a:srgbClr val="1A3A5C"/>
+                </a:solidFill>
+              </a:rPr>
               <a:t>Appendix · Performance by classifier family</a:t>
             </a:r>
           </a:p>
@@ -13781,7 +14574,7 @@
 </p:sld>
 </file>
 
-<file path=ppt/slides/slide19.xml><?xml version="1.0" encoding="utf-8"?>
+<file path=ppt/slides/slide22.xml><?xml version="1.0" encoding="utf-8"?>
 <p:sld xmlns:a="http://schemas.openxmlformats.org/drawingml/2006/main" xmlns:p="http://schemas.openxmlformats.org/presentationml/2006/main" xmlns:r="http://schemas.openxmlformats.org/officeDocument/2006/relationships">
   <p:cSld>
     <p:spTree>
@@ -13959,7 +14752,7 @@
 </p:sld>
 </file>
 
-<file path=ppt/slides/slide2.xml><?xml version="1.0" encoding="utf-8"?>
+<file path=ppt/slides/slide23.xml><?xml version="1.0" encoding="utf-8"?>
 <p:sld xmlns:a="http://schemas.openxmlformats.org/drawingml/2006/main" xmlns:p="http://schemas.openxmlformats.org/presentationml/2006/main" xmlns:r="http://schemas.openxmlformats.org/officeDocument/2006/relationships">
   <p:cSld>
     <p:spTree>
@@ -13998,241 +14791,6 @@
                   <a:srgbClr val="1A3A5C"/>
                 </a:solidFill>
               </a:rPr>
-              <a:t>Problem setup</a:t>
-            </a:r>
-          </a:p>
-        </p:txBody>
-      </p:sp>
-      <p:sp>
-        <p:nvSpPr>
-          <p:cNvPr id="3" name="TextBox 2"/>
-          <p:cNvSpPr txBox="1"/>
-          <p:nvPr/>
-        </p:nvSpPr>
-        <p:spPr>
-          <a:xfrm>
-            <a:off x="548640" y="960120"/>
-            <a:ext cx="11094415" cy="365760"/>
-          </a:xfrm>
-          <a:prstGeom prst="rect">
-            <a:avLst/>
-          </a:prstGeom>
-          <a:noFill/>
-        </p:spPr>
-        <p:txBody>
-          <a:bodyPr wrap="square">
-            <a:spAutoFit/>
-          </a:bodyPr>
-          <a:lstStyle/>
-          <a:p>
-            <a:pPr algn="l"/>
-            <a:r>
-              <a:rPr sz="1400">
-                <a:solidFill>
-                  <a:srgbClr val="7F8C8D"/>
-                </a:solidFill>
-              </a:rPr>
-              <a:t>Predict one of 12 polysaccharide substrate classes from a PUL's gene-token sequence</a:t>
-            </a:r>
-          </a:p>
-        </p:txBody>
-      </p:sp>
-      <p:sp>
-        <p:nvSpPr>
-          <p:cNvPr id="4" name="TextBox 3"/>
-          <p:cNvSpPr txBox="1"/>
-          <p:nvPr/>
-        </p:nvSpPr>
-        <p:spPr>
-          <a:xfrm>
-            <a:off x="548640" y="1645920"/>
-            <a:ext cx="10515600" cy="4572000"/>
-          </a:xfrm>
-          <a:prstGeom prst="rect">
-            <a:avLst/>
-          </a:prstGeom>
-          <a:noFill/>
-        </p:spPr>
-        <p:txBody>
-          <a:bodyPr wrap="square">
-            <a:spAutoFit/>
-          </a:bodyPr>
-          <a:lstStyle/>
-          <a:p>
-            <a:pPr algn="l">
-              <a:spcAft>
-                <a:spcPts val="1400"/>
-              </a:spcAft>
-            </a:pPr>
-            <a:r>
-              <a:rPr sz="1500" b="1">
-                <a:solidFill>
-                  <a:srgbClr val="1A3A5C"/>
-                </a:solidFill>
-              </a:rPr>
-              <a:t>Dataset — </a:t>
-            </a:r>
-            <a:r>
-              <a:rPr sz="1500">
-                <a:solidFill>
-                  <a:srgbClr val="2C3E50"/>
-                </a:solidFill>
-              </a:rPr>
-              <a:t>1,030 labeled PULs across 12 substrates (alginate, alpha-glucan, alpha-mannan, arabinogalactan, beta-glucan, beta-mannan, chitin, fructan, galactan, host glycan, pectin, xylan)</a:t>
-            </a:r>
-          </a:p>
-          <a:p>
-            <a:pPr algn="l">
-              <a:spcAft>
-                <a:spcPts val="1400"/>
-              </a:spcAft>
-            </a:pPr>
-            <a:r>
-              <a:rPr sz="1500" b="1">
-                <a:solidFill>
-                  <a:srgbClr val="1A3A5C"/>
-                </a:solidFill>
-              </a:rPr>
-              <a:t>Each PUL — </a:t>
-            </a:r>
-            <a:r>
-              <a:rPr sz="1500">
-                <a:solidFill>
-                  <a:srgbClr val="2C3E50"/>
-                </a:solidFill>
-              </a:rPr>
-              <a:t>a comma/pipe-separated string of CAZy family IDs, transporter classification IDs, transcription-factor types, and null padding</a:t>
-            </a:r>
-          </a:p>
-          <a:p>
-            <a:pPr algn="l">
-              <a:spcAft>
-                <a:spcPts val="1400"/>
-              </a:spcAft>
-            </a:pPr>
-            <a:r>
-              <a:rPr sz="1500" b="1">
-                <a:solidFill>
-                  <a:srgbClr val="1A3A5C"/>
-                </a:solidFill>
-              </a:rPr>
-              <a:t>Cross-validation — </a:t>
-            </a:r>
-            <a:r>
-              <a:rPr sz="1500">
-                <a:solidFill>
-                  <a:srgbClr val="2C3E50"/>
-                </a:solidFill>
-              </a:rPr>
-              <a:t>5-repeat × 5-fold Repeated Stratified K-Fold (n=25 trials per configuration) — leak-free: word-embedding models retrained per fold</a:t>
-            </a:r>
-          </a:p>
-          <a:p>
-            <a:pPr algn="l">
-              <a:spcAft>
-                <a:spcPts val="1400"/>
-              </a:spcAft>
-            </a:pPr>
-            <a:r>
-              <a:rPr sz="1500" b="1">
-                <a:solidFill>
-                  <a:srgbClr val="1A3A5C"/>
-                </a:solidFill>
-              </a:rPr>
-              <a:t>Goal — </a:t>
-            </a:r>
-            <a:r>
-              <a:rPr sz="1500">
-                <a:solidFill>
-                  <a:srgbClr val="2C3E50"/>
-                </a:solidFill>
-              </a:rPr>
-              <a:t>(1) maximise predictive accuracy, (2) emit calibrated probabilities, (3) produce per-PUL signature-gene attributions that match literature CAZy knowledge</a:t>
-            </a:r>
-          </a:p>
-        </p:txBody>
-      </p:sp>
-      <p:sp>
-        <p:nvSpPr>
-          <p:cNvPr id="5" name="TextBox 4"/>
-          <p:cNvSpPr txBox="1"/>
-          <p:nvPr/>
-        </p:nvSpPr>
-        <p:spPr>
-          <a:xfrm>
-            <a:off x="457200" y="6492240"/>
-            <a:ext cx="11277295" cy="274320"/>
-          </a:xfrm>
-          <a:prstGeom prst="rect">
-            <a:avLst/>
-          </a:prstGeom>
-          <a:noFill/>
-        </p:spPr>
-        <p:txBody>
-          <a:bodyPr wrap="none">
-            <a:spAutoFit/>
-          </a:bodyPr>
-          <a:lstStyle/>
-          <a:p>
-            <a:pPr algn="l"/>
-            <a:r>
-              <a:rPr sz="900" i="1">
-                <a:solidFill>
-                  <a:srgbClr val="7F8C8D"/>
-                </a:solidFill>
-              </a:rPr>
-              <a:t>subFinder substrate prediction — rep_1 reference run</a:t>
-            </a:r>
-          </a:p>
-        </p:txBody>
-      </p:sp>
-    </p:spTree>
-  </p:cSld>
-  <p:clrMapOvr>
-    <a:masterClrMapping/>
-  </p:clrMapOvr>
-</p:sld>
-</file>
-
-<file path=ppt/slides/slide20.xml><?xml version="1.0" encoding="utf-8"?>
-<p:sld xmlns:a="http://schemas.openxmlformats.org/drawingml/2006/main" xmlns:p="http://schemas.openxmlformats.org/presentationml/2006/main" xmlns:r="http://schemas.openxmlformats.org/officeDocument/2006/relationships">
-  <p:cSld>
-    <p:spTree>
-      <p:nvGrpSpPr>
-        <p:cNvPr id="1" name=""/>
-        <p:cNvGrpSpPr/>
-        <p:nvPr/>
-      </p:nvGrpSpPr>
-      <p:grpSpPr/>
-      <p:sp>
-        <p:nvSpPr>
-          <p:cNvPr id="2" name="TextBox 1"/>
-          <p:cNvSpPr txBox="1"/>
-          <p:nvPr/>
-        </p:nvSpPr>
-        <p:spPr>
-          <a:xfrm>
-            <a:off x="548640" y="320040"/>
-            <a:ext cx="11094415" cy="822960"/>
-          </a:xfrm>
-          <a:prstGeom prst="rect">
-            <a:avLst/>
-          </a:prstGeom>
-          <a:noFill/>
-        </p:spPr>
-        <p:txBody>
-          <a:bodyPr wrap="square">
-            <a:spAutoFit/>
-          </a:bodyPr>
-          <a:lstStyle/>
-          <a:p>
-            <a:pPr algn="l"/>
-            <a:r>
-              <a:rPr sz="2800" b="1">
-                <a:solidFill>
-                  <a:srgbClr val="1A3A5C"/>
-                </a:solidFill>
-              </a:rPr>
               <a:t>Appendix · Substrate-alias map between literature DB and our 12 classes</a:t>
             </a:r>
           </a:p>
@@ -15460,7 +16018,7 @@
 </p:sld>
 </file>
 
-<file path=ppt/slides/slide21.xml><?xml version="1.0" encoding="utf-8"?>
+<file path=ppt/slides/slide24.xml><?xml version="1.0" encoding="utf-8"?>
 <p:sld xmlns:a="http://schemas.openxmlformats.org/drawingml/2006/main" xmlns:p="http://schemas.openxmlformats.org/presentationml/2006/main" xmlns:r="http://schemas.openxmlformats.org/officeDocument/2006/relationships">
   <p:cSld>
     <p:spTree>

--- a/docs/deck.pptx
+++ b/docs/deck.pptx
@@ -30,6 +30,7 @@
     <p:sldId id="278" r:id="rId29"/>
     <p:sldId id="279" r:id="rId30"/>
     <p:sldId id="280" r:id="rId31"/>
+    <p:sldId id="281" r:id="rId32"/>
   </p:sldIdLst>
   <p:sldSz cx="12191695" cy="6858000" type="screen4x3"/>
   <p:notesSz cx="6858000" cy="9144000"/>
@@ -16205,6 +16206,821 @@
 </file>
 
 <file path=ppt/slides/slide25.xml><?xml version="1.0" encoding="utf-8"?>
+<p:sld xmlns:a="http://schemas.openxmlformats.org/drawingml/2006/main" xmlns:p="http://schemas.openxmlformats.org/presentationml/2006/main" xmlns:r="http://schemas.openxmlformats.org/officeDocument/2006/relationships">
+  <p:cSld>
+    <p:spTree>
+      <p:nvGrpSpPr>
+        <p:cNvPr id="1" name=""/>
+        <p:cNvGrpSpPr/>
+        <p:nvPr/>
+      </p:nvGrpSpPr>
+      <p:grpSpPr/>
+      <p:sp>
+        <p:nvSpPr>
+          <p:cNvPr id="2" name="TextBox 1"/>
+          <p:cNvSpPr txBox="1"/>
+          <p:nvPr/>
+        </p:nvSpPr>
+        <p:spPr>
+          <a:xfrm>
+            <a:off x="548640" y="320040"/>
+            <a:ext cx="11094415" cy="822960"/>
+          </a:xfrm>
+          <a:prstGeom prst="rect">
+            <a:avLst/>
+          </a:prstGeom>
+          <a:noFill/>
+        </p:spPr>
+        <p:txBody>
+          <a:bodyPr wrap="square">
+            <a:spAutoFit/>
+          </a:bodyPr>
+          <a:lstStyle/>
+          <a:p>
+            <a:pPr algn="l"/>
+            <a:r>
+              <a:rPr sz="2800" b="1">
+                <a:solidFill>
+                  <a:srgbClr val="1A3A5C"/>
+                </a:solidFill>
+              </a:rPr>
+              <a:t>Post-hoc refinement · v2 tokenizer for cross-domain generalization</a:t>
+            </a:r>
+          </a:p>
+        </p:txBody>
+      </p:sp>
+      <p:sp>
+        <p:nvSpPr>
+          <p:cNvPr id="3" name="TextBox 2"/>
+          <p:cNvSpPr txBox="1"/>
+          <p:nvPr/>
+        </p:nvSpPr>
+        <p:spPr>
+          <a:xfrm>
+            <a:off x="548640" y="960120"/>
+            <a:ext cx="11094415" cy="365760"/>
+          </a:xfrm>
+          <a:prstGeom prst="rect">
+            <a:avLst/>
+          </a:prstGeom>
+          <a:noFill/>
+        </p:spPr>
+        <p:txBody>
+          <a:bodyPr wrap="square">
+            <a:spAutoFit/>
+          </a:bodyPr>
+          <a:lstStyle/>
+          <a:p>
+            <a:pPr algn="l"/>
+            <a:r>
+              <a:rPr sz="1400">
+                <a:solidFill>
+                  <a:srgbClr val="7F8C8D"/>
+                </a:solidFill>
+              </a:rPr>
+              <a:t>After applying the deployed model to 358,751 unsupervised PULs we found OOV was driven by FORMAT mismatches, not biology. Two-line tokenizer change closes the gap.</a:t>
+            </a:r>
+          </a:p>
+        </p:txBody>
+      </p:sp>
+      <p:graphicFrame>
+        <p:nvGraphicFramePr>
+          <p:cNvPr id="4" name="Table 3"/>
+          <p:cNvGraphicFramePr>
+            <a:graphicFrameLocks noGrp="1"/>
+          </p:cNvGraphicFramePr>
+          <p:nvPr/>
+        </p:nvGraphicFramePr>
+        <p:xfrm>
+          <a:off x="548640" y="1417320"/>
+          <a:ext cx="10972800" cy="2286000"/>
+        </p:xfrm>
+        <a:graphic>
+          <a:graphicData uri="http://schemas.openxmlformats.org/drawingml/2006/table">
+            <a:tbl>
+              <a:tblPr firstRow="1" bandRow="1">
+                <a:tableStyleId>{5C22544A-7EE6-4342-B048-85BDC9FD1C3A}</a:tableStyleId>
+              </a:tblPr>
+              <a:tblGrid>
+                <a:gridCol w="2743200"/>
+                <a:gridCol w="2743200"/>
+                <a:gridCol w="2743200"/>
+                <a:gridCol w="2743200"/>
+              </a:tblGrid>
+              <a:tr h="326571">
+                <a:tc>
+                  <a:txBody>
+                    <a:bodyPr/>
+                    <a:lstStyle/>
+                    <a:p>
+                      <a:r>
+                        <a:rPr sz="1200" b="1">
+                          <a:solidFill>
+                            <a:srgbClr val="FFFFFF"/>
+                          </a:solidFill>
+                        </a:rPr>
+                        <a:t>metric</a:t>
+                      </a:r>
+                    </a:p>
+                  </a:txBody>
+                  <a:tcPr>
+                    <a:solidFill>
+                      <a:srgbClr val="1A3A5C"/>
+                    </a:solidFill>
+                  </a:tcPr>
+                </a:tc>
+                <a:tc>
+                  <a:txBody>
+                    <a:bodyPr/>
+                    <a:lstStyle/>
+                    <a:p>
+                      <a:r>
+                        <a:rPr sz="1200" b="1">
+                          <a:solidFill>
+                            <a:srgbClr val="FFFFFF"/>
+                          </a:solidFill>
+                        </a:rPr>
+                        <a:t>original (tok_cpu)</a:t>
+                      </a:r>
+                    </a:p>
+                  </a:txBody>
+                  <a:tcPr>
+                    <a:solidFill>
+                      <a:srgbClr val="1A3A5C"/>
+                    </a:solidFill>
+                  </a:tcPr>
+                </a:tc>
+                <a:tc>
+                  <a:txBody>
+                    <a:bodyPr/>
+                    <a:lstStyle/>
+                    <a:p>
+                      <a:r>
+                        <a:rPr sz="1200" b="1">
+                          <a:solidFill>
+                            <a:srgbClr val="FFFFFF"/>
+                          </a:solidFill>
+                        </a:rPr>
+                        <a:t>v2 refinement</a:t>
+                      </a:r>
+                    </a:p>
+                  </a:txBody>
+                  <a:tcPr>
+                    <a:solidFill>
+                      <a:srgbClr val="1A3A5C"/>
+                    </a:solidFill>
+                  </a:tcPr>
+                </a:tc>
+                <a:tc>
+                  <a:txBody>
+                    <a:bodyPr/>
+                    <a:lstStyle/>
+                    <a:p>
+                      <a:r>
+                        <a:rPr sz="1200" b="1">
+                          <a:solidFill>
+                            <a:srgbClr val="FFFFFF"/>
+                          </a:solidFill>
+                        </a:rPr>
+                        <a:t>Δ</a:t>
+                      </a:r>
+                    </a:p>
+                  </a:txBody>
+                  <a:tcPr>
+                    <a:solidFill>
+                      <a:srgbClr val="1A3A5C"/>
+                    </a:solidFill>
+                  </a:tcPr>
+                </a:tc>
+              </a:tr>
+              <a:tr h="326571">
+                <a:tc>
+                  <a:txBody>
+                    <a:bodyPr/>
+                    <a:lstStyle/>
+                    <a:p>
+                      <a:r>
+                        <a:rPr sz="1100">
+                          <a:solidFill>
+                            <a:srgbClr val="2C3E50"/>
+                          </a:solidFill>
+                        </a:rPr>
+                        <a:t>5-rep cross-rep mean acc</a:t>
+                      </a:r>
+                    </a:p>
+                  </a:txBody>
+                  <a:tcPr>
+                    <a:solidFill>
+                      <a:srgbClr val="FFFFFF"/>
+                    </a:solidFill>
+                  </a:tcPr>
+                </a:tc>
+                <a:tc>
+                  <a:txBody>
+                    <a:bodyPr/>
+                    <a:lstStyle/>
+                    <a:p>
+                      <a:r>
+                        <a:rPr sz="1100">
+                          <a:solidFill>
+                            <a:srgbClr val="2C3E50"/>
+                          </a:solidFill>
+                        </a:rPr>
+                        <a:t>0.9063 ± 0.0006</a:t>
+                      </a:r>
+                    </a:p>
+                  </a:txBody>
+                  <a:tcPr>
+                    <a:solidFill>
+                      <a:srgbClr val="FFFFFF"/>
+                    </a:solidFill>
+                  </a:tcPr>
+                </a:tc>
+                <a:tc>
+                  <a:txBody>
+                    <a:bodyPr/>
+                    <a:lstStyle/>
+                    <a:p>
+                      <a:r>
+                        <a:rPr sz="1100">
+                          <a:solidFill>
+                            <a:srgbClr val="2C3E50"/>
+                          </a:solidFill>
+                        </a:rPr>
+                        <a:t>0.9145 ± 0.0005</a:t>
+                      </a:r>
+                    </a:p>
+                  </a:txBody>
+                  <a:tcPr>
+                    <a:solidFill>
+                      <a:srgbClr val="FFFFFF"/>
+                    </a:solidFill>
+                  </a:tcPr>
+                </a:tc>
+                <a:tc>
+                  <a:txBody>
+                    <a:bodyPr/>
+                    <a:lstStyle/>
+                    <a:p>
+                      <a:r>
+                        <a:rPr sz="1100" b="1">
+                          <a:solidFill>
+                            <a:srgbClr val="27AE60"/>
+                          </a:solidFill>
+                        </a:rPr>
+                        <a:t>+0.82 pp ✓</a:t>
+                      </a:r>
+                    </a:p>
+                  </a:txBody>
+                  <a:tcPr>
+                    <a:solidFill>
+                      <a:srgbClr val="FFFFFF"/>
+                    </a:solidFill>
+                  </a:tcPr>
+                </a:tc>
+              </a:tr>
+              <a:tr h="326571">
+                <a:tc>
+                  <a:txBody>
+                    <a:bodyPr/>
+                    <a:lstStyle/>
+                    <a:p>
+                      <a:r>
+                        <a:rPr sz="1100">
+                          <a:solidFill>
+                            <a:srgbClr val="2C3E50"/>
+                          </a:solidFill>
+                        </a:rPr>
+                        <a:t>Every rep improved</a:t>
+                      </a:r>
+                    </a:p>
+                  </a:txBody>
+                  <a:tcPr>
+                    <a:solidFill>
+                      <a:srgbClr val="ECF0F1"/>
+                    </a:solidFill>
+                  </a:tcPr>
+                </a:tc>
+                <a:tc>
+                  <a:txBody>
+                    <a:bodyPr/>
+                    <a:lstStyle/>
+                    <a:p>
+                      <a:r>
+                        <a:rPr sz="1100">
+                          <a:solidFill>
+                            <a:srgbClr val="2C3E50"/>
+                          </a:solidFill>
+                        </a:rPr>
+                        <a:t>—</a:t>
+                      </a:r>
+                    </a:p>
+                  </a:txBody>
+                  <a:tcPr>
+                    <a:solidFill>
+                      <a:srgbClr val="ECF0F1"/>
+                    </a:solidFill>
+                  </a:tcPr>
+                </a:tc>
+                <a:tc>
+                  <a:txBody>
+                    <a:bodyPr/>
+                    <a:lstStyle/>
+                    <a:p>
+                      <a:r>
+                        <a:rPr sz="1100">
+                          <a:solidFill>
+                            <a:srgbClr val="2C3E50"/>
+                          </a:solidFill>
+                        </a:rPr>
+                        <a:t>5/5</a:t>
+                      </a:r>
+                    </a:p>
+                  </a:txBody>
+                  <a:tcPr>
+                    <a:solidFill>
+                      <a:srgbClr val="ECF0F1"/>
+                    </a:solidFill>
+                  </a:tcPr>
+                </a:tc>
+                <a:tc>
+                  <a:txBody>
+                    <a:bodyPr/>
+                    <a:lstStyle/>
+                    <a:p>
+                      <a:r>
+                        <a:rPr sz="1100" b="1">
+                          <a:solidFill>
+                            <a:srgbClr val="27AE60"/>
+                          </a:solidFill>
+                        </a:rPr>
+                        <a:t>consistent ✓</a:t>
+                      </a:r>
+                    </a:p>
+                  </a:txBody>
+                  <a:tcPr>
+                    <a:solidFill>
+                      <a:srgbClr val="ECF0F1"/>
+                    </a:solidFill>
+                  </a:tcPr>
+                </a:tc>
+              </a:tr>
+              <a:tr h="326571">
+                <a:tc>
+                  <a:txBody>
+                    <a:bodyPr/>
+                    <a:lstStyle/>
+                    <a:p>
+                      <a:r>
+                        <a:rPr sz="1100">
+                          <a:solidFill>
+                            <a:srgbClr val="2C3E50"/>
+                          </a:solidFill>
+                        </a:rPr>
+                        <a:t>Deployed vocab size</a:t>
+                      </a:r>
+                    </a:p>
+                  </a:txBody>
+                  <a:tcPr>
+                    <a:solidFill>
+                      <a:srgbClr val="FFFFFF"/>
+                    </a:solidFill>
+                  </a:tcPr>
+                </a:tc>
+                <a:tc>
+                  <a:txBody>
+                    <a:bodyPr/>
+                    <a:lstStyle/>
+                    <a:p>
+                      <a:r>
+                        <a:rPr sz="1100">
+                          <a:solidFill>
+                            <a:srgbClr val="2C3E50"/>
+                          </a:solidFill>
+                        </a:rPr>
+                        <a:t>517</a:t>
+                      </a:r>
+                    </a:p>
+                  </a:txBody>
+                  <a:tcPr>
+                    <a:solidFill>
+                      <a:srgbClr val="FFFFFF"/>
+                    </a:solidFill>
+                  </a:tcPr>
+                </a:tc>
+                <a:tc>
+                  <a:txBody>
+                    <a:bodyPr/>
+                    <a:lstStyle/>
+                    <a:p>
+                      <a:r>
+                        <a:rPr sz="1100">
+                          <a:solidFill>
+                            <a:srgbClr val="2C3E50"/>
+                          </a:solidFill>
+                        </a:rPr>
+                        <a:t>306</a:t>
+                      </a:r>
+                    </a:p>
+                  </a:txBody>
+                  <a:tcPr>
+                    <a:solidFill>
+                      <a:srgbClr val="FFFFFF"/>
+                    </a:solidFill>
+                  </a:tcPr>
+                </a:tc>
+                <a:tc>
+                  <a:txBody>
+                    <a:bodyPr/>
+                    <a:lstStyle/>
+                    <a:p>
+                      <a:r>
+                        <a:rPr sz="1100" b="1">
+                          <a:solidFill>
+                            <a:srgbClr val="27AE60"/>
+                          </a:solidFill>
+                        </a:rPr>
+                        <a:t>41% smaller ✓</a:t>
+                      </a:r>
+                    </a:p>
+                  </a:txBody>
+                  <a:tcPr>
+                    <a:solidFill>
+                      <a:srgbClr val="FFFFFF"/>
+                    </a:solidFill>
+                  </a:tcPr>
+                </a:tc>
+              </a:tr>
+              <a:tr h="326571">
+                <a:tc>
+                  <a:txBody>
+                    <a:bodyPr/>
+                    <a:lstStyle/>
+                    <a:p>
+                      <a:r>
+                        <a:rPr sz="1100">
+                          <a:solidFill>
+                            <a:srgbClr val="2C3E50"/>
+                          </a:solidFill>
+                        </a:rPr>
+                        <a:t>Unsup mean OOV %</a:t>
+                      </a:r>
+                    </a:p>
+                  </a:txBody>
+                  <a:tcPr>
+                    <a:solidFill>
+                      <a:srgbClr val="ECF0F1"/>
+                    </a:solidFill>
+                  </a:tcPr>
+                </a:tc>
+                <a:tc>
+                  <a:txBody>
+                    <a:bodyPr/>
+                    <a:lstStyle/>
+                    <a:p>
+                      <a:r>
+                        <a:rPr sz="1100">
+                          <a:solidFill>
+                            <a:srgbClr val="2C3E50"/>
+                          </a:solidFill>
+                        </a:rPr>
+                        <a:t>21.79%</a:t>
+                      </a:r>
+                    </a:p>
+                  </a:txBody>
+                  <a:tcPr>
+                    <a:solidFill>
+                      <a:srgbClr val="ECF0F1"/>
+                    </a:solidFill>
+                  </a:tcPr>
+                </a:tc>
+                <a:tc>
+                  <a:txBody>
+                    <a:bodyPr/>
+                    <a:lstStyle/>
+                    <a:p>
+                      <a:r>
+                        <a:rPr sz="1100">
+                          <a:solidFill>
+                            <a:srgbClr val="2C3E50"/>
+                          </a:solidFill>
+                        </a:rPr>
+                        <a:t>5.36%</a:t>
+                      </a:r>
+                    </a:p>
+                  </a:txBody>
+                  <a:tcPr>
+                    <a:solidFill>
+                      <a:srgbClr val="ECF0F1"/>
+                    </a:solidFill>
+                  </a:tcPr>
+                </a:tc>
+                <a:tc>
+                  <a:txBody>
+                    <a:bodyPr/>
+                    <a:lstStyle/>
+                    <a:p>
+                      <a:r>
+                        <a:rPr sz="1100" b="1">
+                          <a:solidFill>
+                            <a:srgbClr val="27AE60"/>
+                          </a:solidFill>
+                        </a:rPr>
+                        <a:t>4× lower ✓</a:t>
+                      </a:r>
+                    </a:p>
+                  </a:txBody>
+                  <a:tcPr>
+                    <a:solidFill>
+                      <a:srgbClr val="ECF0F1"/>
+                    </a:solidFill>
+                  </a:tcPr>
+                </a:tc>
+              </a:tr>
+              <a:tr h="326571">
+                <a:tc>
+                  <a:txBody>
+                    <a:bodyPr/>
+                    <a:lstStyle/>
+                    <a:p>
+                      <a:r>
+                        <a:rPr sz="1100">
+                          <a:solidFill>
+                            <a:srgbClr val="2C3E50"/>
+                          </a:solidFill>
+                        </a:rPr>
+                        <a:t>Unsup PULs at OOV ≤ 10%</a:t>
+                      </a:r>
+                    </a:p>
+                  </a:txBody>
+                  <a:tcPr>
+                    <a:solidFill>
+                      <a:srgbClr val="FFFFFF"/>
+                    </a:solidFill>
+                  </a:tcPr>
+                </a:tc>
+                <a:tc>
+                  <a:txBody>
+                    <a:bodyPr/>
+                    <a:lstStyle/>
+                    <a:p>
+                      <a:r>
+                        <a:rPr sz="1100">
+                          <a:solidFill>
+                            <a:srgbClr val="2C3E50"/>
+                          </a:solidFill>
+                        </a:rPr>
+                        <a:t>37.2%</a:t>
+                      </a:r>
+                    </a:p>
+                  </a:txBody>
+                  <a:tcPr>
+                    <a:solidFill>
+                      <a:srgbClr val="FFFFFF"/>
+                    </a:solidFill>
+                  </a:tcPr>
+                </a:tc>
+                <a:tc>
+                  <a:txBody>
+                    <a:bodyPr/>
+                    <a:lstStyle/>
+                    <a:p>
+                      <a:r>
+                        <a:rPr sz="1100">
+                          <a:solidFill>
+                            <a:srgbClr val="2C3E50"/>
+                          </a:solidFill>
+                        </a:rPr>
+                        <a:t>77.5%</a:t>
+                      </a:r>
+                    </a:p>
+                  </a:txBody>
+                  <a:tcPr>
+                    <a:solidFill>
+                      <a:srgbClr val="FFFFFF"/>
+                    </a:solidFill>
+                  </a:tcPr>
+                </a:tc>
+                <a:tc>
+                  <a:txBody>
+                    <a:bodyPr/>
+                    <a:lstStyle/>
+                    <a:p>
+                      <a:r>
+                        <a:rPr sz="1100" b="1">
+                          <a:solidFill>
+                            <a:srgbClr val="27AE60"/>
+                          </a:solidFill>
+                        </a:rPr>
+                        <a:t>+40 pp ✓</a:t>
+                      </a:r>
+                    </a:p>
+                  </a:txBody>
+                  <a:tcPr>
+                    <a:solidFill>
+                      <a:srgbClr val="FFFFFF"/>
+                    </a:solidFill>
+                  </a:tcPr>
+                </a:tc>
+              </a:tr>
+              <a:tr h="326574">
+                <a:tc>
+                  <a:txBody>
+                    <a:bodyPr/>
+                    <a:lstStyle/>
+                    <a:p>
+                      <a:r>
+                        <a:rPr sz="1100">
+                          <a:solidFill>
+                            <a:srgbClr val="2C3E50"/>
+                          </a:solidFill>
+                        </a:rPr>
+                        <a:t>Unsup PULs at OOV ≤ 25%</a:t>
+                      </a:r>
+                    </a:p>
+                  </a:txBody>
+                  <a:tcPr>
+                    <a:solidFill>
+                      <a:srgbClr val="ECF0F1"/>
+                    </a:solidFill>
+                  </a:tcPr>
+                </a:tc>
+                <a:tc>
+                  <a:txBody>
+                    <a:bodyPr/>
+                    <a:lstStyle/>
+                    <a:p>
+                      <a:r>
+                        <a:rPr sz="1100">
+                          <a:solidFill>
+                            <a:srgbClr val="2C3E50"/>
+                          </a:solidFill>
+                        </a:rPr>
+                        <a:t>71.2%</a:t>
+                      </a:r>
+                    </a:p>
+                  </a:txBody>
+                  <a:tcPr>
+                    <a:solidFill>
+                      <a:srgbClr val="ECF0F1"/>
+                    </a:solidFill>
+                  </a:tcPr>
+                </a:tc>
+                <a:tc>
+                  <a:txBody>
+                    <a:bodyPr/>
+                    <a:lstStyle/>
+                    <a:p>
+                      <a:r>
+                        <a:rPr sz="1100">
+                          <a:solidFill>
+                            <a:srgbClr val="2C3E50"/>
+                          </a:solidFill>
+                        </a:rPr>
+                        <a:t>96.2%</a:t>
+                      </a:r>
+                    </a:p>
+                  </a:txBody>
+                  <a:tcPr>
+                    <a:solidFill>
+                      <a:srgbClr val="ECF0F1"/>
+                    </a:solidFill>
+                  </a:tcPr>
+                </a:tc>
+                <a:tc>
+                  <a:txBody>
+                    <a:bodyPr/>
+                    <a:lstStyle/>
+                    <a:p>
+                      <a:r>
+                        <a:rPr sz="1100" b="1">
+                          <a:solidFill>
+                            <a:srgbClr val="27AE60"/>
+                          </a:solidFill>
+                        </a:rPr>
+                        <a:t>+25 pp ✓</a:t>
+                      </a:r>
+                    </a:p>
+                  </a:txBody>
+                  <a:tcPr>
+                    <a:solidFill>
+                      <a:srgbClr val="ECF0F1"/>
+                    </a:solidFill>
+                  </a:tcPr>
+                </a:tc>
+              </a:tr>
+            </a:tbl>
+          </a:graphicData>
+        </a:graphic>
+      </p:graphicFrame>
+      <p:sp>
+        <p:nvSpPr>
+          <p:cNvPr id="5" name="TextBox 4"/>
+          <p:cNvSpPr txBox="1"/>
+          <p:nvPr/>
+        </p:nvSpPr>
+        <p:spPr>
+          <a:xfrm>
+            <a:off x="548640" y="3657600"/>
+            <a:ext cx="10972800" cy="2468880"/>
+          </a:xfrm>
+          <a:prstGeom prst="rect">
+            <a:avLst/>
+          </a:prstGeom>
+          <a:noFill/>
+        </p:spPr>
+        <p:txBody>
+          <a:bodyPr wrap="square">
+            <a:spAutoFit/>
+          </a:bodyPr>
+          <a:lstStyle/>
+          <a:p>
+            <a:pPr algn="l"/>
+            <a:r>
+              <a:rPr sz="1200" b="1">
+                <a:solidFill>
+                  <a:srgbClr val="1A3A5C"/>
+                </a:solidFill>
+              </a:rPr>
+              <a:t>What v2 does (two lines): </a:t>
+            </a:r>
+            <a:r>
+              <a:rPr sz="1100">
+                <a:solidFill>
+                  <a:srgbClr val="2C3E50"/>
+                </a:solidFill>
+              </a:rPr>
+              <a:t>(1) Truncate Transporter Classification numbers to 2-level family — `1.B.14.6.1` → `1.B`. The supervised corpus mixes 5-level and 3-level TCs; the unsupervised has only 3-level. Truncation closes the format gap without losing biology (TC numbers are transporter accessory genes, not the substrate-discriminating signal). (2) Augment CAZy tokens with family-only fallback in concat — `GH13` → keep `GH13` AND add `GH`. Novel families like `AA17` (never seen in supervised) now still pattern-match against `AA`. Specific tokens still match exactly — no info lost.</a:t>
+            </a:r>
+          </a:p>
+          <a:p>
+            <a:pPr algn="l">
+              <a:spcBef>
+                <a:spcPts val="800"/>
+              </a:spcBef>
+            </a:pPr>
+            <a:r>
+              <a:rPr sz="1100" b="1">
+                <a:solidFill>
+                  <a:srgbClr val="27AE60"/>
+                </a:solidFill>
+              </a:rPr>
+              <a:t>Additive — original deployed model unchanged: </a:t>
+            </a:r>
+            <a:r>
+              <a:rPr sz="1100">
+                <a:solidFill>
+                  <a:srgbClr val="2C3E50"/>
+                </a:solidFill>
+              </a:rPr>
+              <a:t>Original deployed bundle (`artifacts/final_model.pkl` + per-rep) preserved as default (shipped via Git LFS). v2 bundle (6 × ~20 MB after `joblib(compress=xz)`, ~120 MB total) ships in-repo via regular git, no LFS. joblib.load auto-decompresses — no inference-code change. Rebuild from scratch in ~90 s/rep with `scripts/13_*.py`. Strategy sweep: `unravel/experiments/run_token_strategies.py` (13 strategies tested).</a:t>
+            </a:r>
+          </a:p>
+        </p:txBody>
+      </p:sp>
+      <p:sp>
+        <p:nvSpPr>
+          <p:cNvPr id="6" name="TextBox 5"/>
+          <p:cNvSpPr txBox="1"/>
+          <p:nvPr/>
+        </p:nvSpPr>
+        <p:spPr>
+          <a:xfrm>
+            <a:off x="457200" y="6492240"/>
+            <a:ext cx="11277295" cy="274320"/>
+          </a:xfrm>
+          <a:prstGeom prst="rect">
+            <a:avLst/>
+          </a:prstGeom>
+          <a:noFill/>
+        </p:spPr>
+        <p:txBody>
+          <a:bodyPr wrap="none">
+            <a:spAutoFit/>
+          </a:bodyPr>
+          <a:lstStyle/>
+          <a:p>
+            <a:pPr algn="l"/>
+            <a:r>
+              <a:rPr sz="900" i="1">
+                <a:solidFill>
+                  <a:srgbClr val="7F8C8D"/>
+                </a:solidFill>
+              </a:rPr>
+              <a:t>Post-hoc refinement — see paper §Post-hoc tokenizer refinement; sweep data in unravel/experiments/</a:t>
+            </a:r>
+          </a:p>
+        </p:txBody>
+      </p:sp>
+    </p:spTree>
+  </p:cSld>
+  <p:clrMapOvr>
+    <a:masterClrMapping/>
+  </p:clrMapOvr>
+</p:sld>
+</file>
+
+<file path=ppt/slides/slide26.xml><?xml version="1.0" encoding="utf-8"?>
 <p:sld xmlns:a="http://schemas.openxmlformats.org/drawingml/2006/main" xmlns:p="http://schemas.openxmlformats.org/presentationml/2006/main" xmlns:r="http://schemas.openxmlformats.org/officeDocument/2006/relationships">
   <p:cSld>
     <p:spTree>

--- a/docs/deck.pptx
+++ b/docs/deck.pptx
@@ -16976,6 +16976,29 @@
               <a:t>Original deployed bundle (`artifacts/final_model.pkl` + per-rep) preserved as default (shipped via Git LFS). v2 bundle (6 × ~20 MB after `joblib(compress=xz)`, ~120 MB total) ships in-repo via regular git, no LFS. joblib.load auto-decompresses — no inference-code change. Rebuild from scratch in ~90 s/rep with `scripts/13_*.py`. Strategy sweep: `unravel/experiments/run_token_strategies.py` (13 strategies tested).</a:t>
             </a:r>
           </a:p>
+          <a:p>
+            <a:pPr algn="l">
+              <a:spcBef>
+                <a:spcPts val="800"/>
+              </a:spcBef>
+            </a:pPr>
+            <a:r>
+              <a:rPr sz="1100" b="1">
+                <a:solidFill>
+                  <a:srgbClr val="27AE60"/>
+                </a:solidFill>
+              </a:rPr>
+              <a:t>V2 sig-gene PR (top-3, family-augmented canon): </a:t>
+            </a:r>
+            <a:r>
+              <a:rPr sz="1100">
+                <a:solidFill>
+                  <a:srgbClr val="2C3E50"/>
+                </a:solidFill>
+              </a:rPr>
+              <a:t>813/1,028 PULs hit a lit-canonical signal in top-3 (79.1%) — 749 caught by specific token (`GH13`) plus 64 extra rescued by family fallback (`GH`). Gene-view scope recall: specific tokens 92/173 = 53.2%, family fallbacks 24/31 = 77.4% — family signal is more consistent across PULs because fewer competitors at the family level. Full per-substrate breakdown: `paper/tables/table12_v2_per_substrate_sig_pr.csv` (built by `scripts/13c_v2_sig_gene_pr.py`).</a:t>
+            </a:r>
+          </a:p>
         </p:txBody>
       </p:sp>
       <p:sp>
@@ -17007,7 +17030,7 @@
                   <a:srgbClr val="7F8C8D"/>
                 </a:solidFill>
               </a:rPr>
-              <a:t>Post-hoc refinement — see paper §Post-hoc tokenizer refinement; sweep data in unravel/experiments/</a:t>
+              <a:t>Post-hoc refinement — see paper §Post-hoc tokenizer refinement and Supplement Table S5b for v2 sig-gene PR</a:t>
             </a:r>
           </a:p>
         </p:txBody>

--- a/docs/deck.pptx
+++ b/docs/deck.pptx
@@ -8176,7 +8176,7 @@
                 <a:gridCol w="2743200"/>
                 <a:gridCol w="1691640"/>
               </a:tblGrid>
-              <a:tr h="196947">
+              <a:tr h="189653">
                 <a:tc>
                   <a:txBody>
                     <a:bodyPr/>
@@ -8325,7 +8325,7 @@
                   </a:tcPr>
                 </a:tc>
               </a:tr>
-              <a:tr h="196947">
+              <a:tr h="189653">
                 <a:tc>
                   <a:txBody>
                     <a:bodyPr/>
@@ -8358,23 +8358,172 @@
                             <a:srgbClr val="2C3E50"/>
                           </a:solidFill>
                         </a:rPr>
+                        <a:t>cpuV2__ET500_log2</a:t>
+                      </a:r>
+                    </a:p>
+                  </a:txBody>
+                  <a:tcPr>
+                    <a:solidFill>
+                      <a:srgbClr val="FFF3CD"/>
+                    </a:solidFill>
+                  </a:tcPr>
+                </a:tc>
+                <a:tc>
+                  <a:txBody>
+                    <a:bodyPr/>
+                    <a:lstStyle/>
+                    <a:p>
+                      <a:r>
+                        <a:rPr sz="750" b="1">
+                          <a:solidFill>
+                            <a:srgbClr val="2C3E50"/>
+                          </a:solidFill>
+                        </a:rPr>
+                        <a:t>CountVec</a:t>
+                      </a:r>
+                    </a:p>
+                  </a:txBody>
+                  <a:tcPr>
+                    <a:solidFill>
+                      <a:srgbClr val="FFF3CD"/>
+                    </a:solidFill>
+                  </a:tcPr>
+                </a:tc>
+                <a:tc>
+                  <a:txBody>
+                    <a:bodyPr/>
+                    <a:lstStyle/>
+                    <a:p>
+                      <a:r>
+                        <a:rPr sz="750" b="1">
+                          <a:solidFill>
+                            <a:srgbClr val="2C3E50"/>
+                          </a:solidFill>
+                        </a:rPr>
+                        <a:t>tok_cpu_v2 (, | _; TC to 3-level family; CAZy family fallback)</a:t>
+                      </a:r>
+                    </a:p>
+                  </a:txBody>
+                  <a:tcPr>
+                    <a:solidFill>
+                      <a:srgbClr val="FFF3CD"/>
+                    </a:solidFill>
+                  </a:tcPr>
+                </a:tc>
+                <a:tc>
+                  <a:txBody>
+                    <a:bodyPr/>
+                    <a:lstStyle/>
+                    <a:p>
+                      <a:r>
+                        <a:rPr sz="750" b="1">
+                          <a:solidFill>
+                            <a:srgbClr val="2C3E50"/>
+                          </a:solidFill>
+                        </a:rPr>
+                        <a:t>OvR(ExtraTrees)</a:t>
+                      </a:r>
+                    </a:p>
+                  </a:txBody>
+                  <a:tcPr>
+                    <a:solidFill>
+                      <a:srgbClr val="FFF3CD"/>
+                    </a:solidFill>
+                  </a:tcPr>
+                </a:tc>
+                <a:tc>
+                  <a:txBody>
+                    <a:bodyPr/>
+                    <a:lstStyle/>
+                    <a:p>
+                      <a:r>
+                        <a:rPr sz="750" b="1">
+                          <a:solidFill>
+                            <a:srgbClr val="2C3E50"/>
+                          </a:solidFill>
+                        </a:rPr>
+                        <a:t>n=500 max_features=log2 class_weight=balanced</a:t>
+                      </a:r>
+                    </a:p>
+                  </a:txBody>
+                  <a:tcPr>
+                    <a:solidFill>
+                      <a:srgbClr val="FFF3CD"/>
+                    </a:solidFill>
+                  </a:tcPr>
+                </a:tc>
+                <a:tc>
+                  <a:txBody>
+                    <a:bodyPr/>
+                    <a:lstStyle/>
+                    <a:p>
+                      <a:r>
+                        <a:rPr sz="750" b="1">
+                          <a:solidFill>
+                            <a:srgbClr val="2C3E50"/>
+                          </a:solidFill>
+                        </a:rPr>
+                        <a:t>0.9163 ± 0.0167</a:t>
+                      </a:r>
+                    </a:p>
+                  </a:txBody>
+                  <a:tcPr>
+                    <a:solidFill>
+                      <a:srgbClr val="FFF3CD"/>
+                    </a:solidFill>
+                  </a:tcPr>
+                </a:tc>
+              </a:tr>
+              <a:tr h="189653">
+                <a:tc>
+                  <a:txBody>
+                    <a:bodyPr/>
+                    <a:lstStyle/>
+                    <a:p>
+                      <a:r>
+                        <a:rPr sz="750">
+                          <a:solidFill>
+                            <a:srgbClr val="2C3E50"/>
+                          </a:solidFill>
+                        </a:rPr>
+                        <a:t>2</a:t>
+                      </a:r>
+                    </a:p>
+                  </a:txBody>
+                  <a:tcPr>
+                    <a:solidFill>
+                      <a:srgbClr val="FFF9E6"/>
+                    </a:solidFill>
+                  </a:tcPr>
+                </a:tc>
+                <a:tc>
+                  <a:txBody>
+                    <a:bodyPr/>
+                    <a:lstStyle/>
+                    <a:p>
+                      <a:r>
+                        <a:rPr sz="750">
+                          <a:solidFill>
+                            <a:srgbClr val="2C3E50"/>
+                          </a:solidFill>
+                        </a:rPr>
                         <a:t>cpu__ET500_log2</a:t>
                       </a:r>
                     </a:p>
                   </a:txBody>
                   <a:tcPr>
                     <a:solidFill>
-                      <a:srgbClr val="FFF3CD"/>
-                    </a:solidFill>
-                  </a:tcPr>
-                </a:tc>
-                <a:tc>
-                  <a:txBody>
-                    <a:bodyPr/>
-                    <a:lstStyle/>
-                    <a:p>
-                      <a:r>
-                        <a:rPr sz="750" b="1">
+                      <a:srgbClr val="FFF9E6"/>
+                    </a:solidFill>
+                  </a:tcPr>
+                </a:tc>
+                <a:tc>
+                  <a:txBody>
+                    <a:bodyPr/>
+                    <a:lstStyle/>
+                    <a:p>
+                      <a:r>
+                        <a:rPr sz="750">
                           <a:solidFill>
                             <a:srgbClr val="2C3E50"/>
                           </a:solidFill>
@@ -8385,17 +8534,17 @@
                   </a:txBody>
                   <a:tcPr>
                     <a:solidFill>
-                      <a:srgbClr val="FFF3CD"/>
-                    </a:solidFill>
-                  </a:tcPr>
-                </a:tc>
-                <a:tc>
-                  <a:txBody>
-                    <a:bodyPr/>
-                    <a:lstStyle/>
-                    <a:p>
-                      <a:r>
-                        <a:rPr sz="750" b="1">
+                      <a:srgbClr val="FFF9E6"/>
+                    </a:solidFill>
+                  </a:tcPr>
+                </a:tc>
+                <a:tc>
+                  <a:txBody>
+                    <a:bodyPr/>
+                    <a:lstStyle/>
+                    <a:p>
+                      <a:r>
+                        <a:rPr sz="750">
                           <a:solidFill>
                             <a:srgbClr val="2C3E50"/>
                           </a:solidFill>
@@ -8406,17 +8555,17 @@
                   </a:txBody>
                   <a:tcPr>
                     <a:solidFill>
-                      <a:srgbClr val="FFF3CD"/>
-                    </a:solidFill>
-                  </a:tcPr>
-                </a:tc>
-                <a:tc>
-                  <a:txBody>
-                    <a:bodyPr/>
-                    <a:lstStyle/>
-                    <a:p>
-                      <a:r>
-                        <a:rPr sz="750" b="1">
+                      <a:srgbClr val="FFF9E6"/>
+                    </a:solidFill>
+                  </a:tcPr>
+                </a:tc>
+                <a:tc>
+                  <a:txBody>
+                    <a:bodyPr/>
+                    <a:lstStyle/>
+                    <a:p>
+                      <a:r>
+                        <a:rPr sz="750">
                           <a:solidFill>
                             <a:srgbClr val="2C3E50"/>
                           </a:solidFill>
@@ -8427,17 +8576,17 @@
                   </a:txBody>
                   <a:tcPr>
                     <a:solidFill>
-                      <a:srgbClr val="FFF3CD"/>
-                    </a:solidFill>
-                  </a:tcPr>
-                </a:tc>
-                <a:tc>
-                  <a:txBody>
-                    <a:bodyPr/>
-                    <a:lstStyle/>
-                    <a:p>
-                      <a:r>
-                        <a:rPr sz="750" b="1">
+                      <a:srgbClr val="FFF9E6"/>
+                    </a:solidFill>
+                  </a:tcPr>
+                </a:tc>
+                <a:tc>
+                  <a:txBody>
+                    <a:bodyPr/>
+                    <a:lstStyle/>
+                    <a:p>
+                      <a:r>
+                        <a:rPr sz="750">
                           <a:solidFill>
                             <a:srgbClr val="2C3E50"/>
                           </a:solidFill>
@@ -8448,17 +8597,17 @@
                   </a:txBody>
                   <a:tcPr>
                     <a:solidFill>
-                      <a:srgbClr val="FFF3CD"/>
-                    </a:solidFill>
-                  </a:tcPr>
-                </a:tc>
-                <a:tc>
-                  <a:txBody>
-                    <a:bodyPr/>
-                    <a:lstStyle/>
-                    <a:p>
-                      <a:r>
-                        <a:rPr sz="750" b="1">
+                      <a:srgbClr val="FFF9E6"/>
+                    </a:solidFill>
+                  </a:tcPr>
+                </a:tc>
+                <a:tc>
+                  <a:txBody>
+                    <a:bodyPr/>
+                    <a:lstStyle/>
+                    <a:p>
+                      <a:r>
+                        <a:rPr sz="750">
                           <a:solidFill>
                             <a:srgbClr val="2C3E50"/>
                           </a:solidFill>
@@ -8469,12 +8618,12 @@
                   </a:txBody>
                   <a:tcPr>
                     <a:solidFill>
-                      <a:srgbClr val="FFF3CD"/>
+                      <a:srgbClr val="FFF9E6"/>
                     </a:solidFill>
                   </a:tcPr>
                 </a:tc>
               </a:tr>
-              <a:tr h="196947">
+              <a:tr h="189653">
                 <a:tc>
                   <a:txBody>
                     <a:bodyPr/>
@@ -8486,7 +8635,7 @@
                             <a:srgbClr val="2C3E50"/>
                           </a:solidFill>
                         </a:rPr>
-                        <a:t>2</a:t>
+                        <a:t>3</a:t>
                       </a:r>
                     </a:p>
                   </a:txBody>
@@ -8623,7 +8772,7 @@
                   </a:tcPr>
                 </a:tc>
               </a:tr>
-              <a:tr h="196947">
+              <a:tr h="189653">
                 <a:tc>
                   <a:txBody>
                     <a:bodyPr/>
@@ -8635,13 +8784,13 @@
                             <a:srgbClr val="2C3E50"/>
                           </a:solidFill>
                         </a:rPr>
-                        <a:t>3</a:t>
-                      </a:r>
-                    </a:p>
-                  </a:txBody>
-                  <a:tcPr>
-                    <a:solidFill>
-                      <a:srgbClr val="FFF9E6"/>
+                        <a:t>4</a:t>
+                      </a:r>
+                    </a:p>
+                  </a:txBody>
+                  <a:tcPr>
+                    <a:solidFill>
+                      <a:srgbClr val="FAFBFC"/>
                     </a:solidFill>
                   </a:tcPr>
                 </a:tc>
@@ -8662,7 +8811,7 @@
                   </a:txBody>
                   <a:tcPr>
                     <a:solidFill>
-                      <a:srgbClr val="FFF9E6"/>
+                      <a:srgbClr val="FAFBFC"/>
                     </a:solidFill>
                   </a:tcPr>
                 </a:tc>
@@ -8683,7 +8832,7 @@
                   </a:txBody>
                   <a:tcPr>
                     <a:solidFill>
-                      <a:srgbClr val="FFF9E6"/>
+                      <a:srgbClr val="FAFBFC"/>
                     </a:solidFill>
                   </a:tcPr>
                 </a:tc>
@@ -8704,7 +8853,7 @@
                   </a:txBody>
                   <a:tcPr>
                     <a:solidFill>
-                      <a:srgbClr val="FFF9E6"/>
+                      <a:srgbClr val="FAFBFC"/>
                     </a:solidFill>
                   </a:tcPr>
                 </a:tc>
@@ -8725,7 +8874,7 @@
                   </a:txBody>
                   <a:tcPr>
                     <a:solidFill>
-                      <a:srgbClr val="FFF9E6"/>
+                      <a:srgbClr val="FAFBFC"/>
                     </a:solidFill>
                   </a:tcPr>
                 </a:tc>
@@ -8746,7 +8895,7 @@
                   </a:txBody>
                   <a:tcPr>
                     <a:solidFill>
-                      <a:srgbClr val="FFF9E6"/>
+                      <a:srgbClr val="FAFBFC"/>
                     </a:solidFill>
                   </a:tcPr>
                 </a:tc>
@@ -8767,12 +8916,12 @@
                   </a:txBody>
                   <a:tcPr>
                     <a:solidFill>
-                      <a:srgbClr val="FFF9E6"/>
+                      <a:srgbClr val="FAFBFC"/>
                     </a:solidFill>
                   </a:tcPr>
                 </a:tc>
               </a:tr>
-              <a:tr h="196947">
+              <a:tr h="189653">
                 <a:tc>
                   <a:txBody>
                     <a:bodyPr/>
@@ -8784,7 +8933,156 @@
                             <a:srgbClr val="2C3E50"/>
                           </a:solidFill>
                         </a:rPr>
-                        <a:t>4</a:t>
+                        <a:t>5</a:t>
+                      </a:r>
+                    </a:p>
+                  </a:txBody>
+                  <a:tcPr>
+                    <a:solidFill>
+                      <a:srgbClr val="FFFFFF"/>
+                    </a:solidFill>
+                  </a:tcPr>
+                </a:tc>
+                <a:tc>
+                  <a:txBody>
+                    <a:bodyPr/>
+                    <a:lstStyle/>
+                    <a:p>
+                      <a:r>
+                        <a:rPr sz="750">
+                          <a:solidFill>
+                            <a:srgbClr val="2C3E50"/>
+                          </a:solidFill>
+                        </a:rPr>
+                        <a:t>ftCbow__BRF100</a:t>
+                      </a:r>
+                    </a:p>
+                  </a:txBody>
+                  <a:tcPr>
+                    <a:solidFill>
+                      <a:srgbClr val="FFFFFF"/>
+                    </a:solidFill>
+                  </a:tcPr>
+                </a:tc>
+                <a:tc>
+                  <a:txBody>
+                    <a:bodyPr/>
+                    <a:lstStyle/>
+                    <a:p>
+                      <a:r>
+                        <a:rPr sz="750">
+                          <a:solidFill>
+                            <a:srgbClr val="2C3E50"/>
+                          </a:solidFill>
+                        </a:rPr>
+                        <a:t>FastText</a:t>
+                      </a:r>
+                    </a:p>
+                  </a:txBody>
+                  <a:tcPr>
+                    <a:solidFill>
+                      <a:srgbClr val="FFFFFF"/>
+                    </a:solidFill>
+                  </a:tcPr>
+                </a:tc>
+                <a:tc>
+                  <a:txBody>
+                    <a:bodyPr/>
+                    <a:lstStyle/>
+                    <a:p>
+                      <a:r>
+                        <a:rPr sz="750">
+                          <a:solidFill>
+                            <a:srgbClr val="2C3E50"/>
+                          </a:solidFill>
+                        </a:rPr>
+                        <a:t>CBOW · mean-pooled</a:t>
+                      </a:r>
+                    </a:p>
+                  </a:txBody>
+                  <a:tcPr>
+                    <a:solidFill>
+                      <a:srgbClr val="FFFFFF"/>
+                    </a:solidFill>
+                  </a:tcPr>
+                </a:tc>
+                <a:tc>
+                  <a:txBody>
+                    <a:bodyPr/>
+                    <a:lstStyle/>
+                    <a:p>
+                      <a:r>
+                        <a:rPr sz="750">
+                          <a:solidFill>
+                            <a:srgbClr val="2C3E50"/>
+                          </a:solidFill>
+                        </a:rPr>
+                        <a:t>OvR(BalancedRF)</a:t>
+                      </a:r>
+                    </a:p>
+                  </a:txBody>
+                  <a:tcPr>
+                    <a:solidFill>
+                      <a:srgbClr val="FFFFFF"/>
+                    </a:solidFill>
+                  </a:tcPr>
+                </a:tc>
+                <a:tc>
+                  <a:txBody>
+                    <a:bodyPr/>
+                    <a:lstStyle/>
+                    <a:p>
+                      <a:r>
+                        <a:rPr sz="750">
+                          <a:solidFill>
+                            <a:srgbClr val="2C3E50"/>
+                          </a:solidFill>
+                        </a:rPr>
+                        <a:t>n=100 class_weight=balanced (paper)</a:t>
+                      </a:r>
+                    </a:p>
+                  </a:txBody>
+                  <a:tcPr>
+                    <a:solidFill>
+                      <a:srgbClr val="FFFFFF"/>
+                    </a:solidFill>
+                  </a:tcPr>
+                </a:tc>
+                <a:tc>
+                  <a:txBody>
+                    <a:bodyPr/>
+                    <a:lstStyle/>
+                    <a:p>
+                      <a:r>
+                        <a:rPr sz="750">
+                          <a:solidFill>
+                            <a:srgbClr val="2C3E50"/>
+                          </a:solidFill>
+                        </a:rPr>
+                        <a:t>0.8289 ± 0.0230</a:t>
+                      </a:r>
+                    </a:p>
+                  </a:txBody>
+                  <a:tcPr>
+                    <a:solidFill>
+                      <a:srgbClr val="FFFFFF"/>
+                    </a:solidFill>
+                  </a:tcPr>
+                </a:tc>
+              </a:tr>
+              <a:tr h="189653">
+                <a:tc>
+                  <a:txBody>
+                    <a:bodyPr/>
+                    <a:lstStyle/>
+                    <a:p>
+                      <a:r>
+                        <a:rPr sz="750">
+                          <a:solidFill>
+                            <a:srgbClr val="2C3E50"/>
+                          </a:solidFill>
+                        </a:rPr>
+                        <a:t>6</a:t>
                       </a:r>
                     </a:p>
                   </a:txBody>
@@ -8805,7 +9103,7 @@
                             <a:srgbClr val="2C3E50"/>
                           </a:solidFill>
                         </a:rPr>
-                        <a:t>ftCbow__BRF100</a:t>
+                        <a:t>w2vSg__BRF100</a:t>
                       </a:r>
                     </a:p>
                   </a:txBody>
@@ -8826,12 +9124,268 @@
                             <a:srgbClr val="2C3E50"/>
                           </a:solidFill>
                         </a:rPr>
+                        <a:t>Word2Vec</a:t>
+                      </a:r>
+                    </a:p>
+                  </a:txBody>
+                  <a:tcPr>
+                    <a:solidFill>
+                      <a:srgbClr val="FAFBFC"/>
+                    </a:solidFill>
+                  </a:tcPr>
+                </a:tc>
+                <a:tc>
+                  <a:txBody>
+                    <a:bodyPr/>
+                    <a:lstStyle/>
+                    <a:p>
+                      <a:r>
+                        <a:rPr sz="750">
+                          <a:solidFill>
+                            <a:srgbClr val="2C3E50"/>
+                          </a:solidFill>
+                        </a:rPr>
+                        <a:t>skip-gram · mean-pooled</a:t>
+                      </a:r>
+                    </a:p>
+                  </a:txBody>
+                  <a:tcPr>
+                    <a:solidFill>
+                      <a:srgbClr val="FAFBFC"/>
+                    </a:solidFill>
+                  </a:tcPr>
+                </a:tc>
+                <a:tc>
+                  <a:txBody>
+                    <a:bodyPr/>
+                    <a:lstStyle/>
+                    <a:p>
+                      <a:r>
+                        <a:rPr sz="750">
+                          <a:solidFill>
+                            <a:srgbClr val="2C3E50"/>
+                          </a:solidFill>
+                        </a:rPr>
+                        <a:t>OvR(BalancedRF)</a:t>
+                      </a:r>
+                    </a:p>
+                  </a:txBody>
+                  <a:tcPr>
+                    <a:solidFill>
+                      <a:srgbClr val="FAFBFC"/>
+                    </a:solidFill>
+                  </a:tcPr>
+                </a:tc>
+                <a:tc>
+                  <a:txBody>
+                    <a:bodyPr/>
+                    <a:lstStyle/>
+                    <a:p>
+                      <a:r>
+                        <a:rPr sz="750">
+                          <a:solidFill>
+                            <a:srgbClr val="2C3E50"/>
+                          </a:solidFill>
+                        </a:rPr>
+                        <a:t>n=100 class_weight=balanced (paper)</a:t>
+                      </a:r>
+                    </a:p>
+                  </a:txBody>
+                  <a:tcPr>
+                    <a:solidFill>
+                      <a:srgbClr val="FAFBFC"/>
+                    </a:solidFill>
+                  </a:tcPr>
+                </a:tc>
+                <a:tc>
+                  <a:txBody>
+                    <a:bodyPr/>
+                    <a:lstStyle/>
+                    <a:p>
+                      <a:r>
+                        <a:rPr sz="750">
+                          <a:solidFill>
+                            <a:srgbClr val="2C3E50"/>
+                          </a:solidFill>
+                        </a:rPr>
+                        <a:t>0.8243 ± 0.0266</a:t>
+                      </a:r>
+                    </a:p>
+                  </a:txBody>
+                  <a:tcPr>
+                    <a:solidFill>
+                      <a:srgbClr val="FAFBFC"/>
+                    </a:solidFill>
+                  </a:tcPr>
+                </a:tc>
+              </a:tr>
+              <a:tr h="189653">
+                <a:tc>
+                  <a:txBody>
+                    <a:bodyPr/>
+                    <a:lstStyle/>
+                    <a:p>
+                      <a:r>
+                        <a:rPr sz="750">
+                          <a:solidFill>
+                            <a:srgbClr val="2C3E50"/>
+                          </a:solidFill>
+                        </a:rPr>
+                        <a:t>7</a:t>
+                      </a:r>
+                    </a:p>
+                  </a:txBody>
+                  <a:tcPr>
+                    <a:solidFill>
+                      <a:srgbClr val="FFFFFF"/>
+                    </a:solidFill>
+                  </a:tcPr>
+                </a:tc>
+                <a:tc>
+                  <a:txBody>
+                    <a:bodyPr/>
+                    <a:lstStyle/>
+                    <a:p>
+                      <a:r>
+                        <a:rPr sz="750">
+                          <a:solidFill>
+                            <a:srgbClr val="2C3E50"/>
+                          </a:solidFill>
+                        </a:rPr>
+                        <a:t>ftSg__BRF100</a:t>
+                      </a:r>
+                    </a:p>
+                  </a:txBody>
+                  <a:tcPr>
+                    <a:solidFill>
+                      <a:srgbClr val="FFFFFF"/>
+                    </a:solidFill>
+                  </a:tcPr>
+                </a:tc>
+                <a:tc>
+                  <a:txBody>
+                    <a:bodyPr/>
+                    <a:lstStyle/>
+                    <a:p>
+                      <a:r>
+                        <a:rPr sz="750">
+                          <a:solidFill>
+                            <a:srgbClr val="2C3E50"/>
+                          </a:solidFill>
+                        </a:rPr>
                         <a:t>FastText</a:t>
                       </a:r>
                     </a:p>
                   </a:txBody>
                   <a:tcPr>
                     <a:solidFill>
+                      <a:srgbClr val="FFFFFF"/>
+                    </a:solidFill>
+                  </a:tcPr>
+                </a:tc>
+                <a:tc>
+                  <a:txBody>
+                    <a:bodyPr/>
+                    <a:lstStyle/>
+                    <a:p>
+                      <a:r>
+                        <a:rPr sz="750">
+                          <a:solidFill>
+                            <a:srgbClr val="2C3E50"/>
+                          </a:solidFill>
+                        </a:rPr>
+                        <a:t>skip-gram · mean-pooled</a:t>
+                      </a:r>
+                    </a:p>
+                  </a:txBody>
+                  <a:tcPr>
+                    <a:solidFill>
+                      <a:srgbClr val="FFFFFF"/>
+                    </a:solidFill>
+                  </a:tcPr>
+                </a:tc>
+                <a:tc>
+                  <a:txBody>
+                    <a:bodyPr/>
+                    <a:lstStyle/>
+                    <a:p>
+                      <a:r>
+                        <a:rPr sz="750">
+                          <a:solidFill>
+                            <a:srgbClr val="2C3E50"/>
+                          </a:solidFill>
+                        </a:rPr>
+                        <a:t>OvR(BalancedRF)</a:t>
+                      </a:r>
+                    </a:p>
+                  </a:txBody>
+                  <a:tcPr>
+                    <a:solidFill>
+                      <a:srgbClr val="FFFFFF"/>
+                    </a:solidFill>
+                  </a:tcPr>
+                </a:tc>
+                <a:tc>
+                  <a:txBody>
+                    <a:bodyPr/>
+                    <a:lstStyle/>
+                    <a:p>
+                      <a:r>
+                        <a:rPr sz="750">
+                          <a:solidFill>
+                            <a:srgbClr val="2C3E50"/>
+                          </a:solidFill>
+                        </a:rPr>
+                        <a:t>n=100 class_weight=balanced (paper)</a:t>
+                      </a:r>
+                    </a:p>
+                  </a:txBody>
+                  <a:tcPr>
+                    <a:solidFill>
+                      <a:srgbClr val="FFFFFF"/>
+                    </a:solidFill>
+                  </a:tcPr>
+                </a:tc>
+                <a:tc>
+                  <a:txBody>
+                    <a:bodyPr/>
+                    <a:lstStyle/>
+                    <a:p>
+                      <a:r>
+                        <a:rPr sz="750">
+                          <a:solidFill>
+                            <a:srgbClr val="2C3E50"/>
+                          </a:solidFill>
+                        </a:rPr>
+                        <a:t>0.8136 ± 0.0256</a:t>
+                      </a:r>
+                    </a:p>
+                  </a:txBody>
+                  <a:tcPr>
+                    <a:solidFill>
+                      <a:srgbClr val="FFFFFF"/>
+                    </a:solidFill>
+                  </a:tcPr>
+                </a:tc>
+              </a:tr>
+              <a:tr h="189653">
+                <a:tc>
+                  <a:txBody>
+                    <a:bodyPr/>
+                    <a:lstStyle/>
+                    <a:p>
+                      <a:r>
+                        <a:rPr sz="750">
+                          <a:solidFill>
+                            <a:srgbClr val="2C3E50"/>
+                          </a:solidFill>
+                        </a:rPr>
+                        <a:t>8</a:t>
+                      </a:r>
+                    </a:p>
+                  </a:txBody>
+                  <a:tcPr>
+                    <a:solidFill>
                       <a:srgbClr val="FAFBFC"/>
                     </a:solidFill>
                   </a:tcPr>
@@ -8847,6 +9401,48 @@
                             <a:srgbClr val="2C3E50"/>
                           </a:solidFill>
                         </a:rPr>
+                        <a:t>w2vCbow__BRF100</a:t>
+                      </a:r>
+                    </a:p>
+                  </a:txBody>
+                  <a:tcPr>
+                    <a:solidFill>
+                      <a:srgbClr val="FAFBFC"/>
+                    </a:solidFill>
+                  </a:tcPr>
+                </a:tc>
+                <a:tc>
+                  <a:txBody>
+                    <a:bodyPr/>
+                    <a:lstStyle/>
+                    <a:p>
+                      <a:r>
+                        <a:rPr sz="750">
+                          <a:solidFill>
+                            <a:srgbClr val="2C3E50"/>
+                          </a:solidFill>
+                        </a:rPr>
+                        <a:t>Word2Vec</a:t>
+                      </a:r>
+                    </a:p>
+                  </a:txBody>
+                  <a:tcPr>
+                    <a:solidFill>
+                      <a:srgbClr val="FAFBFC"/>
+                    </a:solidFill>
+                  </a:tcPr>
+                </a:tc>
+                <a:tc>
+                  <a:txBody>
+                    <a:bodyPr/>
+                    <a:lstStyle/>
+                    <a:p>
+                      <a:r>
+                        <a:rPr sz="750">
+                          <a:solidFill>
+                            <a:srgbClr val="2C3E50"/>
+                          </a:solidFill>
+                        </a:rPr>
                         <a:t>CBOW · mean-pooled</a:t>
                       </a:r>
                     </a:p>
@@ -8910,7 +9506,7 @@
                             <a:srgbClr val="2C3E50"/>
                           </a:solidFill>
                         </a:rPr>
-                        <a:t>0.8289 ± 0.0230</a:t>
+                        <a:t>0.8122 ± 0.0286</a:t>
                       </a:r>
                     </a:p>
                   </a:txBody>
@@ -8921,7 +9517,7 @@
                   </a:tcPr>
                 </a:tc>
               </a:tr>
-              <a:tr h="196947">
+              <a:tr h="189653">
                 <a:tc>
                   <a:txBody>
                     <a:bodyPr/>
@@ -8933,7 +9529,7 @@
                             <a:srgbClr val="2C3E50"/>
                           </a:solidFill>
                         </a:rPr>
-                        <a:t>5</a:t>
+                        <a:t>9</a:t>
                       </a:r>
                     </a:p>
                   </a:txBody>
@@ -8954,7 +9550,7 @@
                             <a:srgbClr val="2C3E50"/>
                           </a:solidFill>
                         </a:rPr>
-                        <a:t>w2vSg__BRF100</a:t>
+                        <a:t>d2vDbow__BRF100</a:t>
                       </a:r>
                     </a:p>
                   </a:txBody>
@@ -8975,12 +9571,864 @@
                             <a:srgbClr val="2C3E50"/>
                           </a:solidFill>
                         </a:rPr>
+                        <a:t>Doc2Vec</a:t>
+                      </a:r>
+                    </a:p>
+                  </a:txBody>
+                  <a:tcPr>
+                    <a:solidFill>
+                      <a:srgbClr val="FFFFFF"/>
+                    </a:solidFill>
+                  </a:tcPr>
+                </a:tc>
+                <a:tc>
+                  <a:txBody>
+                    <a:bodyPr/>
+                    <a:lstStyle/>
+                    <a:p>
+                      <a:r>
+                        <a:rPr sz="750">
+                          <a:solidFill>
+                            <a:srgbClr val="2C3E50"/>
+                          </a:solidFill>
+                        </a:rPr>
+                        <a:t>DBOW · doc-vector</a:t>
+                      </a:r>
+                    </a:p>
+                  </a:txBody>
+                  <a:tcPr>
+                    <a:solidFill>
+                      <a:srgbClr val="FFFFFF"/>
+                    </a:solidFill>
+                  </a:tcPr>
+                </a:tc>
+                <a:tc>
+                  <a:txBody>
+                    <a:bodyPr/>
+                    <a:lstStyle/>
+                    <a:p>
+                      <a:r>
+                        <a:rPr sz="750">
+                          <a:solidFill>
+                            <a:srgbClr val="2C3E50"/>
+                          </a:solidFill>
+                        </a:rPr>
+                        <a:t>OvR(BalancedRF)</a:t>
+                      </a:r>
+                    </a:p>
+                  </a:txBody>
+                  <a:tcPr>
+                    <a:solidFill>
+                      <a:srgbClr val="FFFFFF"/>
+                    </a:solidFill>
+                  </a:tcPr>
+                </a:tc>
+                <a:tc>
+                  <a:txBody>
+                    <a:bodyPr/>
+                    <a:lstStyle/>
+                    <a:p>
+                      <a:r>
+                        <a:rPr sz="750">
+                          <a:solidFill>
+                            <a:srgbClr val="2C3E50"/>
+                          </a:solidFill>
+                        </a:rPr>
+                        <a:t>n=100 class_weight=balanced (paper)</a:t>
+                      </a:r>
+                    </a:p>
+                  </a:txBody>
+                  <a:tcPr>
+                    <a:solidFill>
+                      <a:srgbClr val="FFFFFF"/>
+                    </a:solidFill>
+                  </a:tcPr>
+                </a:tc>
+                <a:tc>
+                  <a:txBody>
+                    <a:bodyPr/>
+                    <a:lstStyle/>
+                    <a:p>
+                      <a:r>
+                        <a:rPr sz="750">
+                          <a:solidFill>
+                            <a:srgbClr val="2C3E50"/>
+                          </a:solidFill>
+                        </a:rPr>
+                        <a:t>0.8093 ± 0.0255</a:t>
+                      </a:r>
+                    </a:p>
+                  </a:txBody>
+                  <a:tcPr>
+                    <a:solidFill>
+                      <a:srgbClr val="FFFFFF"/>
+                    </a:solidFill>
+                  </a:tcPr>
+                </a:tc>
+              </a:tr>
+              <a:tr h="189653">
+                <a:tc>
+                  <a:txBody>
+                    <a:bodyPr/>
+                    <a:lstStyle/>
+                    <a:p>
+                      <a:r>
+                        <a:rPr sz="750">
+                          <a:solidFill>
+                            <a:srgbClr val="2C3E50"/>
+                          </a:solidFill>
+                        </a:rPr>
+                        <a:t>10</a:t>
+                      </a:r>
+                    </a:p>
+                  </a:txBody>
+                  <a:tcPr>
+                    <a:solidFill>
+                      <a:srgbClr val="FAFBFC"/>
+                    </a:solidFill>
+                  </a:tcPr>
+                </a:tc>
+                <a:tc>
+                  <a:txBody>
+                    <a:bodyPr/>
+                    <a:lstStyle/>
+                    <a:p>
+                      <a:r>
+                        <a:rPr sz="750">
+                          <a:solidFill>
+                            <a:srgbClr val="2C3E50"/>
+                          </a:solidFill>
+                        </a:rPr>
+                        <a:t>ftSg__LSTM</a:t>
+                      </a:r>
+                    </a:p>
+                  </a:txBody>
+                  <a:tcPr>
+                    <a:solidFill>
+                      <a:srgbClr val="FAFBFC"/>
+                    </a:solidFill>
+                  </a:tcPr>
+                </a:tc>
+                <a:tc>
+                  <a:txBody>
+                    <a:bodyPr/>
+                    <a:lstStyle/>
+                    <a:p>
+                      <a:r>
+                        <a:rPr sz="750">
+                          <a:solidFill>
+                            <a:srgbClr val="2C3E50"/>
+                          </a:solidFill>
+                        </a:rPr>
+                        <a:t>FastText</a:t>
+                      </a:r>
+                    </a:p>
+                  </a:txBody>
+                  <a:tcPr>
+                    <a:solidFill>
+                      <a:srgbClr val="FAFBFC"/>
+                    </a:solidFill>
+                  </a:tcPr>
+                </a:tc>
+                <a:tc>
+                  <a:txBody>
+                    <a:bodyPr/>
+                    <a:lstStyle/>
+                    <a:p>
+                      <a:r>
+                        <a:rPr sz="750">
+                          <a:solidFill>
+                            <a:srgbClr val="2C3E50"/>
+                          </a:solidFill>
+                        </a:rPr>
+                        <a:t>skip-gram · mean-pooled</a:t>
+                      </a:r>
+                    </a:p>
+                  </a:txBody>
+                  <a:tcPr>
+                    <a:solidFill>
+                      <a:srgbClr val="FAFBFC"/>
+                    </a:solidFill>
+                  </a:tcPr>
+                </a:tc>
+                <a:tc>
+                  <a:txBody>
+                    <a:bodyPr/>
+                    <a:lstStyle/>
+                    <a:p>
+                      <a:r>
+                        <a:rPr sz="750">
+                          <a:solidFill>
+                            <a:srgbClr val="2C3E50"/>
+                          </a:solidFill>
+                        </a:rPr>
+                        <a:t>DL: LSTM</a:t>
+                      </a:r>
+                    </a:p>
+                  </a:txBody>
+                  <a:tcPr>
+                    <a:solidFill>
+                      <a:srgbClr val="FAFBFC"/>
+                    </a:solidFill>
+                  </a:tcPr>
+                </a:tc>
+                <a:tc>
+                  <a:txBody>
+                    <a:bodyPr/>
+                    <a:lstStyle/>
+                    <a:p>
+                      <a:r>
+                        <a:rPr sz="750">
+                          <a:solidFill>
+                            <a:srgbClr val="2C3E50"/>
+                          </a:solidFill>
+                        </a:rPr>
+                        <a:t>vanilla LSTM (paper)</a:t>
+                      </a:r>
+                    </a:p>
+                  </a:txBody>
+                  <a:tcPr>
+                    <a:solidFill>
+                      <a:srgbClr val="FAFBFC"/>
+                    </a:solidFill>
+                  </a:tcPr>
+                </a:tc>
+                <a:tc>
+                  <a:txBody>
+                    <a:bodyPr/>
+                    <a:lstStyle/>
+                    <a:p>
+                      <a:r>
+                        <a:rPr sz="750">
+                          <a:solidFill>
+                            <a:srgbClr val="2C3E50"/>
+                          </a:solidFill>
+                        </a:rPr>
+                        <a:t>0.7922 ± 0.0331</a:t>
+                      </a:r>
+                    </a:p>
+                  </a:txBody>
+                  <a:tcPr>
+                    <a:solidFill>
+                      <a:srgbClr val="FAFBFC"/>
+                    </a:solidFill>
+                  </a:tcPr>
+                </a:tc>
+              </a:tr>
+              <a:tr h="189653">
+                <a:tc>
+                  <a:txBody>
+                    <a:bodyPr/>
+                    <a:lstStyle/>
+                    <a:p>
+                      <a:r>
+                        <a:rPr sz="750">
+                          <a:solidFill>
+                            <a:srgbClr val="2C3E50"/>
+                          </a:solidFill>
+                        </a:rPr>
+                        <a:t>11</a:t>
+                      </a:r>
+                    </a:p>
+                  </a:txBody>
+                  <a:tcPr>
+                    <a:solidFill>
+                      <a:srgbClr val="FFFFFF"/>
+                    </a:solidFill>
+                  </a:tcPr>
+                </a:tc>
+                <a:tc>
+                  <a:txBody>
+                    <a:bodyPr/>
+                    <a:lstStyle/>
+                    <a:p>
+                      <a:r>
+                        <a:rPr sz="750">
+                          <a:solidFill>
+                            <a:srgbClr val="2C3E50"/>
+                          </a:solidFill>
+                        </a:rPr>
+                        <a:t>ftSg__LSTMattn</a:t>
+                      </a:r>
+                    </a:p>
+                  </a:txBody>
+                  <a:tcPr>
+                    <a:solidFill>
+                      <a:srgbClr val="FFFFFF"/>
+                    </a:solidFill>
+                  </a:tcPr>
+                </a:tc>
+                <a:tc>
+                  <a:txBody>
+                    <a:bodyPr/>
+                    <a:lstStyle/>
+                    <a:p>
+                      <a:r>
+                        <a:rPr sz="750">
+                          <a:solidFill>
+                            <a:srgbClr val="2C3E50"/>
+                          </a:solidFill>
+                        </a:rPr>
+                        <a:t>FastText</a:t>
+                      </a:r>
+                    </a:p>
+                  </a:txBody>
+                  <a:tcPr>
+                    <a:solidFill>
+                      <a:srgbClr val="FFFFFF"/>
+                    </a:solidFill>
+                  </a:tcPr>
+                </a:tc>
+                <a:tc>
+                  <a:txBody>
+                    <a:bodyPr/>
+                    <a:lstStyle/>
+                    <a:p>
+                      <a:r>
+                        <a:rPr sz="750">
+                          <a:solidFill>
+                            <a:srgbClr val="2C3E50"/>
+                          </a:solidFill>
+                        </a:rPr>
+                        <a:t>skip-gram · mean-pooled</a:t>
+                      </a:r>
+                    </a:p>
+                  </a:txBody>
+                  <a:tcPr>
+                    <a:solidFill>
+                      <a:srgbClr val="FFFFFF"/>
+                    </a:solidFill>
+                  </a:tcPr>
+                </a:tc>
+                <a:tc>
+                  <a:txBody>
+                    <a:bodyPr/>
+                    <a:lstStyle/>
+                    <a:p>
+                      <a:r>
+                        <a:rPr sz="750">
+                          <a:solidFill>
+                            <a:srgbClr val="2C3E50"/>
+                          </a:solidFill>
+                        </a:rPr>
+                        <a:t>DL: LSTM+attention</a:t>
+                      </a:r>
+                    </a:p>
+                  </a:txBody>
+                  <a:tcPr>
+                    <a:solidFill>
+                      <a:srgbClr val="FFFFFF"/>
+                    </a:solidFill>
+                  </a:tcPr>
+                </a:tc>
+                <a:tc>
+                  <a:txBody>
+                    <a:bodyPr/>
+                    <a:lstStyle/>
+                    <a:p>
+                      <a:r>
+                        <a:rPr sz="750">
+                          <a:solidFill>
+                            <a:srgbClr val="2C3E50"/>
+                          </a:solidFill>
+                        </a:rPr>
+                        <a:t>LSTM + attention (paper)</a:t>
+                      </a:r>
+                    </a:p>
+                  </a:txBody>
+                  <a:tcPr>
+                    <a:solidFill>
+                      <a:srgbClr val="FFFFFF"/>
+                    </a:solidFill>
+                  </a:tcPr>
+                </a:tc>
+                <a:tc>
+                  <a:txBody>
+                    <a:bodyPr/>
+                    <a:lstStyle/>
+                    <a:p>
+                      <a:r>
+                        <a:rPr sz="750">
+                          <a:solidFill>
+                            <a:srgbClr val="2C3E50"/>
+                          </a:solidFill>
+                        </a:rPr>
+                        <a:t>0.7889 ± 0.0239</a:t>
+                      </a:r>
+                    </a:p>
+                  </a:txBody>
+                  <a:tcPr>
+                    <a:solidFill>
+                      <a:srgbClr val="FFFFFF"/>
+                    </a:solidFill>
+                  </a:tcPr>
+                </a:tc>
+              </a:tr>
+              <a:tr h="189653">
+                <a:tc>
+                  <a:txBody>
+                    <a:bodyPr/>
+                    <a:lstStyle/>
+                    <a:p>
+                      <a:r>
+                        <a:rPr sz="750">
+                          <a:solidFill>
+                            <a:srgbClr val="2C3E50"/>
+                          </a:solidFill>
+                        </a:rPr>
+                        <a:t>12</a:t>
+                      </a:r>
+                    </a:p>
+                  </a:txBody>
+                  <a:tcPr>
+                    <a:solidFill>
+                      <a:srgbClr val="FAFBFC"/>
+                    </a:solidFill>
+                  </a:tcPr>
+                </a:tc>
+                <a:tc>
+                  <a:txBody>
+                    <a:bodyPr/>
+                    <a:lstStyle/>
+                    <a:p>
+                      <a:r>
+                        <a:rPr sz="750">
+                          <a:solidFill>
+                            <a:srgbClr val="2C3E50"/>
+                          </a:solidFill>
+                        </a:rPr>
+                        <a:t>ftCbow__LSTMattn</a:t>
+                      </a:r>
+                    </a:p>
+                  </a:txBody>
+                  <a:tcPr>
+                    <a:solidFill>
+                      <a:srgbClr val="FAFBFC"/>
+                    </a:solidFill>
+                  </a:tcPr>
+                </a:tc>
+                <a:tc>
+                  <a:txBody>
+                    <a:bodyPr/>
+                    <a:lstStyle/>
+                    <a:p>
+                      <a:r>
+                        <a:rPr sz="750">
+                          <a:solidFill>
+                            <a:srgbClr val="2C3E50"/>
+                          </a:solidFill>
+                        </a:rPr>
+                        <a:t>FastText</a:t>
+                      </a:r>
+                    </a:p>
+                  </a:txBody>
+                  <a:tcPr>
+                    <a:solidFill>
+                      <a:srgbClr val="FAFBFC"/>
+                    </a:solidFill>
+                  </a:tcPr>
+                </a:tc>
+                <a:tc>
+                  <a:txBody>
+                    <a:bodyPr/>
+                    <a:lstStyle/>
+                    <a:p>
+                      <a:r>
+                        <a:rPr sz="750">
+                          <a:solidFill>
+                            <a:srgbClr val="2C3E50"/>
+                          </a:solidFill>
+                        </a:rPr>
+                        <a:t>CBOW · mean-pooled</a:t>
+                      </a:r>
+                    </a:p>
+                  </a:txBody>
+                  <a:tcPr>
+                    <a:solidFill>
+                      <a:srgbClr val="FAFBFC"/>
+                    </a:solidFill>
+                  </a:tcPr>
+                </a:tc>
+                <a:tc>
+                  <a:txBody>
+                    <a:bodyPr/>
+                    <a:lstStyle/>
+                    <a:p>
+                      <a:r>
+                        <a:rPr sz="750">
+                          <a:solidFill>
+                            <a:srgbClr val="2C3E50"/>
+                          </a:solidFill>
+                        </a:rPr>
+                        <a:t>DL: LSTM+attention</a:t>
+                      </a:r>
+                    </a:p>
+                  </a:txBody>
+                  <a:tcPr>
+                    <a:solidFill>
+                      <a:srgbClr val="FAFBFC"/>
+                    </a:solidFill>
+                  </a:tcPr>
+                </a:tc>
+                <a:tc>
+                  <a:txBody>
+                    <a:bodyPr/>
+                    <a:lstStyle/>
+                    <a:p>
+                      <a:r>
+                        <a:rPr sz="750">
+                          <a:solidFill>
+                            <a:srgbClr val="2C3E50"/>
+                          </a:solidFill>
+                        </a:rPr>
+                        <a:t>LSTM + attention (paper)</a:t>
+                      </a:r>
+                    </a:p>
+                  </a:txBody>
+                  <a:tcPr>
+                    <a:solidFill>
+                      <a:srgbClr val="FAFBFC"/>
+                    </a:solidFill>
+                  </a:tcPr>
+                </a:tc>
+                <a:tc>
+                  <a:txBody>
+                    <a:bodyPr/>
+                    <a:lstStyle/>
+                    <a:p>
+                      <a:r>
+                        <a:rPr sz="750">
+                          <a:solidFill>
+                            <a:srgbClr val="2C3E50"/>
+                          </a:solidFill>
+                        </a:rPr>
+                        <a:t>0.7887 ± 0.0258</a:t>
+                      </a:r>
+                    </a:p>
+                  </a:txBody>
+                  <a:tcPr>
+                    <a:solidFill>
+                      <a:srgbClr val="FAFBFC"/>
+                    </a:solidFill>
+                  </a:tcPr>
+                </a:tc>
+              </a:tr>
+              <a:tr h="189653">
+                <a:tc>
+                  <a:txBody>
+                    <a:bodyPr/>
+                    <a:lstStyle/>
+                    <a:p>
+                      <a:r>
+                        <a:rPr sz="750">
+                          <a:solidFill>
+                            <a:srgbClr val="2C3E50"/>
+                          </a:solidFill>
+                        </a:rPr>
+                        <a:t>13</a:t>
+                      </a:r>
+                    </a:p>
+                  </a:txBody>
+                  <a:tcPr>
+                    <a:solidFill>
+                      <a:srgbClr val="FFFFFF"/>
+                    </a:solidFill>
+                  </a:tcPr>
+                </a:tc>
+                <a:tc>
+                  <a:txBody>
+                    <a:bodyPr/>
+                    <a:lstStyle/>
+                    <a:p>
+                      <a:r>
+                        <a:rPr sz="750">
+                          <a:solidFill>
+                            <a:srgbClr val="2C3E50"/>
+                          </a:solidFill>
+                        </a:rPr>
+                        <a:t>ftSg__JustAttn</a:t>
+                      </a:r>
+                    </a:p>
+                  </a:txBody>
+                  <a:tcPr>
+                    <a:solidFill>
+                      <a:srgbClr val="FFFFFF"/>
+                    </a:solidFill>
+                  </a:tcPr>
+                </a:tc>
+                <a:tc>
+                  <a:txBody>
+                    <a:bodyPr/>
+                    <a:lstStyle/>
+                    <a:p>
+                      <a:r>
+                        <a:rPr sz="750">
+                          <a:solidFill>
+                            <a:srgbClr val="2C3E50"/>
+                          </a:solidFill>
+                        </a:rPr>
+                        <a:t>FastText</a:t>
+                      </a:r>
+                    </a:p>
+                  </a:txBody>
+                  <a:tcPr>
+                    <a:solidFill>
+                      <a:srgbClr val="FFFFFF"/>
+                    </a:solidFill>
+                  </a:tcPr>
+                </a:tc>
+                <a:tc>
+                  <a:txBody>
+                    <a:bodyPr/>
+                    <a:lstStyle/>
+                    <a:p>
+                      <a:r>
+                        <a:rPr sz="750">
+                          <a:solidFill>
+                            <a:srgbClr val="2C3E50"/>
+                          </a:solidFill>
+                        </a:rPr>
+                        <a:t>skip-gram · mean-pooled</a:t>
+                      </a:r>
+                    </a:p>
+                  </a:txBody>
+                  <a:tcPr>
+                    <a:solidFill>
+                      <a:srgbClr val="FFFFFF"/>
+                    </a:solidFill>
+                  </a:tcPr>
+                </a:tc>
+                <a:tc>
+                  <a:txBody>
+                    <a:bodyPr/>
+                    <a:lstStyle/>
+                    <a:p>
+                      <a:r>
+                        <a:rPr sz="750">
+                          <a:solidFill>
+                            <a:srgbClr val="2C3E50"/>
+                          </a:solidFill>
+                        </a:rPr>
+                        <a:t>DL: attention</a:t>
+                      </a:r>
+                    </a:p>
+                  </a:txBody>
+                  <a:tcPr>
+                    <a:solidFill>
+                      <a:srgbClr val="FFFFFF"/>
+                    </a:solidFill>
+                  </a:tcPr>
+                </a:tc>
+                <a:tc>
+                  <a:txBody>
+                    <a:bodyPr/>
+                    <a:lstStyle/>
+                    <a:p>
+                      <a:r>
+                        <a:rPr sz="750">
+                          <a:solidFill>
+                            <a:srgbClr val="2C3E50"/>
+                          </a:solidFill>
+                        </a:rPr>
+                        <a:t>attention-only (paper)</a:t>
+                      </a:r>
+                    </a:p>
+                  </a:txBody>
+                  <a:tcPr>
+                    <a:solidFill>
+                      <a:srgbClr val="FFFFFF"/>
+                    </a:solidFill>
+                  </a:tcPr>
+                </a:tc>
+                <a:tc>
+                  <a:txBody>
+                    <a:bodyPr/>
+                    <a:lstStyle/>
+                    <a:p>
+                      <a:r>
+                        <a:rPr sz="750">
+                          <a:solidFill>
+                            <a:srgbClr val="2C3E50"/>
+                          </a:solidFill>
+                        </a:rPr>
+                        <a:t>0.7812 ± 0.0318</a:t>
+                      </a:r>
+                    </a:p>
+                  </a:txBody>
+                  <a:tcPr>
+                    <a:solidFill>
+                      <a:srgbClr val="FFFFFF"/>
+                    </a:solidFill>
+                  </a:tcPr>
+                </a:tc>
+              </a:tr>
+              <a:tr h="189653">
+                <a:tc>
+                  <a:txBody>
+                    <a:bodyPr/>
+                    <a:lstStyle/>
+                    <a:p>
+                      <a:r>
+                        <a:rPr sz="750">
+                          <a:solidFill>
+                            <a:srgbClr val="2C3E50"/>
+                          </a:solidFill>
+                        </a:rPr>
+                        <a:t>14</a:t>
+                      </a:r>
+                    </a:p>
+                  </a:txBody>
+                  <a:tcPr>
+                    <a:solidFill>
+                      <a:srgbClr val="FAFBFC"/>
+                    </a:solidFill>
+                  </a:tcPr>
+                </a:tc>
+                <a:tc>
+                  <a:txBody>
+                    <a:bodyPr/>
+                    <a:lstStyle/>
+                    <a:p>
+                      <a:r>
+                        <a:rPr sz="750">
+                          <a:solidFill>
+                            <a:srgbClr val="2C3E50"/>
+                          </a:solidFill>
+                        </a:rPr>
+                        <a:t>w2vSg__LSTMattn</a:t>
+                      </a:r>
+                    </a:p>
+                  </a:txBody>
+                  <a:tcPr>
+                    <a:solidFill>
+                      <a:srgbClr val="FAFBFC"/>
+                    </a:solidFill>
+                  </a:tcPr>
+                </a:tc>
+                <a:tc>
+                  <a:txBody>
+                    <a:bodyPr/>
+                    <a:lstStyle/>
+                    <a:p>
+                      <a:r>
+                        <a:rPr sz="750">
+                          <a:solidFill>
+                            <a:srgbClr val="2C3E50"/>
+                          </a:solidFill>
+                        </a:rPr>
                         <a:t>Word2Vec</a:t>
                       </a:r>
                     </a:p>
                   </a:txBody>
                   <a:tcPr>
                     <a:solidFill>
+                      <a:srgbClr val="FAFBFC"/>
+                    </a:solidFill>
+                  </a:tcPr>
+                </a:tc>
+                <a:tc>
+                  <a:txBody>
+                    <a:bodyPr/>
+                    <a:lstStyle/>
+                    <a:p>
+                      <a:r>
+                        <a:rPr sz="750">
+                          <a:solidFill>
+                            <a:srgbClr val="2C3E50"/>
+                          </a:solidFill>
+                        </a:rPr>
+                        <a:t>skip-gram · mean-pooled</a:t>
+                      </a:r>
+                    </a:p>
+                  </a:txBody>
+                  <a:tcPr>
+                    <a:solidFill>
+                      <a:srgbClr val="FAFBFC"/>
+                    </a:solidFill>
+                  </a:tcPr>
+                </a:tc>
+                <a:tc>
+                  <a:txBody>
+                    <a:bodyPr/>
+                    <a:lstStyle/>
+                    <a:p>
+                      <a:r>
+                        <a:rPr sz="750">
+                          <a:solidFill>
+                            <a:srgbClr val="2C3E50"/>
+                          </a:solidFill>
+                        </a:rPr>
+                        <a:t>DL: LSTM+attention</a:t>
+                      </a:r>
+                    </a:p>
+                  </a:txBody>
+                  <a:tcPr>
+                    <a:solidFill>
+                      <a:srgbClr val="FAFBFC"/>
+                    </a:solidFill>
+                  </a:tcPr>
+                </a:tc>
+                <a:tc>
+                  <a:txBody>
+                    <a:bodyPr/>
+                    <a:lstStyle/>
+                    <a:p>
+                      <a:r>
+                        <a:rPr sz="750">
+                          <a:solidFill>
+                            <a:srgbClr val="2C3E50"/>
+                          </a:solidFill>
+                        </a:rPr>
+                        <a:t>LSTM + attention (paper)</a:t>
+                      </a:r>
+                    </a:p>
+                  </a:txBody>
+                  <a:tcPr>
+                    <a:solidFill>
+                      <a:srgbClr val="FAFBFC"/>
+                    </a:solidFill>
+                  </a:tcPr>
+                </a:tc>
+                <a:tc>
+                  <a:txBody>
+                    <a:bodyPr/>
+                    <a:lstStyle/>
+                    <a:p>
+                      <a:r>
+                        <a:rPr sz="750">
+                          <a:solidFill>
+                            <a:srgbClr val="2C3E50"/>
+                          </a:solidFill>
+                        </a:rPr>
+                        <a:t>0.7806 ± 0.0234</a:t>
+                      </a:r>
+                    </a:p>
+                  </a:txBody>
+                  <a:tcPr>
+                    <a:solidFill>
+                      <a:srgbClr val="FAFBFC"/>
+                    </a:solidFill>
+                  </a:tcPr>
+                </a:tc>
+              </a:tr>
+              <a:tr h="189653">
+                <a:tc>
+                  <a:txBody>
+                    <a:bodyPr/>
+                    <a:lstStyle/>
+                    <a:p>
+                      <a:r>
+                        <a:rPr sz="750">
+                          <a:solidFill>
+                            <a:srgbClr val="2C3E50"/>
+                          </a:solidFill>
+                        </a:rPr>
+                        <a:t>15</a:t>
+                      </a:r>
+                    </a:p>
+                  </a:txBody>
+                  <a:tcPr>
+                    <a:solidFill>
                       <a:srgbClr val="FFFFFF"/>
                     </a:solidFill>
                   </a:tcPr>
@@ -8996,6 +10444,48 @@
                             <a:srgbClr val="2C3E50"/>
                           </a:solidFill>
                         </a:rPr>
+                        <a:t>w2vSg__LSTM</a:t>
+                      </a:r>
+                    </a:p>
+                  </a:txBody>
+                  <a:tcPr>
+                    <a:solidFill>
+                      <a:srgbClr val="FFFFFF"/>
+                    </a:solidFill>
+                  </a:tcPr>
+                </a:tc>
+                <a:tc>
+                  <a:txBody>
+                    <a:bodyPr/>
+                    <a:lstStyle/>
+                    <a:p>
+                      <a:r>
+                        <a:rPr sz="750">
+                          <a:solidFill>
+                            <a:srgbClr val="2C3E50"/>
+                          </a:solidFill>
+                        </a:rPr>
+                        <a:t>Word2Vec</a:t>
+                      </a:r>
+                    </a:p>
+                  </a:txBody>
+                  <a:tcPr>
+                    <a:solidFill>
+                      <a:srgbClr val="FFFFFF"/>
+                    </a:solidFill>
+                  </a:tcPr>
+                </a:tc>
+                <a:tc>
+                  <a:txBody>
+                    <a:bodyPr/>
+                    <a:lstStyle/>
+                    <a:p>
+                      <a:r>
+                        <a:rPr sz="750">
+                          <a:solidFill>
+                            <a:srgbClr val="2C3E50"/>
+                          </a:solidFill>
+                        </a:rPr>
                         <a:t>skip-gram · mean-pooled</a:t>
                       </a:r>
                     </a:p>
@@ -9017,13 +10507,1652 @@
                             <a:srgbClr val="2C3E50"/>
                           </a:solidFill>
                         </a:rPr>
+                        <a:t>DL: LSTM</a:t>
+                      </a:r>
+                    </a:p>
+                  </a:txBody>
+                  <a:tcPr>
+                    <a:solidFill>
+                      <a:srgbClr val="FFFFFF"/>
+                    </a:solidFill>
+                  </a:tcPr>
+                </a:tc>
+                <a:tc>
+                  <a:txBody>
+                    <a:bodyPr/>
+                    <a:lstStyle/>
+                    <a:p>
+                      <a:r>
+                        <a:rPr sz="750">
+                          <a:solidFill>
+                            <a:srgbClr val="2C3E50"/>
+                          </a:solidFill>
+                        </a:rPr>
+                        <a:t>vanilla LSTM (paper)</a:t>
+                      </a:r>
+                    </a:p>
+                  </a:txBody>
+                  <a:tcPr>
+                    <a:solidFill>
+                      <a:srgbClr val="FFFFFF"/>
+                    </a:solidFill>
+                  </a:tcPr>
+                </a:tc>
+                <a:tc>
+                  <a:txBody>
+                    <a:bodyPr/>
+                    <a:lstStyle/>
+                    <a:p>
+                      <a:r>
+                        <a:rPr sz="750">
+                          <a:solidFill>
+                            <a:srgbClr val="2C3E50"/>
+                          </a:solidFill>
+                        </a:rPr>
+                        <a:t>0.7781 ± 0.0292</a:t>
+                      </a:r>
+                    </a:p>
+                  </a:txBody>
+                  <a:tcPr>
+                    <a:solidFill>
+                      <a:srgbClr val="FFFFFF"/>
+                    </a:solidFill>
+                  </a:tcPr>
+                </a:tc>
+              </a:tr>
+              <a:tr h="189653">
+                <a:tc>
+                  <a:txBody>
+                    <a:bodyPr/>
+                    <a:lstStyle/>
+                    <a:p>
+                      <a:r>
+                        <a:rPr sz="750">
+                          <a:solidFill>
+                            <a:srgbClr val="2C3E50"/>
+                          </a:solidFill>
+                        </a:rPr>
+                        <a:t>16</a:t>
+                      </a:r>
+                    </a:p>
+                  </a:txBody>
+                  <a:tcPr>
+                    <a:solidFill>
+                      <a:srgbClr val="FAFBFC"/>
+                    </a:solidFill>
+                  </a:tcPr>
+                </a:tc>
+                <a:tc>
+                  <a:txBody>
+                    <a:bodyPr/>
+                    <a:lstStyle/>
+                    <a:p>
+                      <a:r>
+                        <a:rPr sz="750">
+                          <a:solidFill>
+                            <a:srgbClr val="2C3E50"/>
+                          </a:solidFill>
+                        </a:rPr>
+                        <a:t>ftCbow__Trans</a:t>
+                      </a:r>
+                    </a:p>
+                  </a:txBody>
+                  <a:tcPr>
+                    <a:solidFill>
+                      <a:srgbClr val="FAFBFC"/>
+                    </a:solidFill>
+                  </a:tcPr>
+                </a:tc>
+                <a:tc>
+                  <a:txBody>
+                    <a:bodyPr/>
+                    <a:lstStyle/>
+                    <a:p>
+                      <a:r>
+                        <a:rPr sz="750">
+                          <a:solidFill>
+                            <a:srgbClr val="2C3E50"/>
+                          </a:solidFill>
+                        </a:rPr>
+                        <a:t>FastText</a:t>
+                      </a:r>
+                    </a:p>
+                  </a:txBody>
+                  <a:tcPr>
+                    <a:solidFill>
+                      <a:srgbClr val="FAFBFC"/>
+                    </a:solidFill>
+                  </a:tcPr>
+                </a:tc>
+                <a:tc>
+                  <a:txBody>
+                    <a:bodyPr/>
+                    <a:lstStyle/>
+                    <a:p>
+                      <a:r>
+                        <a:rPr sz="750">
+                          <a:solidFill>
+                            <a:srgbClr val="2C3E50"/>
+                          </a:solidFill>
+                        </a:rPr>
+                        <a:t>CBOW · mean-pooled</a:t>
+                      </a:r>
+                    </a:p>
+                  </a:txBody>
+                  <a:tcPr>
+                    <a:solidFill>
+                      <a:srgbClr val="FAFBFC"/>
+                    </a:solidFill>
+                  </a:tcPr>
+                </a:tc>
+                <a:tc>
+                  <a:txBody>
+                    <a:bodyPr/>
+                    <a:lstStyle/>
+                    <a:p>
+                      <a:r>
+                        <a:rPr sz="750">
+                          <a:solidFill>
+                            <a:srgbClr val="2C3E50"/>
+                          </a:solidFill>
+                        </a:rPr>
+                        <a:t>DL: transformer</a:t>
+                      </a:r>
+                    </a:p>
+                  </a:txBody>
+                  <a:tcPr>
+                    <a:solidFill>
+                      <a:srgbClr val="FAFBFC"/>
+                    </a:solidFill>
+                  </a:tcPr>
+                </a:tc>
+                <a:tc>
+                  <a:txBody>
+                    <a:bodyPr/>
+                    <a:lstStyle/>
+                    <a:p>
+                      <a:r>
+                        <a:rPr sz="750">
+                          <a:solidFill>
+                            <a:srgbClr val="2C3E50"/>
+                          </a:solidFill>
+                        </a:rPr>
+                        <a:t>4-block transformer (paper)</a:t>
+                      </a:r>
+                    </a:p>
+                  </a:txBody>
+                  <a:tcPr>
+                    <a:solidFill>
+                      <a:srgbClr val="FAFBFC"/>
+                    </a:solidFill>
+                  </a:tcPr>
+                </a:tc>
+                <a:tc>
+                  <a:txBody>
+                    <a:bodyPr/>
+                    <a:lstStyle/>
+                    <a:p>
+                      <a:r>
+                        <a:rPr sz="750">
+                          <a:solidFill>
+                            <a:srgbClr val="2C3E50"/>
+                          </a:solidFill>
+                        </a:rPr>
+                        <a:t>0.7750 ± 0.0339</a:t>
+                      </a:r>
+                    </a:p>
+                  </a:txBody>
+                  <a:tcPr>
+                    <a:solidFill>
+                      <a:srgbClr val="FAFBFC"/>
+                    </a:solidFill>
+                  </a:tcPr>
+                </a:tc>
+              </a:tr>
+              <a:tr h="189653">
+                <a:tc>
+                  <a:txBody>
+                    <a:bodyPr/>
+                    <a:lstStyle/>
+                    <a:p>
+                      <a:r>
+                        <a:rPr sz="750">
+                          <a:solidFill>
+                            <a:srgbClr val="2C3E50"/>
+                          </a:solidFill>
+                        </a:rPr>
+                        <a:t>17</a:t>
+                      </a:r>
+                    </a:p>
+                  </a:txBody>
+                  <a:tcPr>
+                    <a:solidFill>
+                      <a:srgbClr val="FFFFFF"/>
+                    </a:solidFill>
+                  </a:tcPr>
+                </a:tc>
+                <a:tc>
+                  <a:txBody>
+                    <a:bodyPr/>
+                    <a:lstStyle/>
+                    <a:p>
+                      <a:r>
+                        <a:rPr sz="750">
+                          <a:solidFill>
+                            <a:srgbClr val="2C3E50"/>
+                          </a:solidFill>
+                        </a:rPr>
+                        <a:t>w2vSg__JustAttn</a:t>
+                      </a:r>
+                    </a:p>
+                  </a:txBody>
+                  <a:tcPr>
+                    <a:solidFill>
+                      <a:srgbClr val="FFFFFF"/>
+                    </a:solidFill>
+                  </a:tcPr>
+                </a:tc>
+                <a:tc>
+                  <a:txBody>
+                    <a:bodyPr/>
+                    <a:lstStyle/>
+                    <a:p>
+                      <a:r>
+                        <a:rPr sz="750">
+                          <a:solidFill>
+                            <a:srgbClr val="2C3E50"/>
+                          </a:solidFill>
+                        </a:rPr>
+                        <a:t>Word2Vec</a:t>
+                      </a:r>
+                    </a:p>
+                  </a:txBody>
+                  <a:tcPr>
+                    <a:solidFill>
+                      <a:srgbClr val="FFFFFF"/>
+                    </a:solidFill>
+                  </a:tcPr>
+                </a:tc>
+                <a:tc>
+                  <a:txBody>
+                    <a:bodyPr/>
+                    <a:lstStyle/>
+                    <a:p>
+                      <a:r>
+                        <a:rPr sz="750">
+                          <a:solidFill>
+                            <a:srgbClr val="2C3E50"/>
+                          </a:solidFill>
+                        </a:rPr>
+                        <a:t>skip-gram · mean-pooled</a:t>
+                      </a:r>
+                    </a:p>
+                  </a:txBody>
+                  <a:tcPr>
+                    <a:solidFill>
+                      <a:srgbClr val="FFFFFF"/>
+                    </a:solidFill>
+                  </a:tcPr>
+                </a:tc>
+                <a:tc>
+                  <a:txBody>
+                    <a:bodyPr/>
+                    <a:lstStyle/>
+                    <a:p>
+                      <a:r>
+                        <a:rPr sz="750">
+                          <a:solidFill>
+                            <a:srgbClr val="2C3E50"/>
+                          </a:solidFill>
+                        </a:rPr>
+                        <a:t>DL: attention</a:t>
+                      </a:r>
+                    </a:p>
+                  </a:txBody>
+                  <a:tcPr>
+                    <a:solidFill>
+                      <a:srgbClr val="FFFFFF"/>
+                    </a:solidFill>
+                  </a:tcPr>
+                </a:tc>
+                <a:tc>
+                  <a:txBody>
+                    <a:bodyPr/>
+                    <a:lstStyle/>
+                    <a:p>
+                      <a:r>
+                        <a:rPr sz="750">
+                          <a:solidFill>
+                            <a:srgbClr val="2C3E50"/>
+                          </a:solidFill>
+                        </a:rPr>
+                        <a:t>attention-only (paper)</a:t>
+                      </a:r>
+                    </a:p>
+                  </a:txBody>
+                  <a:tcPr>
+                    <a:solidFill>
+                      <a:srgbClr val="FFFFFF"/>
+                    </a:solidFill>
+                  </a:tcPr>
+                </a:tc>
+                <a:tc>
+                  <a:txBody>
+                    <a:bodyPr/>
+                    <a:lstStyle/>
+                    <a:p>
+                      <a:r>
+                        <a:rPr sz="750">
+                          <a:solidFill>
+                            <a:srgbClr val="2C3E50"/>
+                          </a:solidFill>
+                        </a:rPr>
+                        <a:t>0.7748 ± 0.0221</a:t>
+                      </a:r>
+                    </a:p>
+                  </a:txBody>
+                  <a:tcPr>
+                    <a:solidFill>
+                      <a:srgbClr val="FFFFFF"/>
+                    </a:solidFill>
+                  </a:tcPr>
+                </a:tc>
+              </a:tr>
+              <a:tr h="189653">
+                <a:tc>
+                  <a:txBody>
+                    <a:bodyPr/>
+                    <a:lstStyle/>
+                    <a:p>
+                      <a:r>
+                        <a:rPr sz="750">
+                          <a:solidFill>
+                            <a:srgbClr val="2C3E50"/>
+                          </a:solidFill>
+                        </a:rPr>
+                        <a:t>18</a:t>
+                      </a:r>
+                    </a:p>
+                  </a:txBody>
+                  <a:tcPr>
+                    <a:solidFill>
+                      <a:srgbClr val="FAFBFC"/>
+                    </a:solidFill>
+                  </a:tcPr>
+                </a:tc>
+                <a:tc>
+                  <a:txBody>
+                    <a:bodyPr/>
+                    <a:lstStyle/>
+                    <a:p>
+                      <a:r>
+                        <a:rPr sz="750">
+                          <a:solidFill>
+                            <a:srgbClr val="2C3E50"/>
+                          </a:solidFill>
+                        </a:rPr>
+                        <a:t>w2vCbow__LSTMattn</a:t>
+                      </a:r>
+                    </a:p>
+                  </a:txBody>
+                  <a:tcPr>
+                    <a:solidFill>
+                      <a:srgbClr val="FAFBFC"/>
+                    </a:solidFill>
+                  </a:tcPr>
+                </a:tc>
+                <a:tc>
+                  <a:txBody>
+                    <a:bodyPr/>
+                    <a:lstStyle/>
+                    <a:p>
+                      <a:r>
+                        <a:rPr sz="750">
+                          <a:solidFill>
+                            <a:srgbClr val="2C3E50"/>
+                          </a:solidFill>
+                        </a:rPr>
+                        <a:t>Word2Vec</a:t>
+                      </a:r>
+                    </a:p>
+                  </a:txBody>
+                  <a:tcPr>
+                    <a:solidFill>
+                      <a:srgbClr val="FAFBFC"/>
+                    </a:solidFill>
+                  </a:tcPr>
+                </a:tc>
+                <a:tc>
+                  <a:txBody>
+                    <a:bodyPr/>
+                    <a:lstStyle/>
+                    <a:p>
+                      <a:r>
+                        <a:rPr sz="750">
+                          <a:solidFill>
+                            <a:srgbClr val="2C3E50"/>
+                          </a:solidFill>
+                        </a:rPr>
+                        <a:t>CBOW · mean-pooled</a:t>
+                      </a:r>
+                    </a:p>
+                  </a:txBody>
+                  <a:tcPr>
+                    <a:solidFill>
+                      <a:srgbClr val="FAFBFC"/>
+                    </a:solidFill>
+                  </a:tcPr>
+                </a:tc>
+                <a:tc>
+                  <a:txBody>
+                    <a:bodyPr/>
+                    <a:lstStyle/>
+                    <a:p>
+                      <a:r>
+                        <a:rPr sz="750">
+                          <a:solidFill>
+                            <a:srgbClr val="2C3E50"/>
+                          </a:solidFill>
+                        </a:rPr>
+                        <a:t>DL: LSTM+attention</a:t>
+                      </a:r>
+                    </a:p>
+                  </a:txBody>
+                  <a:tcPr>
+                    <a:solidFill>
+                      <a:srgbClr val="FAFBFC"/>
+                    </a:solidFill>
+                  </a:tcPr>
+                </a:tc>
+                <a:tc>
+                  <a:txBody>
+                    <a:bodyPr/>
+                    <a:lstStyle/>
+                    <a:p>
+                      <a:r>
+                        <a:rPr sz="750">
+                          <a:solidFill>
+                            <a:srgbClr val="2C3E50"/>
+                          </a:solidFill>
+                        </a:rPr>
+                        <a:t>LSTM + attention (paper)</a:t>
+                      </a:r>
+                    </a:p>
+                  </a:txBody>
+                  <a:tcPr>
+                    <a:solidFill>
+                      <a:srgbClr val="FAFBFC"/>
+                    </a:solidFill>
+                  </a:tcPr>
+                </a:tc>
+                <a:tc>
+                  <a:txBody>
+                    <a:bodyPr/>
+                    <a:lstStyle/>
+                    <a:p>
+                      <a:r>
+                        <a:rPr sz="750">
+                          <a:solidFill>
+                            <a:srgbClr val="2C3E50"/>
+                          </a:solidFill>
+                        </a:rPr>
+                        <a:t>0.7746 ± 0.0271</a:t>
+                      </a:r>
+                    </a:p>
+                  </a:txBody>
+                  <a:tcPr>
+                    <a:solidFill>
+                      <a:srgbClr val="FAFBFC"/>
+                    </a:solidFill>
+                  </a:tcPr>
+                </a:tc>
+              </a:tr>
+              <a:tr h="189653">
+                <a:tc>
+                  <a:txBody>
+                    <a:bodyPr/>
+                    <a:lstStyle/>
+                    <a:p>
+                      <a:r>
+                        <a:rPr sz="750">
+                          <a:solidFill>
+                            <a:srgbClr val="2C3E50"/>
+                          </a:solidFill>
+                        </a:rPr>
+                        <a:t>19</a:t>
+                      </a:r>
+                    </a:p>
+                  </a:txBody>
+                  <a:tcPr>
+                    <a:solidFill>
+                      <a:srgbClr val="FFFFFF"/>
+                    </a:solidFill>
+                  </a:tcPr>
+                </a:tc>
+                <a:tc>
+                  <a:txBody>
+                    <a:bodyPr/>
+                    <a:lstStyle/>
+                    <a:p>
+                      <a:r>
+                        <a:rPr sz="750">
+                          <a:solidFill>
+                            <a:srgbClr val="2C3E50"/>
+                          </a:solidFill>
+                        </a:rPr>
+                        <a:t>w2vSg__Trans</a:t>
+                      </a:r>
+                    </a:p>
+                  </a:txBody>
+                  <a:tcPr>
+                    <a:solidFill>
+                      <a:srgbClr val="FFFFFF"/>
+                    </a:solidFill>
+                  </a:tcPr>
+                </a:tc>
+                <a:tc>
+                  <a:txBody>
+                    <a:bodyPr/>
+                    <a:lstStyle/>
+                    <a:p>
+                      <a:r>
+                        <a:rPr sz="750">
+                          <a:solidFill>
+                            <a:srgbClr val="2C3E50"/>
+                          </a:solidFill>
+                        </a:rPr>
+                        <a:t>Word2Vec</a:t>
+                      </a:r>
+                    </a:p>
+                  </a:txBody>
+                  <a:tcPr>
+                    <a:solidFill>
+                      <a:srgbClr val="FFFFFF"/>
+                    </a:solidFill>
+                  </a:tcPr>
+                </a:tc>
+                <a:tc>
+                  <a:txBody>
+                    <a:bodyPr/>
+                    <a:lstStyle/>
+                    <a:p>
+                      <a:r>
+                        <a:rPr sz="750">
+                          <a:solidFill>
+                            <a:srgbClr val="2C3E50"/>
+                          </a:solidFill>
+                        </a:rPr>
+                        <a:t>skip-gram · mean-pooled</a:t>
+                      </a:r>
+                    </a:p>
+                  </a:txBody>
+                  <a:tcPr>
+                    <a:solidFill>
+                      <a:srgbClr val="FFFFFF"/>
+                    </a:solidFill>
+                  </a:tcPr>
+                </a:tc>
+                <a:tc>
+                  <a:txBody>
+                    <a:bodyPr/>
+                    <a:lstStyle/>
+                    <a:p>
+                      <a:r>
+                        <a:rPr sz="750">
+                          <a:solidFill>
+                            <a:srgbClr val="2C3E50"/>
+                          </a:solidFill>
+                        </a:rPr>
+                        <a:t>DL: transformer</a:t>
+                      </a:r>
+                    </a:p>
+                  </a:txBody>
+                  <a:tcPr>
+                    <a:solidFill>
+                      <a:srgbClr val="FFFFFF"/>
+                    </a:solidFill>
+                  </a:tcPr>
+                </a:tc>
+                <a:tc>
+                  <a:txBody>
+                    <a:bodyPr/>
+                    <a:lstStyle/>
+                    <a:p>
+                      <a:r>
+                        <a:rPr sz="750">
+                          <a:solidFill>
+                            <a:srgbClr val="2C3E50"/>
+                          </a:solidFill>
+                        </a:rPr>
+                        <a:t>4-block transformer (paper)</a:t>
+                      </a:r>
+                    </a:p>
+                  </a:txBody>
+                  <a:tcPr>
+                    <a:solidFill>
+                      <a:srgbClr val="FFFFFF"/>
+                    </a:solidFill>
+                  </a:tcPr>
+                </a:tc>
+                <a:tc>
+                  <a:txBody>
+                    <a:bodyPr/>
+                    <a:lstStyle/>
+                    <a:p>
+                      <a:r>
+                        <a:rPr sz="750">
+                          <a:solidFill>
+                            <a:srgbClr val="2C3E50"/>
+                          </a:solidFill>
+                        </a:rPr>
+                        <a:t>0.7703 ± 0.0509</a:t>
+                      </a:r>
+                    </a:p>
+                  </a:txBody>
+                  <a:tcPr>
+                    <a:solidFill>
+                      <a:srgbClr val="FFFFFF"/>
+                    </a:solidFill>
+                  </a:tcPr>
+                </a:tc>
+              </a:tr>
+              <a:tr h="189653">
+                <a:tc>
+                  <a:txBody>
+                    <a:bodyPr/>
+                    <a:lstStyle/>
+                    <a:p>
+                      <a:r>
+                        <a:rPr sz="750">
+                          <a:solidFill>
+                            <a:srgbClr val="2C3E50"/>
+                          </a:solidFill>
+                        </a:rPr>
+                        <a:t>20</a:t>
+                      </a:r>
+                    </a:p>
+                  </a:txBody>
+                  <a:tcPr>
+                    <a:solidFill>
+                      <a:srgbClr val="FAFBFC"/>
+                    </a:solidFill>
+                  </a:tcPr>
+                </a:tc>
+                <a:tc>
+                  <a:txBody>
+                    <a:bodyPr/>
+                    <a:lstStyle/>
+                    <a:p>
+                      <a:r>
+                        <a:rPr sz="750">
+                          <a:solidFill>
+                            <a:srgbClr val="2C3E50"/>
+                          </a:solidFill>
+                        </a:rPr>
+                        <a:t>w2vCbow__Trans</a:t>
+                      </a:r>
+                    </a:p>
+                  </a:txBody>
+                  <a:tcPr>
+                    <a:solidFill>
+                      <a:srgbClr val="FAFBFC"/>
+                    </a:solidFill>
+                  </a:tcPr>
+                </a:tc>
+                <a:tc>
+                  <a:txBody>
+                    <a:bodyPr/>
+                    <a:lstStyle/>
+                    <a:p>
+                      <a:r>
+                        <a:rPr sz="750">
+                          <a:solidFill>
+                            <a:srgbClr val="2C3E50"/>
+                          </a:solidFill>
+                        </a:rPr>
+                        <a:t>Word2Vec</a:t>
+                      </a:r>
+                    </a:p>
+                  </a:txBody>
+                  <a:tcPr>
+                    <a:solidFill>
+                      <a:srgbClr val="FAFBFC"/>
+                    </a:solidFill>
+                  </a:tcPr>
+                </a:tc>
+                <a:tc>
+                  <a:txBody>
+                    <a:bodyPr/>
+                    <a:lstStyle/>
+                    <a:p>
+                      <a:r>
+                        <a:rPr sz="750">
+                          <a:solidFill>
+                            <a:srgbClr val="2C3E50"/>
+                          </a:solidFill>
+                        </a:rPr>
+                        <a:t>CBOW · mean-pooled</a:t>
+                      </a:r>
+                    </a:p>
+                  </a:txBody>
+                  <a:tcPr>
+                    <a:solidFill>
+                      <a:srgbClr val="FAFBFC"/>
+                    </a:solidFill>
+                  </a:tcPr>
+                </a:tc>
+                <a:tc>
+                  <a:txBody>
+                    <a:bodyPr/>
+                    <a:lstStyle/>
+                    <a:p>
+                      <a:r>
+                        <a:rPr sz="750">
+                          <a:solidFill>
+                            <a:srgbClr val="2C3E50"/>
+                          </a:solidFill>
+                        </a:rPr>
+                        <a:t>DL: transformer</a:t>
+                      </a:r>
+                    </a:p>
+                  </a:txBody>
+                  <a:tcPr>
+                    <a:solidFill>
+                      <a:srgbClr val="FAFBFC"/>
+                    </a:solidFill>
+                  </a:tcPr>
+                </a:tc>
+                <a:tc>
+                  <a:txBody>
+                    <a:bodyPr/>
+                    <a:lstStyle/>
+                    <a:p>
+                      <a:r>
+                        <a:rPr sz="750">
+                          <a:solidFill>
+                            <a:srgbClr val="2C3E50"/>
+                          </a:solidFill>
+                        </a:rPr>
+                        <a:t>4-block transformer (paper)</a:t>
+                      </a:r>
+                    </a:p>
+                  </a:txBody>
+                  <a:tcPr>
+                    <a:solidFill>
+                      <a:srgbClr val="FAFBFC"/>
+                    </a:solidFill>
+                  </a:tcPr>
+                </a:tc>
+                <a:tc>
+                  <a:txBody>
+                    <a:bodyPr/>
+                    <a:lstStyle/>
+                    <a:p>
+                      <a:r>
+                        <a:rPr sz="750">
+                          <a:solidFill>
+                            <a:srgbClr val="2C3E50"/>
+                          </a:solidFill>
+                        </a:rPr>
+                        <a:t>0.7649 ± 0.0351</a:t>
+                      </a:r>
+                    </a:p>
+                  </a:txBody>
+                  <a:tcPr>
+                    <a:solidFill>
+                      <a:srgbClr val="FAFBFC"/>
+                    </a:solidFill>
+                  </a:tcPr>
+                </a:tc>
+              </a:tr>
+              <a:tr h="189653">
+                <a:tc>
+                  <a:txBody>
+                    <a:bodyPr/>
+                    <a:lstStyle/>
+                    <a:p>
+                      <a:r>
+                        <a:rPr sz="750">
+                          <a:solidFill>
+                            <a:srgbClr val="2C3E50"/>
+                          </a:solidFill>
+                        </a:rPr>
+                        <a:t>21</a:t>
+                      </a:r>
+                    </a:p>
+                  </a:txBody>
+                  <a:tcPr>
+                    <a:solidFill>
+                      <a:srgbClr val="FFFFFF"/>
+                    </a:solidFill>
+                  </a:tcPr>
+                </a:tc>
+                <a:tc>
+                  <a:txBody>
+                    <a:bodyPr/>
+                    <a:lstStyle/>
+                    <a:p>
+                      <a:r>
+                        <a:rPr sz="750">
+                          <a:solidFill>
+                            <a:srgbClr val="2C3E50"/>
+                          </a:solidFill>
+                        </a:rPr>
+                        <a:t>w2vCbow__JustAttn</a:t>
+                      </a:r>
+                    </a:p>
+                  </a:txBody>
+                  <a:tcPr>
+                    <a:solidFill>
+                      <a:srgbClr val="FFFFFF"/>
+                    </a:solidFill>
+                  </a:tcPr>
+                </a:tc>
+                <a:tc>
+                  <a:txBody>
+                    <a:bodyPr/>
+                    <a:lstStyle/>
+                    <a:p>
+                      <a:r>
+                        <a:rPr sz="750">
+                          <a:solidFill>
+                            <a:srgbClr val="2C3E50"/>
+                          </a:solidFill>
+                        </a:rPr>
+                        <a:t>Word2Vec</a:t>
+                      </a:r>
+                    </a:p>
+                  </a:txBody>
+                  <a:tcPr>
+                    <a:solidFill>
+                      <a:srgbClr val="FFFFFF"/>
+                    </a:solidFill>
+                  </a:tcPr>
+                </a:tc>
+                <a:tc>
+                  <a:txBody>
+                    <a:bodyPr/>
+                    <a:lstStyle/>
+                    <a:p>
+                      <a:r>
+                        <a:rPr sz="750">
+                          <a:solidFill>
+                            <a:srgbClr val="2C3E50"/>
+                          </a:solidFill>
+                        </a:rPr>
+                        <a:t>CBOW · mean-pooled</a:t>
+                      </a:r>
+                    </a:p>
+                  </a:txBody>
+                  <a:tcPr>
+                    <a:solidFill>
+                      <a:srgbClr val="FFFFFF"/>
+                    </a:solidFill>
+                  </a:tcPr>
+                </a:tc>
+                <a:tc>
+                  <a:txBody>
+                    <a:bodyPr/>
+                    <a:lstStyle/>
+                    <a:p>
+                      <a:r>
+                        <a:rPr sz="750">
+                          <a:solidFill>
+                            <a:srgbClr val="2C3E50"/>
+                          </a:solidFill>
+                        </a:rPr>
+                        <a:t>DL: attention</a:t>
+                      </a:r>
+                    </a:p>
+                  </a:txBody>
+                  <a:tcPr>
+                    <a:solidFill>
+                      <a:srgbClr val="FFFFFF"/>
+                    </a:solidFill>
+                  </a:tcPr>
+                </a:tc>
+                <a:tc>
+                  <a:txBody>
+                    <a:bodyPr/>
+                    <a:lstStyle/>
+                    <a:p>
+                      <a:r>
+                        <a:rPr sz="750">
+                          <a:solidFill>
+                            <a:srgbClr val="2C3E50"/>
+                          </a:solidFill>
+                        </a:rPr>
+                        <a:t>attention-only (paper)</a:t>
+                      </a:r>
+                    </a:p>
+                  </a:txBody>
+                  <a:tcPr>
+                    <a:solidFill>
+                      <a:srgbClr val="FFFFFF"/>
+                    </a:solidFill>
+                  </a:tcPr>
+                </a:tc>
+                <a:tc>
+                  <a:txBody>
+                    <a:bodyPr/>
+                    <a:lstStyle/>
+                    <a:p>
+                      <a:r>
+                        <a:rPr sz="750">
+                          <a:solidFill>
+                            <a:srgbClr val="2C3E50"/>
+                          </a:solidFill>
+                        </a:rPr>
+                        <a:t>0.7614 ± 0.0310</a:t>
+                      </a:r>
+                    </a:p>
+                  </a:txBody>
+                  <a:tcPr>
+                    <a:solidFill>
+                      <a:srgbClr val="FFFFFF"/>
+                    </a:solidFill>
+                  </a:tcPr>
+                </a:tc>
+              </a:tr>
+              <a:tr h="189653">
+                <a:tc>
+                  <a:txBody>
+                    <a:bodyPr/>
+                    <a:lstStyle/>
+                    <a:p>
+                      <a:r>
+                        <a:rPr sz="750">
+                          <a:solidFill>
+                            <a:srgbClr val="2C3E50"/>
+                          </a:solidFill>
+                        </a:rPr>
+                        <a:t>22</a:t>
+                      </a:r>
+                    </a:p>
+                  </a:txBody>
+                  <a:tcPr>
+                    <a:solidFill>
+                      <a:srgbClr val="FAFBFC"/>
+                    </a:solidFill>
+                  </a:tcPr>
+                </a:tc>
+                <a:tc>
+                  <a:txBody>
+                    <a:bodyPr/>
+                    <a:lstStyle/>
+                    <a:p>
+                      <a:r>
+                        <a:rPr sz="750">
+                          <a:solidFill>
+                            <a:srgbClr val="2C3E50"/>
+                          </a:solidFill>
+                        </a:rPr>
+                        <a:t>ftCbow__LSTM</a:t>
+                      </a:r>
+                    </a:p>
+                  </a:txBody>
+                  <a:tcPr>
+                    <a:solidFill>
+                      <a:srgbClr val="FAFBFC"/>
+                    </a:solidFill>
+                  </a:tcPr>
+                </a:tc>
+                <a:tc>
+                  <a:txBody>
+                    <a:bodyPr/>
+                    <a:lstStyle/>
+                    <a:p>
+                      <a:r>
+                        <a:rPr sz="750">
+                          <a:solidFill>
+                            <a:srgbClr val="2C3E50"/>
+                          </a:solidFill>
+                        </a:rPr>
+                        <a:t>FastText</a:t>
+                      </a:r>
+                    </a:p>
+                  </a:txBody>
+                  <a:tcPr>
+                    <a:solidFill>
+                      <a:srgbClr val="FAFBFC"/>
+                    </a:solidFill>
+                  </a:tcPr>
+                </a:tc>
+                <a:tc>
+                  <a:txBody>
+                    <a:bodyPr/>
+                    <a:lstStyle/>
+                    <a:p>
+                      <a:r>
+                        <a:rPr sz="750">
+                          <a:solidFill>
+                            <a:srgbClr val="2C3E50"/>
+                          </a:solidFill>
+                        </a:rPr>
+                        <a:t>CBOW · mean-pooled</a:t>
+                      </a:r>
+                    </a:p>
+                  </a:txBody>
+                  <a:tcPr>
+                    <a:solidFill>
+                      <a:srgbClr val="FAFBFC"/>
+                    </a:solidFill>
+                  </a:tcPr>
+                </a:tc>
+                <a:tc>
+                  <a:txBody>
+                    <a:bodyPr/>
+                    <a:lstStyle/>
+                    <a:p>
+                      <a:r>
+                        <a:rPr sz="750">
+                          <a:solidFill>
+                            <a:srgbClr val="2C3E50"/>
+                          </a:solidFill>
+                        </a:rPr>
+                        <a:t>DL: LSTM</a:t>
+                      </a:r>
+                    </a:p>
+                  </a:txBody>
+                  <a:tcPr>
+                    <a:solidFill>
+                      <a:srgbClr val="FAFBFC"/>
+                    </a:solidFill>
+                  </a:tcPr>
+                </a:tc>
+                <a:tc>
+                  <a:txBody>
+                    <a:bodyPr/>
+                    <a:lstStyle/>
+                    <a:p>
+                      <a:r>
+                        <a:rPr sz="750">
+                          <a:solidFill>
+                            <a:srgbClr val="2C3E50"/>
+                          </a:solidFill>
+                        </a:rPr>
+                        <a:t>vanilla LSTM (paper)</a:t>
+                      </a:r>
+                    </a:p>
+                  </a:txBody>
+                  <a:tcPr>
+                    <a:solidFill>
+                      <a:srgbClr val="FAFBFC"/>
+                    </a:solidFill>
+                  </a:tcPr>
+                </a:tc>
+                <a:tc>
+                  <a:txBody>
+                    <a:bodyPr/>
+                    <a:lstStyle/>
+                    <a:p>
+                      <a:r>
+                        <a:rPr sz="750">
+                          <a:solidFill>
+                            <a:srgbClr val="2C3E50"/>
+                          </a:solidFill>
+                        </a:rPr>
+                        <a:t>0.7590 ± 0.0271</a:t>
+                      </a:r>
+                    </a:p>
+                  </a:txBody>
+                  <a:tcPr>
+                    <a:solidFill>
+                      <a:srgbClr val="FAFBFC"/>
+                    </a:solidFill>
+                  </a:tcPr>
+                </a:tc>
+              </a:tr>
+              <a:tr h="189653">
+                <a:tc>
+                  <a:txBody>
+                    <a:bodyPr/>
+                    <a:lstStyle/>
+                    <a:p>
+                      <a:r>
+                        <a:rPr sz="750">
+                          <a:solidFill>
+                            <a:srgbClr val="2C3E50"/>
+                          </a:solidFill>
+                        </a:rPr>
+                        <a:t>23</a:t>
+                      </a:r>
+                    </a:p>
+                  </a:txBody>
+                  <a:tcPr>
+                    <a:solidFill>
+                      <a:srgbClr val="FFFFFF"/>
+                    </a:solidFill>
+                  </a:tcPr>
+                </a:tc>
+                <a:tc>
+                  <a:txBody>
+                    <a:bodyPr/>
+                    <a:lstStyle/>
+                    <a:p>
+                      <a:r>
+                        <a:rPr sz="750">
+                          <a:solidFill>
+                            <a:srgbClr val="2C3E50"/>
+                          </a:solidFill>
+                        </a:rPr>
+                        <a:t>w2vCbow__LSTM</a:t>
+                      </a:r>
+                    </a:p>
+                  </a:txBody>
+                  <a:tcPr>
+                    <a:solidFill>
+                      <a:srgbClr val="FFFFFF"/>
+                    </a:solidFill>
+                  </a:tcPr>
+                </a:tc>
+                <a:tc>
+                  <a:txBody>
+                    <a:bodyPr/>
+                    <a:lstStyle/>
+                    <a:p>
+                      <a:r>
+                        <a:rPr sz="750">
+                          <a:solidFill>
+                            <a:srgbClr val="2C3E50"/>
+                          </a:solidFill>
+                        </a:rPr>
+                        <a:t>Word2Vec</a:t>
+                      </a:r>
+                    </a:p>
+                  </a:txBody>
+                  <a:tcPr>
+                    <a:solidFill>
+                      <a:srgbClr val="FFFFFF"/>
+                    </a:solidFill>
+                  </a:tcPr>
+                </a:tc>
+                <a:tc>
+                  <a:txBody>
+                    <a:bodyPr/>
+                    <a:lstStyle/>
+                    <a:p>
+                      <a:r>
+                        <a:rPr sz="750">
+                          <a:solidFill>
+                            <a:srgbClr val="2C3E50"/>
+                          </a:solidFill>
+                        </a:rPr>
+                        <a:t>CBOW · mean-pooled</a:t>
+                      </a:r>
+                    </a:p>
+                  </a:txBody>
+                  <a:tcPr>
+                    <a:solidFill>
+                      <a:srgbClr val="FFFFFF"/>
+                    </a:solidFill>
+                  </a:tcPr>
+                </a:tc>
+                <a:tc>
+                  <a:txBody>
+                    <a:bodyPr/>
+                    <a:lstStyle/>
+                    <a:p>
+                      <a:r>
+                        <a:rPr sz="750">
+                          <a:solidFill>
+                            <a:srgbClr val="2C3E50"/>
+                          </a:solidFill>
+                        </a:rPr>
+                        <a:t>DL: LSTM</a:t>
+                      </a:r>
+                    </a:p>
+                  </a:txBody>
+                  <a:tcPr>
+                    <a:solidFill>
+                      <a:srgbClr val="FFFFFF"/>
+                    </a:solidFill>
+                  </a:tcPr>
+                </a:tc>
+                <a:tc>
+                  <a:txBody>
+                    <a:bodyPr/>
+                    <a:lstStyle/>
+                    <a:p>
+                      <a:r>
+                        <a:rPr sz="750">
+                          <a:solidFill>
+                            <a:srgbClr val="2C3E50"/>
+                          </a:solidFill>
+                        </a:rPr>
+                        <a:t>vanilla LSTM (paper)</a:t>
+                      </a:r>
+                    </a:p>
+                  </a:txBody>
+                  <a:tcPr>
+                    <a:solidFill>
+                      <a:srgbClr val="FFFFFF"/>
+                    </a:solidFill>
+                  </a:tcPr>
+                </a:tc>
+                <a:tc>
+                  <a:txBody>
+                    <a:bodyPr/>
+                    <a:lstStyle/>
+                    <a:p>
+                      <a:r>
+                        <a:rPr sz="750">
+                          <a:solidFill>
+                            <a:srgbClr val="2C3E50"/>
+                          </a:solidFill>
+                        </a:rPr>
+                        <a:t>0.7548 ± 0.0275</a:t>
+                      </a:r>
+                    </a:p>
+                  </a:txBody>
+                  <a:tcPr>
+                    <a:solidFill>
+                      <a:srgbClr val="FFFFFF"/>
+                    </a:solidFill>
+                  </a:tcPr>
+                </a:tc>
+              </a:tr>
+              <a:tr h="189653">
+                <a:tc>
+                  <a:txBody>
+                    <a:bodyPr/>
+                    <a:lstStyle/>
+                    <a:p>
+                      <a:r>
+                        <a:rPr sz="750">
+                          <a:solidFill>
+                            <a:srgbClr val="2C3E50"/>
+                          </a:solidFill>
+                        </a:rPr>
+                        <a:t>24</a:t>
+                      </a:r>
+                    </a:p>
+                  </a:txBody>
+                  <a:tcPr>
+                    <a:solidFill>
+                      <a:srgbClr val="FAFBFC"/>
+                    </a:solidFill>
+                  </a:tcPr>
+                </a:tc>
+                <a:tc>
+                  <a:txBody>
+                    <a:bodyPr/>
+                    <a:lstStyle/>
+                    <a:p>
+                      <a:r>
+                        <a:rPr sz="750">
+                          <a:solidFill>
+                            <a:srgbClr val="2C3E50"/>
+                          </a:solidFill>
+                        </a:rPr>
+                        <a:t>ftSg__Trans</a:t>
+                      </a:r>
+                    </a:p>
+                  </a:txBody>
+                  <a:tcPr>
+                    <a:solidFill>
+                      <a:srgbClr val="FAFBFC"/>
+                    </a:solidFill>
+                  </a:tcPr>
+                </a:tc>
+                <a:tc>
+                  <a:txBody>
+                    <a:bodyPr/>
+                    <a:lstStyle/>
+                    <a:p>
+                      <a:r>
+                        <a:rPr sz="750">
+                          <a:solidFill>
+                            <a:srgbClr val="2C3E50"/>
+                          </a:solidFill>
+                        </a:rPr>
+                        <a:t>FastText</a:t>
+                      </a:r>
+                    </a:p>
+                  </a:txBody>
+                  <a:tcPr>
+                    <a:solidFill>
+                      <a:srgbClr val="FAFBFC"/>
+                    </a:solidFill>
+                  </a:tcPr>
+                </a:tc>
+                <a:tc>
+                  <a:txBody>
+                    <a:bodyPr/>
+                    <a:lstStyle/>
+                    <a:p>
+                      <a:r>
+                        <a:rPr sz="750">
+                          <a:solidFill>
+                            <a:srgbClr val="2C3E50"/>
+                          </a:solidFill>
+                        </a:rPr>
+                        <a:t>skip-gram · mean-pooled</a:t>
+                      </a:r>
+                    </a:p>
+                  </a:txBody>
+                  <a:tcPr>
+                    <a:solidFill>
+                      <a:srgbClr val="FAFBFC"/>
+                    </a:solidFill>
+                  </a:tcPr>
+                </a:tc>
+                <a:tc>
+                  <a:txBody>
+                    <a:bodyPr/>
+                    <a:lstStyle/>
+                    <a:p>
+                      <a:r>
+                        <a:rPr sz="750">
+                          <a:solidFill>
+                            <a:srgbClr val="2C3E50"/>
+                          </a:solidFill>
+                        </a:rPr>
+                        <a:t>DL: transformer</a:t>
+                      </a:r>
+                    </a:p>
+                  </a:txBody>
+                  <a:tcPr>
+                    <a:solidFill>
+                      <a:srgbClr val="FAFBFC"/>
+                    </a:solidFill>
+                  </a:tcPr>
+                </a:tc>
+                <a:tc>
+                  <a:txBody>
+                    <a:bodyPr/>
+                    <a:lstStyle/>
+                    <a:p>
+                      <a:r>
+                        <a:rPr sz="750">
+                          <a:solidFill>
+                            <a:srgbClr val="2C3E50"/>
+                          </a:solidFill>
+                        </a:rPr>
+                        <a:t>4-block transformer (paper)</a:t>
+                      </a:r>
+                    </a:p>
+                  </a:txBody>
+                  <a:tcPr>
+                    <a:solidFill>
+                      <a:srgbClr val="FAFBFC"/>
+                    </a:solidFill>
+                  </a:tcPr>
+                </a:tc>
+                <a:tc>
+                  <a:txBody>
+                    <a:bodyPr/>
+                    <a:lstStyle/>
+                    <a:p>
+                      <a:r>
+                        <a:rPr sz="750">
+                          <a:solidFill>
+                            <a:srgbClr val="2C3E50"/>
+                          </a:solidFill>
+                        </a:rPr>
+                        <a:t>0.7538 ± 0.0301</a:t>
+                      </a:r>
+                    </a:p>
+                  </a:txBody>
+                  <a:tcPr>
+                    <a:solidFill>
+                      <a:srgbClr val="FAFBFC"/>
+                    </a:solidFill>
+                  </a:tcPr>
+                </a:tc>
+              </a:tr>
+              <a:tr h="189653">
+                <a:tc>
+                  <a:txBody>
+                    <a:bodyPr/>
+                    <a:lstStyle/>
+                    <a:p>
+                      <a:r>
+                        <a:rPr sz="750">
+                          <a:solidFill>
+                            <a:srgbClr val="2C3E50"/>
+                          </a:solidFill>
+                        </a:rPr>
+                        <a:t>25</a:t>
+                      </a:r>
+                    </a:p>
+                  </a:txBody>
+                  <a:tcPr>
+                    <a:solidFill>
+                      <a:srgbClr val="FFFFFF"/>
+                    </a:solidFill>
+                  </a:tcPr>
+                </a:tc>
+                <a:tc>
+                  <a:txBody>
+                    <a:bodyPr/>
+                    <a:lstStyle/>
+                    <a:p>
+                      <a:r>
+                        <a:rPr sz="750">
+                          <a:solidFill>
+                            <a:srgbClr val="2C3E50"/>
+                          </a:solidFill>
+                        </a:rPr>
+                        <a:t>ftCbow__JustAttn</a:t>
+                      </a:r>
+                    </a:p>
+                  </a:txBody>
+                  <a:tcPr>
+                    <a:solidFill>
+                      <a:srgbClr val="FFFFFF"/>
+                    </a:solidFill>
+                  </a:tcPr>
+                </a:tc>
+                <a:tc>
+                  <a:txBody>
+                    <a:bodyPr/>
+                    <a:lstStyle/>
+                    <a:p>
+                      <a:r>
+                        <a:rPr sz="750">
+                          <a:solidFill>
+                            <a:srgbClr val="2C3E50"/>
+                          </a:solidFill>
+                        </a:rPr>
+                        <a:t>FastText</a:t>
+                      </a:r>
+                    </a:p>
+                  </a:txBody>
+                  <a:tcPr>
+                    <a:solidFill>
+                      <a:srgbClr val="FFFFFF"/>
+                    </a:solidFill>
+                  </a:tcPr>
+                </a:tc>
+                <a:tc>
+                  <a:txBody>
+                    <a:bodyPr/>
+                    <a:lstStyle/>
+                    <a:p>
+                      <a:r>
+                        <a:rPr sz="750">
+                          <a:solidFill>
+                            <a:srgbClr val="2C3E50"/>
+                          </a:solidFill>
+                        </a:rPr>
+                        <a:t>CBOW · mean-pooled</a:t>
+                      </a:r>
+                    </a:p>
+                  </a:txBody>
+                  <a:tcPr>
+                    <a:solidFill>
+                      <a:srgbClr val="FFFFFF"/>
+                    </a:solidFill>
+                  </a:tcPr>
+                </a:tc>
+                <a:tc>
+                  <a:txBody>
+                    <a:bodyPr/>
+                    <a:lstStyle/>
+                    <a:p>
+                      <a:r>
+                        <a:rPr sz="750">
+                          <a:solidFill>
+                            <a:srgbClr val="2C3E50"/>
+                          </a:solidFill>
+                        </a:rPr>
+                        <a:t>DL: attention</a:t>
+                      </a:r>
+                    </a:p>
+                  </a:txBody>
+                  <a:tcPr>
+                    <a:solidFill>
+                      <a:srgbClr val="FFFFFF"/>
+                    </a:solidFill>
+                  </a:tcPr>
+                </a:tc>
+                <a:tc>
+                  <a:txBody>
+                    <a:bodyPr/>
+                    <a:lstStyle/>
+                    <a:p>
+                      <a:r>
+                        <a:rPr sz="750">
+                          <a:solidFill>
+                            <a:srgbClr val="2C3E50"/>
+                          </a:solidFill>
+                        </a:rPr>
+                        <a:t>attention-only (paper)</a:t>
+                      </a:r>
+                    </a:p>
+                  </a:txBody>
+                  <a:tcPr>
+                    <a:solidFill>
+                      <a:srgbClr val="FFFFFF"/>
+                    </a:solidFill>
+                  </a:tcPr>
+                </a:tc>
+                <a:tc>
+                  <a:txBody>
+                    <a:bodyPr/>
+                    <a:lstStyle/>
+                    <a:p>
+                      <a:r>
+                        <a:rPr sz="750">
+                          <a:solidFill>
+                            <a:srgbClr val="2C3E50"/>
+                          </a:solidFill>
+                        </a:rPr>
+                        <a:t>0.7427 ± 0.0324</a:t>
+                      </a:r>
+                    </a:p>
+                  </a:txBody>
+                  <a:tcPr>
+                    <a:solidFill>
+                      <a:srgbClr val="FFFFFF"/>
+                    </a:solidFill>
+                  </a:tcPr>
+                </a:tc>
+              </a:tr>
+              <a:tr h="189662">
+                <a:tc>
+                  <a:txBody>
+                    <a:bodyPr/>
+                    <a:lstStyle/>
+                    <a:p>
+                      <a:r>
+                        <a:rPr sz="750">
+                          <a:solidFill>
+                            <a:srgbClr val="2C3E50"/>
+                          </a:solidFill>
+                        </a:rPr>
+                        <a:t>26</a:t>
+                      </a:r>
+                    </a:p>
+                  </a:txBody>
+                  <a:tcPr>
+                    <a:solidFill>
+                      <a:srgbClr val="FAFBFC"/>
+                    </a:solidFill>
+                  </a:tcPr>
+                </a:tc>
+                <a:tc>
+                  <a:txBody>
+                    <a:bodyPr/>
+                    <a:lstStyle/>
+                    <a:p>
+                      <a:r>
+                        <a:rPr sz="750">
+                          <a:solidFill>
+                            <a:srgbClr val="2C3E50"/>
+                          </a:solidFill>
+                        </a:rPr>
+                        <a:t>d2vDm__BRF100</a:t>
+                      </a:r>
+                    </a:p>
+                  </a:txBody>
+                  <a:tcPr>
+                    <a:solidFill>
+                      <a:srgbClr val="FAFBFC"/>
+                    </a:solidFill>
+                  </a:tcPr>
+                </a:tc>
+                <a:tc>
+                  <a:txBody>
+                    <a:bodyPr/>
+                    <a:lstStyle/>
+                    <a:p>
+                      <a:r>
+                        <a:rPr sz="750">
+                          <a:solidFill>
+                            <a:srgbClr val="2C3E50"/>
+                          </a:solidFill>
+                        </a:rPr>
+                        <a:t>Doc2Vec</a:t>
+                      </a:r>
+                    </a:p>
+                  </a:txBody>
+                  <a:tcPr>
+                    <a:solidFill>
+                      <a:srgbClr val="FAFBFC"/>
+                    </a:solidFill>
+                  </a:tcPr>
+                </a:tc>
+                <a:tc>
+                  <a:txBody>
+                    <a:bodyPr/>
+                    <a:lstStyle/>
+                    <a:p>
+                      <a:r>
+                        <a:rPr sz="750">
+                          <a:solidFill>
+                            <a:srgbClr val="2C3E50"/>
+                          </a:solidFill>
+                        </a:rPr>
+                        <a:t>DM · doc-vector</a:t>
+                      </a:r>
+                    </a:p>
+                  </a:txBody>
+                  <a:tcPr>
+                    <a:solidFill>
+                      <a:srgbClr val="FAFBFC"/>
+                    </a:solidFill>
+                  </a:tcPr>
+                </a:tc>
+                <a:tc>
+                  <a:txBody>
+                    <a:bodyPr/>
+                    <a:lstStyle/>
+                    <a:p>
+                      <a:r>
+                        <a:rPr sz="750">
+                          <a:solidFill>
+                            <a:srgbClr val="2C3E50"/>
+                          </a:solidFill>
+                        </a:rPr>
                         <a:t>OvR(BalancedRF)</a:t>
                       </a:r>
                     </a:p>
                   </a:txBody>
                   <a:tcPr>
                     <a:solidFill>
-                      <a:srgbClr val="FFFFFF"/>
+                      <a:srgbClr val="FAFBFC"/>
                     </a:solidFill>
                   </a:tcPr>
                 </a:tc>
@@ -9044,7 +12173,7 @@
                   </a:txBody>
                   <a:tcPr>
                     <a:solidFill>
-                      <a:srgbClr val="FFFFFF"/>
+                      <a:srgbClr val="FAFBFC"/>
                     </a:solidFill>
                   </a:tcPr>
                 </a:tc>
@@ -9059,2993 +12188,13 @@
                             <a:srgbClr val="2C3E50"/>
                           </a:solidFill>
                         </a:rPr>
-                        <a:t>0.8243 ± 0.0266</a:t>
-                      </a:r>
-                    </a:p>
-                  </a:txBody>
-                  <a:tcPr>
-                    <a:solidFill>
-                      <a:srgbClr val="FFFFFF"/>
-                    </a:solidFill>
-                  </a:tcPr>
-                </a:tc>
-              </a:tr>
-              <a:tr h="196947">
-                <a:tc>
-                  <a:txBody>
-                    <a:bodyPr/>
-                    <a:lstStyle/>
-                    <a:p>
-                      <a:r>
-                        <a:rPr sz="750">
-                          <a:solidFill>
-                            <a:srgbClr val="2C3E50"/>
-                          </a:solidFill>
-                        </a:rPr>
-                        <a:t>6</a:t>
+                        <a:t>0.6252 ± 0.0377</a:t>
                       </a:r>
                     </a:p>
                   </a:txBody>
                   <a:tcPr>
                     <a:solidFill>
                       <a:srgbClr val="FAFBFC"/>
-                    </a:solidFill>
-                  </a:tcPr>
-                </a:tc>
-                <a:tc>
-                  <a:txBody>
-                    <a:bodyPr/>
-                    <a:lstStyle/>
-                    <a:p>
-                      <a:r>
-                        <a:rPr sz="750">
-                          <a:solidFill>
-                            <a:srgbClr val="2C3E50"/>
-                          </a:solidFill>
-                        </a:rPr>
-                        <a:t>ftSg__BRF100</a:t>
-                      </a:r>
-                    </a:p>
-                  </a:txBody>
-                  <a:tcPr>
-                    <a:solidFill>
-                      <a:srgbClr val="FAFBFC"/>
-                    </a:solidFill>
-                  </a:tcPr>
-                </a:tc>
-                <a:tc>
-                  <a:txBody>
-                    <a:bodyPr/>
-                    <a:lstStyle/>
-                    <a:p>
-                      <a:r>
-                        <a:rPr sz="750">
-                          <a:solidFill>
-                            <a:srgbClr val="2C3E50"/>
-                          </a:solidFill>
-                        </a:rPr>
-                        <a:t>FastText</a:t>
-                      </a:r>
-                    </a:p>
-                  </a:txBody>
-                  <a:tcPr>
-                    <a:solidFill>
-                      <a:srgbClr val="FAFBFC"/>
-                    </a:solidFill>
-                  </a:tcPr>
-                </a:tc>
-                <a:tc>
-                  <a:txBody>
-                    <a:bodyPr/>
-                    <a:lstStyle/>
-                    <a:p>
-                      <a:r>
-                        <a:rPr sz="750">
-                          <a:solidFill>
-                            <a:srgbClr val="2C3E50"/>
-                          </a:solidFill>
-                        </a:rPr>
-                        <a:t>skip-gram · mean-pooled</a:t>
-                      </a:r>
-                    </a:p>
-                  </a:txBody>
-                  <a:tcPr>
-                    <a:solidFill>
-                      <a:srgbClr val="FAFBFC"/>
-                    </a:solidFill>
-                  </a:tcPr>
-                </a:tc>
-                <a:tc>
-                  <a:txBody>
-                    <a:bodyPr/>
-                    <a:lstStyle/>
-                    <a:p>
-                      <a:r>
-                        <a:rPr sz="750">
-                          <a:solidFill>
-                            <a:srgbClr val="2C3E50"/>
-                          </a:solidFill>
-                        </a:rPr>
-                        <a:t>OvR(BalancedRF)</a:t>
-                      </a:r>
-                    </a:p>
-                  </a:txBody>
-                  <a:tcPr>
-                    <a:solidFill>
-                      <a:srgbClr val="FAFBFC"/>
-                    </a:solidFill>
-                  </a:tcPr>
-                </a:tc>
-                <a:tc>
-                  <a:txBody>
-                    <a:bodyPr/>
-                    <a:lstStyle/>
-                    <a:p>
-                      <a:r>
-                        <a:rPr sz="750">
-                          <a:solidFill>
-                            <a:srgbClr val="2C3E50"/>
-                          </a:solidFill>
-                        </a:rPr>
-                        <a:t>n=100 class_weight=balanced (paper)</a:t>
-                      </a:r>
-                    </a:p>
-                  </a:txBody>
-                  <a:tcPr>
-                    <a:solidFill>
-                      <a:srgbClr val="FAFBFC"/>
-                    </a:solidFill>
-                  </a:tcPr>
-                </a:tc>
-                <a:tc>
-                  <a:txBody>
-                    <a:bodyPr/>
-                    <a:lstStyle/>
-                    <a:p>
-                      <a:r>
-                        <a:rPr sz="750">
-                          <a:solidFill>
-                            <a:srgbClr val="2C3E50"/>
-                          </a:solidFill>
-                        </a:rPr>
-                        <a:t>0.8136 ± 0.0256</a:t>
-                      </a:r>
-                    </a:p>
-                  </a:txBody>
-                  <a:tcPr>
-                    <a:solidFill>
-                      <a:srgbClr val="FAFBFC"/>
-                    </a:solidFill>
-                  </a:tcPr>
-                </a:tc>
-              </a:tr>
-              <a:tr h="196947">
-                <a:tc>
-                  <a:txBody>
-                    <a:bodyPr/>
-                    <a:lstStyle/>
-                    <a:p>
-                      <a:r>
-                        <a:rPr sz="750">
-                          <a:solidFill>
-                            <a:srgbClr val="2C3E50"/>
-                          </a:solidFill>
-                        </a:rPr>
-                        <a:t>7</a:t>
-                      </a:r>
-                    </a:p>
-                  </a:txBody>
-                  <a:tcPr>
-                    <a:solidFill>
-                      <a:srgbClr val="FFFFFF"/>
-                    </a:solidFill>
-                  </a:tcPr>
-                </a:tc>
-                <a:tc>
-                  <a:txBody>
-                    <a:bodyPr/>
-                    <a:lstStyle/>
-                    <a:p>
-                      <a:r>
-                        <a:rPr sz="750">
-                          <a:solidFill>
-                            <a:srgbClr val="2C3E50"/>
-                          </a:solidFill>
-                        </a:rPr>
-                        <a:t>w2vCbow__BRF100</a:t>
-                      </a:r>
-                    </a:p>
-                  </a:txBody>
-                  <a:tcPr>
-                    <a:solidFill>
-                      <a:srgbClr val="FFFFFF"/>
-                    </a:solidFill>
-                  </a:tcPr>
-                </a:tc>
-                <a:tc>
-                  <a:txBody>
-                    <a:bodyPr/>
-                    <a:lstStyle/>
-                    <a:p>
-                      <a:r>
-                        <a:rPr sz="750">
-                          <a:solidFill>
-                            <a:srgbClr val="2C3E50"/>
-                          </a:solidFill>
-                        </a:rPr>
-                        <a:t>Word2Vec</a:t>
-                      </a:r>
-                    </a:p>
-                  </a:txBody>
-                  <a:tcPr>
-                    <a:solidFill>
-                      <a:srgbClr val="FFFFFF"/>
-                    </a:solidFill>
-                  </a:tcPr>
-                </a:tc>
-                <a:tc>
-                  <a:txBody>
-                    <a:bodyPr/>
-                    <a:lstStyle/>
-                    <a:p>
-                      <a:r>
-                        <a:rPr sz="750">
-                          <a:solidFill>
-                            <a:srgbClr val="2C3E50"/>
-                          </a:solidFill>
-                        </a:rPr>
-                        <a:t>CBOW · mean-pooled</a:t>
-                      </a:r>
-                    </a:p>
-                  </a:txBody>
-                  <a:tcPr>
-                    <a:solidFill>
-                      <a:srgbClr val="FFFFFF"/>
-                    </a:solidFill>
-                  </a:tcPr>
-                </a:tc>
-                <a:tc>
-                  <a:txBody>
-                    <a:bodyPr/>
-                    <a:lstStyle/>
-                    <a:p>
-                      <a:r>
-                        <a:rPr sz="750">
-                          <a:solidFill>
-                            <a:srgbClr val="2C3E50"/>
-                          </a:solidFill>
-                        </a:rPr>
-                        <a:t>OvR(BalancedRF)</a:t>
-                      </a:r>
-                    </a:p>
-                  </a:txBody>
-                  <a:tcPr>
-                    <a:solidFill>
-                      <a:srgbClr val="FFFFFF"/>
-                    </a:solidFill>
-                  </a:tcPr>
-                </a:tc>
-                <a:tc>
-                  <a:txBody>
-                    <a:bodyPr/>
-                    <a:lstStyle/>
-                    <a:p>
-                      <a:r>
-                        <a:rPr sz="750">
-                          <a:solidFill>
-                            <a:srgbClr val="2C3E50"/>
-                          </a:solidFill>
-                        </a:rPr>
-                        <a:t>n=100 class_weight=balanced (paper)</a:t>
-                      </a:r>
-                    </a:p>
-                  </a:txBody>
-                  <a:tcPr>
-                    <a:solidFill>
-                      <a:srgbClr val="FFFFFF"/>
-                    </a:solidFill>
-                  </a:tcPr>
-                </a:tc>
-                <a:tc>
-                  <a:txBody>
-                    <a:bodyPr/>
-                    <a:lstStyle/>
-                    <a:p>
-                      <a:r>
-                        <a:rPr sz="750">
-                          <a:solidFill>
-                            <a:srgbClr val="2C3E50"/>
-                          </a:solidFill>
-                        </a:rPr>
-                        <a:t>0.8122 ± 0.0286</a:t>
-                      </a:r>
-                    </a:p>
-                  </a:txBody>
-                  <a:tcPr>
-                    <a:solidFill>
-                      <a:srgbClr val="FFFFFF"/>
-                    </a:solidFill>
-                  </a:tcPr>
-                </a:tc>
-              </a:tr>
-              <a:tr h="196947">
-                <a:tc>
-                  <a:txBody>
-                    <a:bodyPr/>
-                    <a:lstStyle/>
-                    <a:p>
-                      <a:r>
-                        <a:rPr sz="750">
-                          <a:solidFill>
-                            <a:srgbClr val="2C3E50"/>
-                          </a:solidFill>
-                        </a:rPr>
-                        <a:t>8</a:t>
-                      </a:r>
-                    </a:p>
-                  </a:txBody>
-                  <a:tcPr>
-                    <a:solidFill>
-                      <a:srgbClr val="FAFBFC"/>
-                    </a:solidFill>
-                  </a:tcPr>
-                </a:tc>
-                <a:tc>
-                  <a:txBody>
-                    <a:bodyPr/>
-                    <a:lstStyle/>
-                    <a:p>
-                      <a:r>
-                        <a:rPr sz="750">
-                          <a:solidFill>
-                            <a:srgbClr val="2C3E50"/>
-                          </a:solidFill>
-                        </a:rPr>
-                        <a:t>d2vDbow__BRF100</a:t>
-                      </a:r>
-                    </a:p>
-                  </a:txBody>
-                  <a:tcPr>
-                    <a:solidFill>
-                      <a:srgbClr val="FAFBFC"/>
-                    </a:solidFill>
-                  </a:tcPr>
-                </a:tc>
-                <a:tc>
-                  <a:txBody>
-                    <a:bodyPr/>
-                    <a:lstStyle/>
-                    <a:p>
-                      <a:r>
-                        <a:rPr sz="750">
-                          <a:solidFill>
-                            <a:srgbClr val="2C3E50"/>
-                          </a:solidFill>
-                        </a:rPr>
-                        <a:t>Doc2Vec</a:t>
-                      </a:r>
-                    </a:p>
-                  </a:txBody>
-                  <a:tcPr>
-                    <a:solidFill>
-                      <a:srgbClr val="FAFBFC"/>
-                    </a:solidFill>
-                  </a:tcPr>
-                </a:tc>
-                <a:tc>
-                  <a:txBody>
-                    <a:bodyPr/>
-                    <a:lstStyle/>
-                    <a:p>
-                      <a:r>
-                        <a:rPr sz="750">
-                          <a:solidFill>
-                            <a:srgbClr val="2C3E50"/>
-                          </a:solidFill>
-                        </a:rPr>
-                        <a:t>DBOW · doc-vector</a:t>
-                      </a:r>
-                    </a:p>
-                  </a:txBody>
-                  <a:tcPr>
-                    <a:solidFill>
-                      <a:srgbClr val="FAFBFC"/>
-                    </a:solidFill>
-                  </a:tcPr>
-                </a:tc>
-                <a:tc>
-                  <a:txBody>
-                    <a:bodyPr/>
-                    <a:lstStyle/>
-                    <a:p>
-                      <a:r>
-                        <a:rPr sz="750">
-                          <a:solidFill>
-                            <a:srgbClr val="2C3E50"/>
-                          </a:solidFill>
-                        </a:rPr>
-                        <a:t>OvR(BalancedRF)</a:t>
-                      </a:r>
-                    </a:p>
-                  </a:txBody>
-                  <a:tcPr>
-                    <a:solidFill>
-                      <a:srgbClr val="FAFBFC"/>
-                    </a:solidFill>
-                  </a:tcPr>
-                </a:tc>
-                <a:tc>
-                  <a:txBody>
-                    <a:bodyPr/>
-                    <a:lstStyle/>
-                    <a:p>
-                      <a:r>
-                        <a:rPr sz="750">
-                          <a:solidFill>
-                            <a:srgbClr val="2C3E50"/>
-                          </a:solidFill>
-                        </a:rPr>
-                        <a:t>n=100 class_weight=balanced (paper)</a:t>
-                      </a:r>
-                    </a:p>
-                  </a:txBody>
-                  <a:tcPr>
-                    <a:solidFill>
-                      <a:srgbClr val="FAFBFC"/>
-                    </a:solidFill>
-                  </a:tcPr>
-                </a:tc>
-                <a:tc>
-                  <a:txBody>
-                    <a:bodyPr/>
-                    <a:lstStyle/>
-                    <a:p>
-                      <a:r>
-                        <a:rPr sz="750">
-                          <a:solidFill>
-                            <a:srgbClr val="2C3E50"/>
-                          </a:solidFill>
-                        </a:rPr>
-                        <a:t>0.8093 ± 0.0255</a:t>
-                      </a:r>
-                    </a:p>
-                  </a:txBody>
-                  <a:tcPr>
-                    <a:solidFill>
-                      <a:srgbClr val="FAFBFC"/>
-                    </a:solidFill>
-                  </a:tcPr>
-                </a:tc>
-              </a:tr>
-              <a:tr h="196947">
-                <a:tc>
-                  <a:txBody>
-                    <a:bodyPr/>
-                    <a:lstStyle/>
-                    <a:p>
-                      <a:r>
-                        <a:rPr sz="750">
-                          <a:solidFill>
-                            <a:srgbClr val="2C3E50"/>
-                          </a:solidFill>
-                        </a:rPr>
-                        <a:t>9</a:t>
-                      </a:r>
-                    </a:p>
-                  </a:txBody>
-                  <a:tcPr>
-                    <a:solidFill>
-                      <a:srgbClr val="FFFFFF"/>
-                    </a:solidFill>
-                  </a:tcPr>
-                </a:tc>
-                <a:tc>
-                  <a:txBody>
-                    <a:bodyPr/>
-                    <a:lstStyle/>
-                    <a:p>
-                      <a:r>
-                        <a:rPr sz="750">
-                          <a:solidFill>
-                            <a:srgbClr val="2C3E50"/>
-                          </a:solidFill>
-                        </a:rPr>
-                        <a:t>ftSg__LSTM</a:t>
-                      </a:r>
-                    </a:p>
-                  </a:txBody>
-                  <a:tcPr>
-                    <a:solidFill>
-                      <a:srgbClr val="FFFFFF"/>
-                    </a:solidFill>
-                  </a:tcPr>
-                </a:tc>
-                <a:tc>
-                  <a:txBody>
-                    <a:bodyPr/>
-                    <a:lstStyle/>
-                    <a:p>
-                      <a:r>
-                        <a:rPr sz="750">
-                          <a:solidFill>
-                            <a:srgbClr val="2C3E50"/>
-                          </a:solidFill>
-                        </a:rPr>
-                        <a:t>FastText</a:t>
-                      </a:r>
-                    </a:p>
-                  </a:txBody>
-                  <a:tcPr>
-                    <a:solidFill>
-                      <a:srgbClr val="FFFFFF"/>
-                    </a:solidFill>
-                  </a:tcPr>
-                </a:tc>
-                <a:tc>
-                  <a:txBody>
-                    <a:bodyPr/>
-                    <a:lstStyle/>
-                    <a:p>
-                      <a:r>
-                        <a:rPr sz="750">
-                          <a:solidFill>
-                            <a:srgbClr val="2C3E50"/>
-                          </a:solidFill>
-                        </a:rPr>
-                        <a:t>skip-gram · mean-pooled</a:t>
-                      </a:r>
-                    </a:p>
-                  </a:txBody>
-                  <a:tcPr>
-                    <a:solidFill>
-                      <a:srgbClr val="FFFFFF"/>
-                    </a:solidFill>
-                  </a:tcPr>
-                </a:tc>
-                <a:tc>
-                  <a:txBody>
-                    <a:bodyPr/>
-                    <a:lstStyle/>
-                    <a:p>
-                      <a:r>
-                        <a:rPr sz="750">
-                          <a:solidFill>
-                            <a:srgbClr val="2C3E50"/>
-                          </a:solidFill>
-                        </a:rPr>
-                        <a:t>DL: LSTM</a:t>
-                      </a:r>
-                    </a:p>
-                  </a:txBody>
-                  <a:tcPr>
-                    <a:solidFill>
-                      <a:srgbClr val="FFFFFF"/>
-                    </a:solidFill>
-                  </a:tcPr>
-                </a:tc>
-                <a:tc>
-                  <a:txBody>
-                    <a:bodyPr/>
-                    <a:lstStyle/>
-                    <a:p>
-                      <a:r>
-                        <a:rPr sz="750">
-                          <a:solidFill>
-                            <a:srgbClr val="2C3E50"/>
-                          </a:solidFill>
-                        </a:rPr>
-                        <a:t>vanilla LSTM (paper)</a:t>
-                      </a:r>
-                    </a:p>
-                  </a:txBody>
-                  <a:tcPr>
-                    <a:solidFill>
-                      <a:srgbClr val="FFFFFF"/>
-                    </a:solidFill>
-                  </a:tcPr>
-                </a:tc>
-                <a:tc>
-                  <a:txBody>
-                    <a:bodyPr/>
-                    <a:lstStyle/>
-                    <a:p>
-                      <a:r>
-                        <a:rPr sz="750">
-                          <a:solidFill>
-                            <a:srgbClr val="2C3E50"/>
-                          </a:solidFill>
-                        </a:rPr>
-                        <a:t>0.7922 ± 0.0331</a:t>
-                      </a:r>
-                    </a:p>
-                  </a:txBody>
-                  <a:tcPr>
-                    <a:solidFill>
-                      <a:srgbClr val="FFFFFF"/>
-                    </a:solidFill>
-                  </a:tcPr>
-                </a:tc>
-              </a:tr>
-              <a:tr h="196947">
-                <a:tc>
-                  <a:txBody>
-                    <a:bodyPr/>
-                    <a:lstStyle/>
-                    <a:p>
-                      <a:r>
-                        <a:rPr sz="750">
-                          <a:solidFill>
-                            <a:srgbClr val="2C3E50"/>
-                          </a:solidFill>
-                        </a:rPr>
-                        <a:t>10</a:t>
-                      </a:r>
-                    </a:p>
-                  </a:txBody>
-                  <a:tcPr>
-                    <a:solidFill>
-                      <a:srgbClr val="FAFBFC"/>
-                    </a:solidFill>
-                  </a:tcPr>
-                </a:tc>
-                <a:tc>
-                  <a:txBody>
-                    <a:bodyPr/>
-                    <a:lstStyle/>
-                    <a:p>
-                      <a:r>
-                        <a:rPr sz="750">
-                          <a:solidFill>
-                            <a:srgbClr val="2C3E50"/>
-                          </a:solidFill>
-                        </a:rPr>
-                        <a:t>ftSg__LSTMattn</a:t>
-                      </a:r>
-                    </a:p>
-                  </a:txBody>
-                  <a:tcPr>
-                    <a:solidFill>
-                      <a:srgbClr val="FAFBFC"/>
-                    </a:solidFill>
-                  </a:tcPr>
-                </a:tc>
-                <a:tc>
-                  <a:txBody>
-                    <a:bodyPr/>
-                    <a:lstStyle/>
-                    <a:p>
-                      <a:r>
-                        <a:rPr sz="750">
-                          <a:solidFill>
-                            <a:srgbClr val="2C3E50"/>
-                          </a:solidFill>
-                        </a:rPr>
-                        <a:t>FastText</a:t>
-                      </a:r>
-                    </a:p>
-                  </a:txBody>
-                  <a:tcPr>
-                    <a:solidFill>
-                      <a:srgbClr val="FAFBFC"/>
-                    </a:solidFill>
-                  </a:tcPr>
-                </a:tc>
-                <a:tc>
-                  <a:txBody>
-                    <a:bodyPr/>
-                    <a:lstStyle/>
-                    <a:p>
-                      <a:r>
-                        <a:rPr sz="750">
-                          <a:solidFill>
-                            <a:srgbClr val="2C3E50"/>
-                          </a:solidFill>
-                        </a:rPr>
-                        <a:t>skip-gram · mean-pooled</a:t>
-                      </a:r>
-                    </a:p>
-                  </a:txBody>
-                  <a:tcPr>
-                    <a:solidFill>
-                      <a:srgbClr val="FAFBFC"/>
-                    </a:solidFill>
-                  </a:tcPr>
-                </a:tc>
-                <a:tc>
-                  <a:txBody>
-                    <a:bodyPr/>
-                    <a:lstStyle/>
-                    <a:p>
-                      <a:r>
-                        <a:rPr sz="750">
-                          <a:solidFill>
-                            <a:srgbClr val="2C3E50"/>
-                          </a:solidFill>
-                        </a:rPr>
-                        <a:t>DL: LSTM+attention</a:t>
-                      </a:r>
-                    </a:p>
-                  </a:txBody>
-                  <a:tcPr>
-                    <a:solidFill>
-                      <a:srgbClr val="FAFBFC"/>
-                    </a:solidFill>
-                  </a:tcPr>
-                </a:tc>
-                <a:tc>
-                  <a:txBody>
-                    <a:bodyPr/>
-                    <a:lstStyle/>
-                    <a:p>
-                      <a:r>
-                        <a:rPr sz="750">
-                          <a:solidFill>
-                            <a:srgbClr val="2C3E50"/>
-                          </a:solidFill>
-                        </a:rPr>
-                        <a:t>LSTM + attention (paper)</a:t>
-                      </a:r>
-                    </a:p>
-                  </a:txBody>
-                  <a:tcPr>
-                    <a:solidFill>
-                      <a:srgbClr val="FAFBFC"/>
-                    </a:solidFill>
-                  </a:tcPr>
-                </a:tc>
-                <a:tc>
-                  <a:txBody>
-                    <a:bodyPr/>
-                    <a:lstStyle/>
-                    <a:p>
-                      <a:r>
-                        <a:rPr sz="750">
-                          <a:solidFill>
-                            <a:srgbClr val="2C3E50"/>
-                          </a:solidFill>
-                        </a:rPr>
-                        <a:t>0.7889 ± 0.0239</a:t>
-                      </a:r>
-                    </a:p>
-                  </a:txBody>
-                  <a:tcPr>
-                    <a:solidFill>
-                      <a:srgbClr val="FAFBFC"/>
-                    </a:solidFill>
-                  </a:tcPr>
-                </a:tc>
-              </a:tr>
-              <a:tr h="196947">
-                <a:tc>
-                  <a:txBody>
-                    <a:bodyPr/>
-                    <a:lstStyle/>
-                    <a:p>
-                      <a:r>
-                        <a:rPr sz="750">
-                          <a:solidFill>
-                            <a:srgbClr val="2C3E50"/>
-                          </a:solidFill>
-                        </a:rPr>
-                        <a:t>11</a:t>
-                      </a:r>
-                    </a:p>
-                  </a:txBody>
-                  <a:tcPr>
-                    <a:solidFill>
-                      <a:srgbClr val="FFFFFF"/>
-                    </a:solidFill>
-                  </a:tcPr>
-                </a:tc>
-                <a:tc>
-                  <a:txBody>
-                    <a:bodyPr/>
-                    <a:lstStyle/>
-                    <a:p>
-                      <a:r>
-                        <a:rPr sz="750">
-                          <a:solidFill>
-                            <a:srgbClr val="2C3E50"/>
-                          </a:solidFill>
-                        </a:rPr>
-                        <a:t>ftCbow__LSTMattn</a:t>
-                      </a:r>
-                    </a:p>
-                  </a:txBody>
-                  <a:tcPr>
-                    <a:solidFill>
-                      <a:srgbClr val="FFFFFF"/>
-                    </a:solidFill>
-                  </a:tcPr>
-                </a:tc>
-                <a:tc>
-                  <a:txBody>
-                    <a:bodyPr/>
-                    <a:lstStyle/>
-                    <a:p>
-                      <a:r>
-                        <a:rPr sz="750">
-                          <a:solidFill>
-                            <a:srgbClr val="2C3E50"/>
-                          </a:solidFill>
-                        </a:rPr>
-                        <a:t>FastText</a:t>
-                      </a:r>
-                    </a:p>
-                  </a:txBody>
-                  <a:tcPr>
-                    <a:solidFill>
-                      <a:srgbClr val="FFFFFF"/>
-                    </a:solidFill>
-                  </a:tcPr>
-                </a:tc>
-                <a:tc>
-                  <a:txBody>
-                    <a:bodyPr/>
-                    <a:lstStyle/>
-                    <a:p>
-                      <a:r>
-                        <a:rPr sz="750">
-                          <a:solidFill>
-                            <a:srgbClr val="2C3E50"/>
-                          </a:solidFill>
-                        </a:rPr>
-                        <a:t>CBOW · mean-pooled</a:t>
-                      </a:r>
-                    </a:p>
-                  </a:txBody>
-                  <a:tcPr>
-                    <a:solidFill>
-                      <a:srgbClr val="FFFFFF"/>
-                    </a:solidFill>
-                  </a:tcPr>
-                </a:tc>
-                <a:tc>
-                  <a:txBody>
-                    <a:bodyPr/>
-                    <a:lstStyle/>
-                    <a:p>
-                      <a:r>
-                        <a:rPr sz="750">
-                          <a:solidFill>
-                            <a:srgbClr val="2C3E50"/>
-                          </a:solidFill>
-                        </a:rPr>
-                        <a:t>DL: LSTM+attention</a:t>
-                      </a:r>
-                    </a:p>
-                  </a:txBody>
-                  <a:tcPr>
-                    <a:solidFill>
-                      <a:srgbClr val="FFFFFF"/>
-                    </a:solidFill>
-                  </a:tcPr>
-                </a:tc>
-                <a:tc>
-                  <a:txBody>
-                    <a:bodyPr/>
-                    <a:lstStyle/>
-                    <a:p>
-                      <a:r>
-                        <a:rPr sz="750">
-                          <a:solidFill>
-                            <a:srgbClr val="2C3E50"/>
-                          </a:solidFill>
-                        </a:rPr>
-                        <a:t>LSTM + attention (paper)</a:t>
-                      </a:r>
-                    </a:p>
-                  </a:txBody>
-                  <a:tcPr>
-                    <a:solidFill>
-                      <a:srgbClr val="FFFFFF"/>
-                    </a:solidFill>
-                  </a:tcPr>
-                </a:tc>
-                <a:tc>
-                  <a:txBody>
-                    <a:bodyPr/>
-                    <a:lstStyle/>
-                    <a:p>
-                      <a:r>
-                        <a:rPr sz="750">
-                          <a:solidFill>
-                            <a:srgbClr val="2C3E50"/>
-                          </a:solidFill>
-                        </a:rPr>
-                        <a:t>0.7887 ± 0.0258</a:t>
-                      </a:r>
-                    </a:p>
-                  </a:txBody>
-                  <a:tcPr>
-                    <a:solidFill>
-                      <a:srgbClr val="FFFFFF"/>
-                    </a:solidFill>
-                  </a:tcPr>
-                </a:tc>
-              </a:tr>
-              <a:tr h="196947">
-                <a:tc>
-                  <a:txBody>
-                    <a:bodyPr/>
-                    <a:lstStyle/>
-                    <a:p>
-                      <a:r>
-                        <a:rPr sz="750">
-                          <a:solidFill>
-                            <a:srgbClr val="2C3E50"/>
-                          </a:solidFill>
-                        </a:rPr>
-                        <a:t>12</a:t>
-                      </a:r>
-                    </a:p>
-                  </a:txBody>
-                  <a:tcPr>
-                    <a:solidFill>
-                      <a:srgbClr val="FAFBFC"/>
-                    </a:solidFill>
-                  </a:tcPr>
-                </a:tc>
-                <a:tc>
-                  <a:txBody>
-                    <a:bodyPr/>
-                    <a:lstStyle/>
-                    <a:p>
-                      <a:r>
-                        <a:rPr sz="750">
-                          <a:solidFill>
-                            <a:srgbClr val="2C3E50"/>
-                          </a:solidFill>
-                        </a:rPr>
-                        <a:t>ftSg__JustAttn</a:t>
-                      </a:r>
-                    </a:p>
-                  </a:txBody>
-                  <a:tcPr>
-                    <a:solidFill>
-                      <a:srgbClr val="FAFBFC"/>
-                    </a:solidFill>
-                  </a:tcPr>
-                </a:tc>
-                <a:tc>
-                  <a:txBody>
-                    <a:bodyPr/>
-                    <a:lstStyle/>
-                    <a:p>
-                      <a:r>
-                        <a:rPr sz="750">
-                          <a:solidFill>
-                            <a:srgbClr val="2C3E50"/>
-                          </a:solidFill>
-                        </a:rPr>
-                        <a:t>FastText</a:t>
-                      </a:r>
-                    </a:p>
-                  </a:txBody>
-                  <a:tcPr>
-                    <a:solidFill>
-                      <a:srgbClr val="FAFBFC"/>
-                    </a:solidFill>
-                  </a:tcPr>
-                </a:tc>
-                <a:tc>
-                  <a:txBody>
-                    <a:bodyPr/>
-                    <a:lstStyle/>
-                    <a:p>
-                      <a:r>
-                        <a:rPr sz="750">
-                          <a:solidFill>
-                            <a:srgbClr val="2C3E50"/>
-                          </a:solidFill>
-                        </a:rPr>
-                        <a:t>skip-gram · mean-pooled</a:t>
-                      </a:r>
-                    </a:p>
-                  </a:txBody>
-                  <a:tcPr>
-                    <a:solidFill>
-                      <a:srgbClr val="FAFBFC"/>
-                    </a:solidFill>
-                  </a:tcPr>
-                </a:tc>
-                <a:tc>
-                  <a:txBody>
-                    <a:bodyPr/>
-                    <a:lstStyle/>
-                    <a:p>
-                      <a:r>
-                        <a:rPr sz="750">
-                          <a:solidFill>
-                            <a:srgbClr val="2C3E50"/>
-                          </a:solidFill>
-                        </a:rPr>
-                        <a:t>DL: attention</a:t>
-                      </a:r>
-                    </a:p>
-                  </a:txBody>
-                  <a:tcPr>
-                    <a:solidFill>
-                      <a:srgbClr val="FAFBFC"/>
-                    </a:solidFill>
-                  </a:tcPr>
-                </a:tc>
-                <a:tc>
-                  <a:txBody>
-                    <a:bodyPr/>
-                    <a:lstStyle/>
-                    <a:p>
-                      <a:r>
-                        <a:rPr sz="750">
-                          <a:solidFill>
-                            <a:srgbClr val="2C3E50"/>
-                          </a:solidFill>
-                        </a:rPr>
-                        <a:t>attention-only (paper)</a:t>
-                      </a:r>
-                    </a:p>
-                  </a:txBody>
-                  <a:tcPr>
-                    <a:solidFill>
-                      <a:srgbClr val="FAFBFC"/>
-                    </a:solidFill>
-                  </a:tcPr>
-                </a:tc>
-                <a:tc>
-                  <a:txBody>
-                    <a:bodyPr/>
-                    <a:lstStyle/>
-                    <a:p>
-                      <a:r>
-                        <a:rPr sz="750">
-                          <a:solidFill>
-                            <a:srgbClr val="2C3E50"/>
-                          </a:solidFill>
-                        </a:rPr>
-                        <a:t>0.7812 ± 0.0318</a:t>
-                      </a:r>
-                    </a:p>
-                  </a:txBody>
-                  <a:tcPr>
-                    <a:solidFill>
-                      <a:srgbClr val="FAFBFC"/>
-                    </a:solidFill>
-                  </a:tcPr>
-                </a:tc>
-              </a:tr>
-              <a:tr h="196947">
-                <a:tc>
-                  <a:txBody>
-                    <a:bodyPr/>
-                    <a:lstStyle/>
-                    <a:p>
-                      <a:r>
-                        <a:rPr sz="750">
-                          <a:solidFill>
-                            <a:srgbClr val="2C3E50"/>
-                          </a:solidFill>
-                        </a:rPr>
-                        <a:t>13</a:t>
-                      </a:r>
-                    </a:p>
-                  </a:txBody>
-                  <a:tcPr>
-                    <a:solidFill>
-                      <a:srgbClr val="FFFFFF"/>
-                    </a:solidFill>
-                  </a:tcPr>
-                </a:tc>
-                <a:tc>
-                  <a:txBody>
-                    <a:bodyPr/>
-                    <a:lstStyle/>
-                    <a:p>
-                      <a:r>
-                        <a:rPr sz="750">
-                          <a:solidFill>
-                            <a:srgbClr val="2C3E50"/>
-                          </a:solidFill>
-                        </a:rPr>
-                        <a:t>w2vSg__LSTMattn</a:t>
-                      </a:r>
-                    </a:p>
-                  </a:txBody>
-                  <a:tcPr>
-                    <a:solidFill>
-                      <a:srgbClr val="FFFFFF"/>
-                    </a:solidFill>
-                  </a:tcPr>
-                </a:tc>
-                <a:tc>
-                  <a:txBody>
-                    <a:bodyPr/>
-                    <a:lstStyle/>
-                    <a:p>
-                      <a:r>
-                        <a:rPr sz="750">
-                          <a:solidFill>
-                            <a:srgbClr val="2C3E50"/>
-                          </a:solidFill>
-                        </a:rPr>
-                        <a:t>Word2Vec</a:t>
-                      </a:r>
-                    </a:p>
-                  </a:txBody>
-                  <a:tcPr>
-                    <a:solidFill>
-                      <a:srgbClr val="FFFFFF"/>
-                    </a:solidFill>
-                  </a:tcPr>
-                </a:tc>
-                <a:tc>
-                  <a:txBody>
-                    <a:bodyPr/>
-                    <a:lstStyle/>
-                    <a:p>
-                      <a:r>
-                        <a:rPr sz="750">
-                          <a:solidFill>
-                            <a:srgbClr val="2C3E50"/>
-                          </a:solidFill>
-                        </a:rPr>
-                        <a:t>skip-gram · mean-pooled</a:t>
-                      </a:r>
-                    </a:p>
-                  </a:txBody>
-                  <a:tcPr>
-                    <a:solidFill>
-                      <a:srgbClr val="FFFFFF"/>
-                    </a:solidFill>
-                  </a:tcPr>
-                </a:tc>
-                <a:tc>
-                  <a:txBody>
-                    <a:bodyPr/>
-                    <a:lstStyle/>
-                    <a:p>
-                      <a:r>
-                        <a:rPr sz="750">
-                          <a:solidFill>
-                            <a:srgbClr val="2C3E50"/>
-                          </a:solidFill>
-                        </a:rPr>
-                        <a:t>DL: LSTM+attention</a:t>
-                      </a:r>
-                    </a:p>
-                  </a:txBody>
-                  <a:tcPr>
-                    <a:solidFill>
-                      <a:srgbClr val="FFFFFF"/>
-                    </a:solidFill>
-                  </a:tcPr>
-                </a:tc>
-                <a:tc>
-                  <a:txBody>
-                    <a:bodyPr/>
-                    <a:lstStyle/>
-                    <a:p>
-                      <a:r>
-                        <a:rPr sz="750">
-                          <a:solidFill>
-                            <a:srgbClr val="2C3E50"/>
-                          </a:solidFill>
-                        </a:rPr>
-                        <a:t>LSTM + attention (paper)</a:t>
-                      </a:r>
-                    </a:p>
-                  </a:txBody>
-                  <a:tcPr>
-                    <a:solidFill>
-                      <a:srgbClr val="FFFFFF"/>
-                    </a:solidFill>
-                  </a:tcPr>
-                </a:tc>
-                <a:tc>
-                  <a:txBody>
-                    <a:bodyPr/>
-                    <a:lstStyle/>
-                    <a:p>
-                      <a:r>
-                        <a:rPr sz="750">
-                          <a:solidFill>
-                            <a:srgbClr val="2C3E50"/>
-                          </a:solidFill>
-                        </a:rPr>
-                        <a:t>0.7806 ± 0.0234</a:t>
-                      </a:r>
-                    </a:p>
-                  </a:txBody>
-                  <a:tcPr>
-                    <a:solidFill>
-                      <a:srgbClr val="FFFFFF"/>
-                    </a:solidFill>
-                  </a:tcPr>
-                </a:tc>
-              </a:tr>
-              <a:tr h="196947">
-                <a:tc>
-                  <a:txBody>
-                    <a:bodyPr/>
-                    <a:lstStyle/>
-                    <a:p>
-                      <a:r>
-                        <a:rPr sz="750">
-                          <a:solidFill>
-                            <a:srgbClr val="2C3E50"/>
-                          </a:solidFill>
-                        </a:rPr>
-                        <a:t>14</a:t>
-                      </a:r>
-                    </a:p>
-                  </a:txBody>
-                  <a:tcPr>
-                    <a:solidFill>
-                      <a:srgbClr val="FAFBFC"/>
-                    </a:solidFill>
-                  </a:tcPr>
-                </a:tc>
-                <a:tc>
-                  <a:txBody>
-                    <a:bodyPr/>
-                    <a:lstStyle/>
-                    <a:p>
-                      <a:r>
-                        <a:rPr sz="750">
-                          <a:solidFill>
-                            <a:srgbClr val="2C3E50"/>
-                          </a:solidFill>
-                        </a:rPr>
-                        <a:t>w2vSg__LSTM</a:t>
-                      </a:r>
-                    </a:p>
-                  </a:txBody>
-                  <a:tcPr>
-                    <a:solidFill>
-                      <a:srgbClr val="FAFBFC"/>
-                    </a:solidFill>
-                  </a:tcPr>
-                </a:tc>
-                <a:tc>
-                  <a:txBody>
-                    <a:bodyPr/>
-                    <a:lstStyle/>
-                    <a:p>
-                      <a:r>
-                        <a:rPr sz="750">
-                          <a:solidFill>
-                            <a:srgbClr val="2C3E50"/>
-                          </a:solidFill>
-                        </a:rPr>
-                        <a:t>Word2Vec</a:t>
-                      </a:r>
-                    </a:p>
-                  </a:txBody>
-                  <a:tcPr>
-                    <a:solidFill>
-                      <a:srgbClr val="FAFBFC"/>
-                    </a:solidFill>
-                  </a:tcPr>
-                </a:tc>
-                <a:tc>
-                  <a:txBody>
-                    <a:bodyPr/>
-                    <a:lstStyle/>
-                    <a:p>
-                      <a:r>
-                        <a:rPr sz="750">
-                          <a:solidFill>
-                            <a:srgbClr val="2C3E50"/>
-                          </a:solidFill>
-                        </a:rPr>
-                        <a:t>skip-gram · mean-pooled</a:t>
-                      </a:r>
-                    </a:p>
-                  </a:txBody>
-                  <a:tcPr>
-                    <a:solidFill>
-                      <a:srgbClr val="FAFBFC"/>
-                    </a:solidFill>
-                  </a:tcPr>
-                </a:tc>
-                <a:tc>
-                  <a:txBody>
-                    <a:bodyPr/>
-                    <a:lstStyle/>
-                    <a:p>
-                      <a:r>
-                        <a:rPr sz="750">
-                          <a:solidFill>
-                            <a:srgbClr val="2C3E50"/>
-                          </a:solidFill>
-                        </a:rPr>
-                        <a:t>DL: LSTM</a:t>
-                      </a:r>
-                    </a:p>
-                  </a:txBody>
-                  <a:tcPr>
-                    <a:solidFill>
-                      <a:srgbClr val="FAFBFC"/>
-                    </a:solidFill>
-                  </a:tcPr>
-                </a:tc>
-                <a:tc>
-                  <a:txBody>
-                    <a:bodyPr/>
-                    <a:lstStyle/>
-                    <a:p>
-                      <a:r>
-                        <a:rPr sz="750">
-                          <a:solidFill>
-                            <a:srgbClr val="2C3E50"/>
-                          </a:solidFill>
-                        </a:rPr>
-                        <a:t>vanilla LSTM (paper)</a:t>
-                      </a:r>
-                    </a:p>
-                  </a:txBody>
-                  <a:tcPr>
-                    <a:solidFill>
-                      <a:srgbClr val="FAFBFC"/>
-                    </a:solidFill>
-                  </a:tcPr>
-                </a:tc>
-                <a:tc>
-                  <a:txBody>
-                    <a:bodyPr/>
-                    <a:lstStyle/>
-                    <a:p>
-                      <a:r>
-                        <a:rPr sz="750">
-                          <a:solidFill>
-                            <a:srgbClr val="2C3E50"/>
-                          </a:solidFill>
-                        </a:rPr>
-                        <a:t>0.7781 ± 0.0292</a:t>
-                      </a:r>
-                    </a:p>
-                  </a:txBody>
-                  <a:tcPr>
-                    <a:solidFill>
-                      <a:srgbClr val="FAFBFC"/>
-                    </a:solidFill>
-                  </a:tcPr>
-                </a:tc>
-              </a:tr>
-              <a:tr h="196947">
-                <a:tc>
-                  <a:txBody>
-                    <a:bodyPr/>
-                    <a:lstStyle/>
-                    <a:p>
-                      <a:r>
-                        <a:rPr sz="750">
-                          <a:solidFill>
-                            <a:srgbClr val="2C3E50"/>
-                          </a:solidFill>
-                        </a:rPr>
-                        <a:t>15</a:t>
-                      </a:r>
-                    </a:p>
-                  </a:txBody>
-                  <a:tcPr>
-                    <a:solidFill>
-                      <a:srgbClr val="FFFFFF"/>
-                    </a:solidFill>
-                  </a:tcPr>
-                </a:tc>
-                <a:tc>
-                  <a:txBody>
-                    <a:bodyPr/>
-                    <a:lstStyle/>
-                    <a:p>
-                      <a:r>
-                        <a:rPr sz="750">
-                          <a:solidFill>
-                            <a:srgbClr val="2C3E50"/>
-                          </a:solidFill>
-                        </a:rPr>
-                        <a:t>ftCbow__Trans</a:t>
-                      </a:r>
-                    </a:p>
-                  </a:txBody>
-                  <a:tcPr>
-                    <a:solidFill>
-                      <a:srgbClr val="FFFFFF"/>
-                    </a:solidFill>
-                  </a:tcPr>
-                </a:tc>
-                <a:tc>
-                  <a:txBody>
-                    <a:bodyPr/>
-                    <a:lstStyle/>
-                    <a:p>
-                      <a:r>
-                        <a:rPr sz="750">
-                          <a:solidFill>
-                            <a:srgbClr val="2C3E50"/>
-                          </a:solidFill>
-                        </a:rPr>
-                        <a:t>FastText</a:t>
-                      </a:r>
-                    </a:p>
-                  </a:txBody>
-                  <a:tcPr>
-                    <a:solidFill>
-                      <a:srgbClr val="FFFFFF"/>
-                    </a:solidFill>
-                  </a:tcPr>
-                </a:tc>
-                <a:tc>
-                  <a:txBody>
-                    <a:bodyPr/>
-                    <a:lstStyle/>
-                    <a:p>
-                      <a:r>
-                        <a:rPr sz="750">
-                          <a:solidFill>
-                            <a:srgbClr val="2C3E50"/>
-                          </a:solidFill>
-                        </a:rPr>
-                        <a:t>CBOW · mean-pooled</a:t>
-                      </a:r>
-                    </a:p>
-                  </a:txBody>
-                  <a:tcPr>
-                    <a:solidFill>
-                      <a:srgbClr val="FFFFFF"/>
-                    </a:solidFill>
-                  </a:tcPr>
-                </a:tc>
-                <a:tc>
-                  <a:txBody>
-                    <a:bodyPr/>
-                    <a:lstStyle/>
-                    <a:p>
-                      <a:r>
-                        <a:rPr sz="750">
-                          <a:solidFill>
-                            <a:srgbClr val="2C3E50"/>
-                          </a:solidFill>
-                        </a:rPr>
-                        <a:t>DL: transformer</a:t>
-                      </a:r>
-                    </a:p>
-                  </a:txBody>
-                  <a:tcPr>
-                    <a:solidFill>
-                      <a:srgbClr val="FFFFFF"/>
-                    </a:solidFill>
-                  </a:tcPr>
-                </a:tc>
-                <a:tc>
-                  <a:txBody>
-                    <a:bodyPr/>
-                    <a:lstStyle/>
-                    <a:p>
-                      <a:r>
-                        <a:rPr sz="750">
-                          <a:solidFill>
-                            <a:srgbClr val="2C3E50"/>
-                          </a:solidFill>
-                        </a:rPr>
-                        <a:t>4-block transformer (paper)</a:t>
-                      </a:r>
-                    </a:p>
-                  </a:txBody>
-                  <a:tcPr>
-                    <a:solidFill>
-                      <a:srgbClr val="FFFFFF"/>
-                    </a:solidFill>
-                  </a:tcPr>
-                </a:tc>
-                <a:tc>
-                  <a:txBody>
-                    <a:bodyPr/>
-                    <a:lstStyle/>
-                    <a:p>
-                      <a:r>
-                        <a:rPr sz="750">
-                          <a:solidFill>
-                            <a:srgbClr val="2C3E50"/>
-                          </a:solidFill>
-                        </a:rPr>
-                        <a:t>0.7750 ± 0.0339</a:t>
-                      </a:r>
-                    </a:p>
-                  </a:txBody>
-                  <a:tcPr>
-                    <a:solidFill>
-                      <a:srgbClr val="FFFFFF"/>
-                    </a:solidFill>
-                  </a:tcPr>
-                </a:tc>
-              </a:tr>
-              <a:tr h="196947">
-                <a:tc>
-                  <a:txBody>
-                    <a:bodyPr/>
-                    <a:lstStyle/>
-                    <a:p>
-                      <a:r>
-                        <a:rPr sz="750">
-                          <a:solidFill>
-                            <a:srgbClr val="2C3E50"/>
-                          </a:solidFill>
-                        </a:rPr>
-                        <a:t>16</a:t>
-                      </a:r>
-                    </a:p>
-                  </a:txBody>
-                  <a:tcPr>
-                    <a:solidFill>
-                      <a:srgbClr val="FAFBFC"/>
-                    </a:solidFill>
-                  </a:tcPr>
-                </a:tc>
-                <a:tc>
-                  <a:txBody>
-                    <a:bodyPr/>
-                    <a:lstStyle/>
-                    <a:p>
-                      <a:r>
-                        <a:rPr sz="750">
-                          <a:solidFill>
-                            <a:srgbClr val="2C3E50"/>
-                          </a:solidFill>
-                        </a:rPr>
-                        <a:t>w2vSg__JustAttn</a:t>
-                      </a:r>
-                    </a:p>
-                  </a:txBody>
-                  <a:tcPr>
-                    <a:solidFill>
-                      <a:srgbClr val="FAFBFC"/>
-                    </a:solidFill>
-                  </a:tcPr>
-                </a:tc>
-                <a:tc>
-                  <a:txBody>
-                    <a:bodyPr/>
-                    <a:lstStyle/>
-                    <a:p>
-                      <a:r>
-                        <a:rPr sz="750">
-                          <a:solidFill>
-                            <a:srgbClr val="2C3E50"/>
-                          </a:solidFill>
-                        </a:rPr>
-                        <a:t>Word2Vec</a:t>
-                      </a:r>
-                    </a:p>
-                  </a:txBody>
-                  <a:tcPr>
-                    <a:solidFill>
-                      <a:srgbClr val="FAFBFC"/>
-                    </a:solidFill>
-                  </a:tcPr>
-                </a:tc>
-                <a:tc>
-                  <a:txBody>
-                    <a:bodyPr/>
-                    <a:lstStyle/>
-                    <a:p>
-                      <a:r>
-                        <a:rPr sz="750">
-                          <a:solidFill>
-                            <a:srgbClr val="2C3E50"/>
-                          </a:solidFill>
-                        </a:rPr>
-                        <a:t>skip-gram · mean-pooled</a:t>
-                      </a:r>
-                    </a:p>
-                  </a:txBody>
-                  <a:tcPr>
-                    <a:solidFill>
-                      <a:srgbClr val="FAFBFC"/>
-                    </a:solidFill>
-                  </a:tcPr>
-                </a:tc>
-                <a:tc>
-                  <a:txBody>
-                    <a:bodyPr/>
-                    <a:lstStyle/>
-                    <a:p>
-                      <a:r>
-                        <a:rPr sz="750">
-                          <a:solidFill>
-                            <a:srgbClr val="2C3E50"/>
-                          </a:solidFill>
-                        </a:rPr>
-                        <a:t>DL: attention</a:t>
-                      </a:r>
-                    </a:p>
-                  </a:txBody>
-                  <a:tcPr>
-                    <a:solidFill>
-                      <a:srgbClr val="FAFBFC"/>
-                    </a:solidFill>
-                  </a:tcPr>
-                </a:tc>
-                <a:tc>
-                  <a:txBody>
-                    <a:bodyPr/>
-                    <a:lstStyle/>
-                    <a:p>
-                      <a:r>
-                        <a:rPr sz="750">
-                          <a:solidFill>
-                            <a:srgbClr val="2C3E50"/>
-                          </a:solidFill>
-                        </a:rPr>
-                        <a:t>attention-only (paper)</a:t>
-                      </a:r>
-                    </a:p>
-                  </a:txBody>
-                  <a:tcPr>
-                    <a:solidFill>
-                      <a:srgbClr val="FAFBFC"/>
-                    </a:solidFill>
-                  </a:tcPr>
-                </a:tc>
-                <a:tc>
-                  <a:txBody>
-                    <a:bodyPr/>
-                    <a:lstStyle/>
-                    <a:p>
-                      <a:r>
-                        <a:rPr sz="750">
-                          <a:solidFill>
-                            <a:srgbClr val="2C3E50"/>
-                          </a:solidFill>
-                        </a:rPr>
-                        <a:t>0.7748 ± 0.0221</a:t>
-                      </a:r>
-                    </a:p>
-                  </a:txBody>
-                  <a:tcPr>
-                    <a:solidFill>
-                      <a:srgbClr val="FAFBFC"/>
-                    </a:solidFill>
-                  </a:tcPr>
-                </a:tc>
-              </a:tr>
-              <a:tr h="196947">
-                <a:tc>
-                  <a:txBody>
-                    <a:bodyPr/>
-                    <a:lstStyle/>
-                    <a:p>
-                      <a:r>
-                        <a:rPr sz="750">
-                          <a:solidFill>
-                            <a:srgbClr val="2C3E50"/>
-                          </a:solidFill>
-                        </a:rPr>
-                        <a:t>17</a:t>
-                      </a:r>
-                    </a:p>
-                  </a:txBody>
-                  <a:tcPr>
-                    <a:solidFill>
-                      <a:srgbClr val="FFFFFF"/>
-                    </a:solidFill>
-                  </a:tcPr>
-                </a:tc>
-                <a:tc>
-                  <a:txBody>
-                    <a:bodyPr/>
-                    <a:lstStyle/>
-                    <a:p>
-                      <a:r>
-                        <a:rPr sz="750">
-                          <a:solidFill>
-                            <a:srgbClr val="2C3E50"/>
-                          </a:solidFill>
-                        </a:rPr>
-                        <a:t>w2vCbow__LSTMattn</a:t>
-                      </a:r>
-                    </a:p>
-                  </a:txBody>
-                  <a:tcPr>
-                    <a:solidFill>
-                      <a:srgbClr val="FFFFFF"/>
-                    </a:solidFill>
-                  </a:tcPr>
-                </a:tc>
-                <a:tc>
-                  <a:txBody>
-                    <a:bodyPr/>
-                    <a:lstStyle/>
-                    <a:p>
-                      <a:r>
-                        <a:rPr sz="750">
-                          <a:solidFill>
-                            <a:srgbClr val="2C3E50"/>
-                          </a:solidFill>
-                        </a:rPr>
-                        <a:t>Word2Vec</a:t>
-                      </a:r>
-                    </a:p>
-                  </a:txBody>
-                  <a:tcPr>
-                    <a:solidFill>
-                      <a:srgbClr val="FFFFFF"/>
-                    </a:solidFill>
-                  </a:tcPr>
-                </a:tc>
-                <a:tc>
-                  <a:txBody>
-                    <a:bodyPr/>
-                    <a:lstStyle/>
-                    <a:p>
-                      <a:r>
-                        <a:rPr sz="750">
-                          <a:solidFill>
-                            <a:srgbClr val="2C3E50"/>
-                          </a:solidFill>
-                        </a:rPr>
-                        <a:t>CBOW · mean-pooled</a:t>
-                      </a:r>
-                    </a:p>
-                  </a:txBody>
-                  <a:tcPr>
-                    <a:solidFill>
-                      <a:srgbClr val="FFFFFF"/>
-                    </a:solidFill>
-                  </a:tcPr>
-                </a:tc>
-                <a:tc>
-                  <a:txBody>
-                    <a:bodyPr/>
-                    <a:lstStyle/>
-                    <a:p>
-                      <a:r>
-                        <a:rPr sz="750">
-                          <a:solidFill>
-                            <a:srgbClr val="2C3E50"/>
-                          </a:solidFill>
-                        </a:rPr>
-                        <a:t>DL: LSTM+attention</a:t>
-                      </a:r>
-                    </a:p>
-                  </a:txBody>
-                  <a:tcPr>
-                    <a:solidFill>
-                      <a:srgbClr val="FFFFFF"/>
-                    </a:solidFill>
-                  </a:tcPr>
-                </a:tc>
-                <a:tc>
-                  <a:txBody>
-                    <a:bodyPr/>
-                    <a:lstStyle/>
-                    <a:p>
-                      <a:r>
-                        <a:rPr sz="750">
-                          <a:solidFill>
-                            <a:srgbClr val="2C3E50"/>
-                          </a:solidFill>
-                        </a:rPr>
-                        <a:t>LSTM + attention (paper)</a:t>
-                      </a:r>
-                    </a:p>
-                  </a:txBody>
-                  <a:tcPr>
-                    <a:solidFill>
-                      <a:srgbClr val="FFFFFF"/>
-                    </a:solidFill>
-                  </a:tcPr>
-                </a:tc>
-                <a:tc>
-                  <a:txBody>
-                    <a:bodyPr/>
-                    <a:lstStyle/>
-                    <a:p>
-                      <a:r>
-                        <a:rPr sz="750">
-                          <a:solidFill>
-                            <a:srgbClr val="2C3E50"/>
-                          </a:solidFill>
-                        </a:rPr>
-                        <a:t>0.7746 ± 0.0271</a:t>
-                      </a:r>
-                    </a:p>
-                  </a:txBody>
-                  <a:tcPr>
-                    <a:solidFill>
-                      <a:srgbClr val="FFFFFF"/>
-                    </a:solidFill>
-                  </a:tcPr>
-                </a:tc>
-              </a:tr>
-              <a:tr h="196947">
-                <a:tc>
-                  <a:txBody>
-                    <a:bodyPr/>
-                    <a:lstStyle/>
-                    <a:p>
-                      <a:r>
-                        <a:rPr sz="750">
-                          <a:solidFill>
-                            <a:srgbClr val="2C3E50"/>
-                          </a:solidFill>
-                        </a:rPr>
-                        <a:t>18</a:t>
-                      </a:r>
-                    </a:p>
-                  </a:txBody>
-                  <a:tcPr>
-                    <a:solidFill>
-                      <a:srgbClr val="FAFBFC"/>
-                    </a:solidFill>
-                  </a:tcPr>
-                </a:tc>
-                <a:tc>
-                  <a:txBody>
-                    <a:bodyPr/>
-                    <a:lstStyle/>
-                    <a:p>
-                      <a:r>
-                        <a:rPr sz="750">
-                          <a:solidFill>
-                            <a:srgbClr val="2C3E50"/>
-                          </a:solidFill>
-                        </a:rPr>
-                        <a:t>w2vSg__Trans</a:t>
-                      </a:r>
-                    </a:p>
-                  </a:txBody>
-                  <a:tcPr>
-                    <a:solidFill>
-                      <a:srgbClr val="FAFBFC"/>
-                    </a:solidFill>
-                  </a:tcPr>
-                </a:tc>
-                <a:tc>
-                  <a:txBody>
-                    <a:bodyPr/>
-                    <a:lstStyle/>
-                    <a:p>
-                      <a:r>
-                        <a:rPr sz="750">
-                          <a:solidFill>
-                            <a:srgbClr val="2C3E50"/>
-                          </a:solidFill>
-                        </a:rPr>
-                        <a:t>Word2Vec</a:t>
-                      </a:r>
-                    </a:p>
-                  </a:txBody>
-                  <a:tcPr>
-                    <a:solidFill>
-                      <a:srgbClr val="FAFBFC"/>
-                    </a:solidFill>
-                  </a:tcPr>
-                </a:tc>
-                <a:tc>
-                  <a:txBody>
-                    <a:bodyPr/>
-                    <a:lstStyle/>
-                    <a:p>
-                      <a:r>
-                        <a:rPr sz="750">
-                          <a:solidFill>
-                            <a:srgbClr val="2C3E50"/>
-                          </a:solidFill>
-                        </a:rPr>
-                        <a:t>skip-gram · mean-pooled</a:t>
-                      </a:r>
-                    </a:p>
-                  </a:txBody>
-                  <a:tcPr>
-                    <a:solidFill>
-                      <a:srgbClr val="FAFBFC"/>
-                    </a:solidFill>
-                  </a:tcPr>
-                </a:tc>
-                <a:tc>
-                  <a:txBody>
-                    <a:bodyPr/>
-                    <a:lstStyle/>
-                    <a:p>
-                      <a:r>
-                        <a:rPr sz="750">
-                          <a:solidFill>
-                            <a:srgbClr val="2C3E50"/>
-                          </a:solidFill>
-                        </a:rPr>
-                        <a:t>DL: transformer</a:t>
-                      </a:r>
-                    </a:p>
-                  </a:txBody>
-                  <a:tcPr>
-                    <a:solidFill>
-                      <a:srgbClr val="FAFBFC"/>
-                    </a:solidFill>
-                  </a:tcPr>
-                </a:tc>
-                <a:tc>
-                  <a:txBody>
-                    <a:bodyPr/>
-                    <a:lstStyle/>
-                    <a:p>
-                      <a:r>
-                        <a:rPr sz="750">
-                          <a:solidFill>
-                            <a:srgbClr val="2C3E50"/>
-                          </a:solidFill>
-                        </a:rPr>
-                        <a:t>4-block transformer (paper)</a:t>
-                      </a:r>
-                    </a:p>
-                  </a:txBody>
-                  <a:tcPr>
-                    <a:solidFill>
-                      <a:srgbClr val="FAFBFC"/>
-                    </a:solidFill>
-                  </a:tcPr>
-                </a:tc>
-                <a:tc>
-                  <a:txBody>
-                    <a:bodyPr/>
-                    <a:lstStyle/>
-                    <a:p>
-                      <a:r>
-                        <a:rPr sz="750">
-                          <a:solidFill>
-                            <a:srgbClr val="2C3E50"/>
-                          </a:solidFill>
-                        </a:rPr>
-                        <a:t>0.7703 ± 0.0509</a:t>
-                      </a:r>
-                    </a:p>
-                  </a:txBody>
-                  <a:tcPr>
-                    <a:solidFill>
-                      <a:srgbClr val="FAFBFC"/>
-                    </a:solidFill>
-                  </a:tcPr>
-                </a:tc>
-              </a:tr>
-              <a:tr h="196947">
-                <a:tc>
-                  <a:txBody>
-                    <a:bodyPr/>
-                    <a:lstStyle/>
-                    <a:p>
-                      <a:r>
-                        <a:rPr sz="750">
-                          <a:solidFill>
-                            <a:srgbClr val="2C3E50"/>
-                          </a:solidFill>
-                        </a:rPr>
-                        <a:t>19</a:t>
-                      </a:r>
-                    </a:p>
-                  </a:txBody>
-                  <a:tcPr>
-                    <a:solidFill>
-                      <a:srgbClr val="FFFFFF"/>
-                    </a:solidFill>
-                  </a:tcPr>
-                </a:tc>
-                <a:tc>
-                  <a:txBody>
-                    <a:bodyPr/>
-                    <a:lstStyle/>
-                    <a:p>
-                      <a:r>
-                        <a:rPr sz="750">
-                          <a:solidFill>
-                            <a:srgbClr val="2C3E50"/>
-                          </a:solidFill>
-                        </a:rPr>
-                        <a:t>w2vCbow__Trans</a:t>
-                      </a:r>
-                    </a:p>
-                  </a:txBody>
-                  <a:tcPr>
-                    <a:solidFill>
-                      <a:srgbClr val="FFFFFF"/>
-                    </a:solidFill>
-                  </a:tcPr>
-                </a:tc>
-                <a:tc>
-                  <a:txBody>
-                    <a:bodyPr/>
-                    <a:lstStyle/>
-                    <a:p>
-                      <a:r>
-                        <a:rPr sz="750">
-                          <a:solidFill>
-                            <a:srgbClr val="2C3E50"/>
-                          </a:solidFill>
-                        </a:rPr>
-                        <a:t>Word2Vec</a:t>
-                      </a:r>
-                    </a:p>
-                  </a:txBody>
-                  <a:tcPr>
-                    <a:solidFill>
-                      <a:srgbClr val="FFFFFF"/>
-                    </a:solidFill>
-                  </a:tcPr>
-                </a:tc>
-                <a:tc>
-                  <a:txBody>
-                    <a:bodyPr/>
-                    <a:lstStyle/>
-                    <a:p>
-                      <a:r>
-                        <a:rPr sz="750">
-                          <a:solidFill>
-                            <a:srgbClr val="2C3E50"/>
-                          </a:solidFill>
-                        </a:rPr>
-                        <a:t>CBOW · mean-pooled</a:t>
-                      </a:r>
-                    </a:p>
-                  </a:txBody>
-                  <a:tcPr>
-                    <a:solidFill>
-                      <a:srgbClr val="FFFFFF"/>
-                    </a:solidFill>
-                  </a:tcPr>
-                </a:tc>
-                <a:tc>
-                  <a:txBody>
-                    <a:bodyPr/>
-                    <a:lstStyle/>
-                    <a:p>
-                      <a:r>
-                        <a:rPr sz="750">
-                          <a:solidFill>
-                            <a:srgbClr val="2C3E50"/>
-                          </a:solidFill>
-                        </a:rPr>
-                        <a:t>DL: transformer</a:t>
-                      </a:r>
-                    </a:p>
-                  </a:txBody>
-                  <a:tcPr>
-                    <a:solidFill>
-                      <a:srgbClr val="FFFFFF"/>
-                    </a:solidFill>
-                  </a:tcPr>
-                </a:tc>
-                <a:tc>
-                  <a:txBody>
-                    <a:bodyPr/>
-                    <a:lstStyle/>
-                    <a:p>
-                      <a:r>
-                        <a:rPr sz="750">
-                          <a:solidFill>
-                            <a:srgbClr val="2C3E50"/>
-                          </a:solidFill>
-                        </a:rPr>
-                        <a:t>4-block transformer (paper)</a:t>
-                      </a:r>
-                    </a:p>
-                  </a:txBody>
-                  <a:tcPr>
-                    <a:solidFill>
-                      <a:srgbClr val="FFFFFF"/>
-                    </a:solidFill>
-                  </a:tcPr>
-                </a:tc>
-                <a:tc>
-                  <a:txBody>
-                    <a:bodyPr/>
-                    <a:lstStyle/>
-                    <a:p>
-                      <a:r>
-                        <a:rPr sz="750">
-                          <a:solidFill>
-                            <a:srgbClr val="2C3E50"/>
-                          </a:solidFill>
-                        </a:rPr>
-                        <a:t>0.7649 ± 0.0351</a:t>
-                      </a:r>
-                    </a:p>
-                  </a:txBody>
-                  <a:tcPr>
-                    <a:solidFill>
-                      <a:srgbClr val="FFFFFF"/>
-                    </a:solidFill>
-                  </a:tcPr>
-                </a:tc>
-              </a:tr>
-              <a:tr h="196947">
-                <a:tc>
-                  <a:txBody>
-                    <a:bodyPr/>
-                    <a:lstStyle/>
-                    <a:p>
-                      <a:r>
-                        <a:rPr sz="750">
-                          <a:solidFill>
-                            <a:srgbClr val="2C3E50"/>
-                          </a:solidFill>
-                        </a:rPr>
-                        <a:t>20</a:t>
-                      </a:r>
-                    </a:p>
-                  </a:txBody>
-                  <a:tcPr>
-                    <a:solidFill>
-                      <a:srgbClr val="FAFBFC"/>
-                    </a:solidFill>
-                  </a:tcPr>
-                </a:tc>
-                <a:tc>
-                  <a:txBody>
-                    <a:bodyPr/>
-                    <a:lstStyle/>
-                    <a:p>
-                      <a:r>
-                        <a:rPr sz="750">
-                          <a:solidFill>
-                            <a:srgbClr val="2C3E50"/>
-                          </a:solidFill>
-                        </a:rPr>
-                        <a:t>w2vCbow__JustAttn</a:t>
-                      </a:r>
-                    </a:p>
-                  </a:txBody>
-                  <a:tcPr>
-                    <a:solidFill>
-                      <a:srgbClr val="FAFBFC"/>
-                    </a:solidFill>
-                  </a:tcPr>
-                </a:tc>
-                <a:tc>
-                  <a:txBody>
-                    <a:bodyPr/>
-                    <a:lstStyle/>
-                    <a:p>
-                      <a:r>
-                        <a:rPr sz="750">
-                          <a:solidFill>
-                            <a:srgbClr val="2C3E50"/>
-                          </a:solidFill>
-                        </a:rPr>
-                        <a:t>Word2Vec</a:t>
-                      </a:r>
-                    </a:p>
-                  </a:txBody>
-                  <a:tcPr>
-                    <a:solidFill>
-                      <a:srgbClr val="FAFBFC"/>
-                    </a:solidFill>
-                  </a:tcPr>
-                </a:tc>
-                <a:tc>
-                  <a:txBody>
-                    <a:bodyPr/>
-                    <a:lstStyle/>
-                    <a:p>
-                      <a:r>
-                        <a:rPr sz="750">
-                          <a:solidFill>
-                            <a:srgbClr val="2C3E50"/>
-                          </a:solidFill>
-                        </a:rPr>
-                        <a:t>CBOW · mean-pooled</a:t>
-                      </a:r>
-                    </a:p>
-                  </a:txBody>
-                  <a:tcPr>
-                    <a:solidFill>
-                      <a:srgbClr val="FAFBFC"/>
-                    </a:solidFill>
-                  </a:tcPr>
-                </a:tc>
-                <a:tc>
-                  <a:txBody>
-                    <a:bodyPr/>
-                    <a:lstStyle/>
-                    <a:p>
-                      <a:r>
-                        <a:rPr sz="750">
-                          <a:solidFill>
-                            <a:srgbClr val="2C3E50"/>
-                          </a:solidFill>
-                        </a:rPr>
-                        <a:t>DL: attention</a:t>
-                      </a:r>
-                    </a:p>
-                  </a:txBody>
-                  <a:tcPr>
-                    <a:solidFill>
-                      <a:srgbClr val="FAFBFC"/>
-                    </a:solidFill>
-                  </a:tcPr>
-                </a:tc>
-                <a:tc>
-                  <a:txBody>
-                    <a:bodyPr/>
-                    <a:lstStyle/>
-                    <a:p>
-                      <a:r>
-                        <a:rPr sz="750">
-                          <a:solidFill>
-                            <a:srgbClr val="2C3E50"/>
-                          </a:solidFill>
-                        </a:rPr>
-                        <a:t>attention-only (paper)</a:t>
-                      </a:r>
-                    </a:p>
-                  </a:txBody>
-                  <a:tcPr>
-                    <a:solidFill>
-                      <a:srgbClr val="FAFBFC"/>
-                    </a:solidFill>
-                  </a:tcPr>
-                </a:tc>
-                <a:tc>
-                  <a:txBody>
-                    <a:bodyPr/>
-                    <a:lstStyle/>
-                    <a:p>
-                      <a:r>
-                        <a:rPr sz="750">
-                          <a:solidFill>
-                            <a:srgbClr val="2C3E50"/>
-                          </a:solidFill>
-                        </a:rPr>
-                        <a:t>0.7614 ± 0.0310</a:t>
-                      </a:r>
-                    </a:p>
-                  </a:txBody>
-                  <a:tcPr>
-                    <a:solidFill>
-                      <a:srgbClr val="FAFBFC"/>
-                    </a:solidFill>
-                  </a:tcPr>
-                </a:tc>
-              </a:tr>
-              <a:tr h="196947">
-                <a:tc>
-                  <a:txBody>
-                    <a:bodyPr/>
-                    <a:lstStyle/>
-                    <a:p>
-                      <a:r>
-                        <a:rPr sz="750">
-                          <a:solidFill>
-                            <a:srgbClr val="2C3E50"/>
-                          </a:solidFill>
-                        </a:rPr>
-                        <a:t>21</a:t>
-                      </a:r>
-                    </a:p>
-                  </a:txBody>
-                  <a:tcPr>
-                    <a:solidFill>
-                      <a:srgbClr val="FFFFFF"/>
-                    </a:solidFill>
-                  </a:tcPr>
-                </a:tc>
-                <a:tc>
-                  <a:txBody>
-                    <a:bodyPr/>
-                    <a:lstStyle/>
-                    <a:p>
-                      <a:r>
-                        <a:rPr sz="750">
-                          <a:solidFill>
-                            <a:srgbClr val="2C3E50"/>
-                          </a:solidFill>
-                        </a:rPr>
-                        <a:t>ftCbow__LSTM</a:t>
-                      </a:r>
-                    </a:p>
-                  </a:txBody>
-                  <a:tcPr>
-                    <a:solidFill>
-                      <a:srgbClr val="FFFFFF"/>
-                    </a:solidFill>
-                  </a:tcPr>
-                </a:tc>
-                <a:tc>
-                  <a:txBody>
-                    <a:bodyPr/>
-                    <a:lstStyle/>
-                    <a:p>
-                      <a:r>
-                        <a:rPr sz="750">
-                          <a:solidFill>
-                            <a:srgbClr val="2C3E50"/>
-                          </a:solidFill>
-                        </a:rPr>
-                        <a:t>FastText</a:t>
-                      </a:r>
-                    </a:p>
-                  </a:txBody>
-                  <a:tcPr>
-                    <a:solidFill>
-                      <a:srgbClr val="FFFFFF"/>
-                    </a:solidFill>
-                  </a:tcPr>
-                </a:tc>
-                <a:tc>
-                  <a:txBody>
-                    <a:bodyPr/>
-                    <a:lstStyle/>
-                    <a:p>
-                      <a:r>
-                        <a:rPr sz="750">
-                          <a:solidFill>
-                            <a:srgbClr val="2C3E50"/>
-                          </a:solidFill>
-                        </a:rPr>
-                        <a:t>CBOW · mean-pooled</a:t>
-                      </a:r>
-                    </a:p>
-                  </a:txBody>
-                  <a:tcPr>
-                    <a:solidFill>
-                      <a:srgbClr val="FFFFFF"/>
-                    </a:solidFill>
-                  </a:tcPr>
-                </a:tc>
-                <a:tc>
-                  <a:txBody>
-                    <a:bodyPr/>
-                    <a:lstStyle/>
-                    <a:p>
-                      <a:r>
-                        <a:rPr sz="750">
-                          <a:solidFill>
-                            <a:srgbClr val="2C3E50"/>
-                          </a:solidFill>
-                        </a:rPr>
-                        <a:t>DL: LSTM</a:t>
-                      </a:r>
-                    </a:p>
-                  </a:txBody>
-                  <a:tcPr>
-                    <a:solidFill>
-                      <a:srgbClr val="FFFFFF"/>
-                    </a:solidFill>
-                  </a:tcPr>
-                </a:tc>
-                <a:tc>
-                  <a:txBody>
-                    <a:bodyPr/>
-                    <a:lstStyle/>
-                    <a:p>
-                      <a:r>
-                        <a:rPr sz="750">
-                          <a:solidFill>
-                            <a:srgbClr val="2C3E50"/>
-                          </a:solidFill>
-                        </a:rPr>
-                        <a:t>vanilla LSTM (paper)</a:t>
-                      </a:r>
-                    </a:p>
-                  </a:txBody>
-                  <a:tcPr>
-                    <a:solidFill>
-                      <a:srgbClr val="FFFFFF"/>
-                    </a:solidFill>
-                  </a:tcPr>
-                </a:tc>
-                <a:tc>
-                  <a:txBody>
-                    <a:bodyPr/>
-                    <a:lstStyle/>
-                    <a:p>
-                      <a:r>
-                        <a:rPr sz="750">
-                          <a:solidFill>
-                            <a:srgbClr val="2C3E50"/>
-                          </a:solidFill>
-                        </a:rPr>
-                        <a:t>0.7590 ± 0.0271</a:t>
-                      </a:r>
-                    </a:p>
-                  </a:txBody>
-                  <a:tcPr>
-                    <a:solidFill>
-                      <a:srgbClr val="FFFFFF"/>
-                    </a:solidFill>
-                  </a:tcPr>
-                </a:tc>
-              </a:tr>
-              <a:tr h="196947">
-                <a:tc>
-                  <a:txBody>
-                    <a:bodyPr/>
-                    <a:lstStyle/>
-                    <a:p>
-                      <a:r>
-                        <a:rPr sz="750">
-                          <a:solidFill>
-                            <a:srgbClr val="2C3E50"/>
-                          </a:solidFill>
-                        </a:rPr>
-                        <a:t>22</a:t>
-                      </a:r>
-                    </a:p>
-                  </a:txBody>
-                  <a:tcPr>
-                    <a:solidFill>
-                      <a:srgbClr val="FAFBFC"/>
-                    </a:solidFill>
-                  </a:tcPr>
-                </a:tc>
-                <a:tc>
-                  <a:txBody>
-                    <a:bodyPr/>
-                    <a:lstStyle/>
-                    <a:p>
-                      <a:r>
-                        <a:rPr sz="750">
-                          <a:solidFill>
-                            <a:srgbClr val="2C3E50"/>
-                          </a:solidFill>
-                        </a:rPr>
-                        <a:t>w2vCbow__LSTM</a:t>
-                      </a:r>
-                    </a:p>
-                  </a:txBody>
-                  <a:tcPr>
-                    <a:solidFill>
-                      <a:srgbClr val="FAFBFC"/>
-                    </a:solidFill>
-                  </a:tcPr>
-                </a:tc>
-                <a:tc>
-                  <a:txBody>
-                    <a:bodyPr/>
-                    <a:lstStyle/>
-                    <a:p>
-                      <a:r>
-                        <a:rPr sz="750">
-                          <a:solidFill>
-                            <a:srgbClr val="2C3E50"/>
-                          </a:solidFill>
-                        </a:rPr>
-                        <a:t>Word2Vec</a:t>
-                      </a:r>
-                    </a:p>
-                  </a:txBody>
-                  <a:tcPr>
-                    <a:solidFill>
-                      <a:srgbClr val="FAFBFC"/>
-                    </a:solidFill>
-                  </a:tcPr>
-                </a:tc>
-                <a:tc>
-                  <a:txBody>
-                    <a:bodyPr/>
-                    <a:lstStyle/>
-                    <a:p>
-                      <a:r>
-                        <a:rPr sz="750">
-                          <a:solidFill>
-                            <a:srgbClr val="2C3E50"/>
-                          </a:solidFill>
-                        </a:rPr>
-                        <a:t>CBOW · mean-pooled</a:t>
-                      </a:r>
-                    </a:p>
-                  </a:txBody>
-                  <a:tcPr>
-                    <a:solidFill>
-                      <a:srgbClr val="FAFBFC"/>
-                    </a:solidFill>
-                  </a:tcPr>
-                </a:tc>
-                <a:tc>
-                  <a:txBody>
-                    <a:bodyPr/>
-                    <a:lstStyle/>
-                    <a:p>
-                      <a:r>
-                        <a:rPr sz="750">
-                          <a:solidFill>
-                            <a:srgbClr val="2C3E50"/>
-                          </a:solidFill>
-                        </a:rPr>
-                        <a:t>DL: LSTM</a:t>
-                      </a:r>
-                    </a:p>
-                  </a:txBody>
-                  <a:tcPr>
-                    <a:solidFill>
-                      <a:srgbClr val="FAFBFC"/>
-                    </a:solidFill>
-                  </a:tcPr>
-                </a:tc>
-                <a:tc>
-                  <a:txBody>
-                    <a:bodyPr/>
-                    <a:lstStyle/>
-                    <a:p>
-                      <a:r>
-                        <a:rPr sz="750">
-                          <a:solidFill>
-                            <a:srgbClr val="2C3E50"/>
-                          </a:solidFill>
-                        </a:rPr>
-                        <a:t>vanilla LSTM (paper)</a:t>
-                      </a:r>
-                    </a:p>
-                  </a:txBody>
-                  <a:tcPr>
-                    <a:solidFill>
-                      <a:srgbClr val="FAFBFC"/>
-                    </a:solidFill>
-                  </a:tcPr>
-                </a:tc>
-                <a:tc>
-                  <a:txBody>
-                    <a:bodyPr/>
-                    <a:lstStyle/>
-                    <a:p>
-                      <a:r>
-                        <a:rPr sz="750">
-                          <a:solidFill>
-                            <a:srgbClr val="2C3E50"/>
-                          </a:solidFill>
-                        </a:rPr>
-                        <a:t>0.7548 ± 0.0275</a:t>
-                      </a:r>
-                    </a:p>
-                  </a:txBody>
-                  <a:tcPr>
-                    <a:solidFill>
-                      <a:srgbClr val="FAFBFC"/>
-                    </a:solidFill>
-                  </a:tcPr>
-                </a:tc>
-              </a:tr>
-              <a:tr h="196947">
-                <a:tc>
-                  <a:txBody>
-                    <a:bodyPr/>
-                    <a:lstStyle/>
-                    <a:p>
-                      <a:r>
-                        <a:rPr sz="750">
-                          <a:solidFill>
-                            <a:srgbClr val="2C3E50"/>
-                          </a:solidFill>
-                        </a:rPr>
-                        <a:t>23</a:t>
-                      </a:r>
-                    </a:p>
-                  </a:txBody>
-                  <a:tcPr>
-                    <a:solidFill>
-                      <a:srgbClr val="FFFFFF"/>
-                    </a:solidFill>
-                  </a:tcPr>
-                </a:tc>
-                <a:tc>
-                  <a:txBody>
-                    <a:bodyPr/>
-                    <a:lstStyle/>
-                    <a:p>
-                      <a:r>
-                        <a:rPr sz="750">
-                          <a:solidFill>
-                            <a:srgbClr val="2C3E50"/>
-                          </a:solidFill>
-                        </a:rPr>
-                        <a:t>ftSg__Trans</a:t>
-                      </a:r>
-                    </a:p>
-                  </a:txBody>
-                  <a:tcPr>
-                    <a:solidFill>
-                      <a:srgbClr val="FFFFFF"/>
-                    </a:solidFill>
-                  </a:tcPr>
-                </a:tc>
-                <a:tc>
-                  <a:txBody>
-                    <a:bodyPr/>
-                    <a:lstStyle/>
-                    <a:p>
-                      <a:r>
-                        <a:rPr sz="750">
-                          <a:solidFill>
-                            <a:srgbClr val="2C3E50"/>
-                          </a:solidFill>
-                        </a:rPr>
-                        <a:t>FastText</a:t>
-                      </a:r>
-                    </a:p>
-                  </a:txBody>
-                  <a:tcPr>
-                    <a:solidFill>
-                      <a:srgbClr val="FFFFFF"/>
-                    </a:solidFill>
-                  </a:tcPr>
-                </a:tc>
-                <a:tc>
-                  <a:txBody>
-                    <a:bodyPr/>
-                    <a:lstStyle/>
-                    <a:p>
-                      <a:r>
-                        <a:rPr sz="750">
-                          <a:solidFill>
-                            <a:srgbClr val="2C3E50"/>
-                          </a:solidFill>
-                        </a:rPr>
-                        <a:t>skip-gram · mean-pooled</a:t>
-                      </a:r>
-                    </a:p>
-                  </a:txBody>
-                  <a:tcPr>
-                    <a:solidFill>
-                      <a:srgbClr val="FFFFFF"/>
-                    </a:solidFill>
-                  </a:tcPr>
-                </a:tc>
-                <a:tc>
-                  <a:txBody>
-                    <a:bodyPr/>
-                    <a:lstStyle/>
-                    <a:p>
-                      <a:r>
-                        <a:rPr sz="750">
-                          <a:solidFill>
-                            <a:srgbClr val="2C3E50"/>
-                          </a:solidFill>
-                        </a:rPr>
-                        <a:t>DL: transformer</a:t>
-                      </a:r>
-                    </a:p>
-                  </a:txBody>
-                  <a:tcPr>
-                    <a:solidFill>
-                      <a:srgbClr val="FFFFFF"/>
-                    </a:solidFill>
-                  </a:tcPr>
-                </a:tc>
-                <a:tc>
-                  <a:txBody>
-                    <a:bodyPr/>
-                    <a:lstStyle/>
-                    <a:p>
-                      <a:r>
-                        <a:rPr sz="750">
-                          <a:solidFill>
-                            <a:srgbClr val="2C3E50"/>
-                          </a:solidFill>
-                        </a:rPr>
-                        <a:t>4-block transformer (paper)</a:t>
-                      </a:r>
-                    </a:p>
-                  </a:txBody>
-                  <a:tcPr>
-                    <a:solidFill>
-                      <a:srgbClr val="FFFFFF"/>
-                    </a:solidFill>
-                  </a:tcPr>
-                </a:tc>
-                <a:tc>
-                  <a:txBody>
-                    <a:bodyPr/>
-                    <a:lstStyle/>
-                    <a:p>
-                      <a:r>
-                        <a:rPr sz="750">
-                          <a:solidFill>
-                            <a:srgbClr val="2C3E50"/>
-                          </a:solidFill>
-                        </a:rPr>
-                        <a:t>0.7538 ± 0.0301</a:t>
-                      </a:r>
-                    </a:p>
-                  </a:txBody>
-                  <a:tcPr>
-                    <a:solidFill>
-                      <a:srgbClr val="FFFFFF"/>
-                    </a:solidFill>
-                  </a:tcPr>
-                </a:tc>
-              </a:tr>
-              <a:tr h="196947">
-                <a:tc>
-                  <a:txBody>
-                    <a:bodyPr/>
-                    <a:lstStyle/>
-                    <a:p>
-                      <a:r>
-                        <a:rPr sz="750">
-                          <a:solidFill>
-                            <a:srgbClr val="2C3E50"/>
-                          </a:solidFill>
-                        </a:rPr>
-                        <a:t>24</a:t>
-                      </a:r>
-                    </a:p>
-                  </a:txBody>
-                  <a:tcPr>
-                    <a:solidFill>
-                      <a:srgbClr val="FAFBFC"/>
-                    </a:solidFill>
-                  </a:tcPr>
-                </a:tc>
-                <a:tc>
-                  <a:txBody>
-                    <a:bodyPr/>
-                    <a:lstStyle/>
-                    <a:p>
-                      <a:r>
-                        <a:rPr sz="750">
-                          <a:solidFill>
-                            <a:srgbClr val="2C3E50"/>
-                          </a:solidFill>
-                        </a:rPr>
-                        <a:t>ftCbow__JustAttn</a:t>
-                      </a:r>
-                    </a:p>
-                  </a:txBody>
-                  <a:tcPr>
-                    <a:solidFill>
-                      <a:srgbClr val="FAFBFC"/>
-                    </a:solidFill>
-                  </a:tcPr>
-                </a:tc>
-                <a:tc>
-                  <a:txBody>
-                    <a:bodyPr/>
-                    <a:lstStyle/>
-                    <a:p>
-                      <a:r>
-                        <a:rPr sz="750">
-                          <a:solidFill>
-                            <a:srgbClr val="2C3E50"/>
-                          </a:solidFill>
-                        </a:rPr>
-                        <a:t>FastText</a:t>
-                      </a:r>
-                    </a:p>
-                  </a:txBody>
-                  <a:tcPr>
-                    <a:solidFill>
-                      <a:srgbClr val="FAFBFC"/>
-                    </a:solidFill>
-                  </a:tcPr>
-                </a:tc>
-                <a:tc>
-                  <a:txBody>
-                    <a:bodyPr/>
-                    <a:lstStyle/>
-                    <a:p>
-                      <a:r>
-                        <a:rPr sz="750">
-                          <a:solidFill>
-                            <a:srgbClr val="2C3E50"/>
-                          </a:solidFill>
-                        </a:rPr>
-                        <a:t>CBOW · mean-pooled</a:t>
-                      </a:r>
-                    </a:p>
-                  </a:txBody>
-                  <a:tcPr>
-                    <a:solidFill>
-                      <a:srgbClr val="FAFBFC"/>
-                    </a:solidFill>
-                  </a:tcPr>
-                </a:tc>
-                <a:tc>
-                  <a:txBody>
-                    <a:bodyPr/>
-                    <a:lstStyle/>
-                    <a:p>
-                      <a:r>
-                        <a:rPr sz="750">
-                          <a:solidFill>
-                            <a:srgbClr val="2C3E50"/>
-                          </a:solidFill>
-                        </a:rPr>
-                        <a:t>DL: attention</a:t>
-                      </a:r>
-                    </a:p>
-                  </a:txBody>
-                  <a:tcPr>
-                    <a:solidFill>
-                      <a:srgbClr val="FAFBFC"/>
-                    </a:solidFill>
-                  </a:tcPr>
-                </a:tc>
-                <a:tc>
-                  <a:txBody>
-                    <a:bodyPr/>
-                    <a:lstStyle/>
-                    <a:p>
-                      <a:r>
-                        <a:rPr sz="750">
-                          <a:solidFill>
-                            <a:srgbClr val="2C3E50"/>
-                          </a:solidFill>
-                        </a:rPr>
-                        <a:t>attention-only (paper)</a:t>
-                      </a:r>
-                    </a:p>
-                  </a:txBody>
-                  <a:tcPr>
-                    <a:solidFill>
-                      <a:srgbClr val="FAFBFC"/>
-                    </a:solidFill>
-                  </a:tcPr>
-                </a:tc>
-                <a:tc>
-                  <a:txBody>
-                    <a:bodyPr/>
-                    <a:lstStyle/>
-                    <a:p>
-                      <a:r>
-                        <a:rPr sz="750">
-                          <a:solidFill>
-                            <a:srgbClr val="2C3E50"/>
-                          </a:solidFill>
-                        </a:rPr>
-                        <a:t>0.7427 ± 0.0324</a:t>
-                      </a:r>
-                    </a:p>
-                  </a:txBody>
-                  <a:tcPr>
-                    <a:solidFill>
-                      <a:srgbClr val="FAFBFC"/>
-                    </a:solidFill>
-                  </a:tcPr>
-                </a:tc>
-              </a:tr>
-              <a:tr h="196965">
-                <a:tc>
-                  <a:txBody>
-                    <a:bodyPr/>
-                    <a:lstStyle/>
-                    <a:p>
-                      <a:r>
-                        <a:rPr sz="750">
-                          <a:solidFill>
-                            <a:srgbClr val="2C3E50"/>
-                          </a:solidFill>
-                        </a:rPr>
-                        <a:t>25</a:t>
-                      </a:r>
-                    </a:p>
-                  </a:txBody>
-                  <a:tcPr>
-                    <a:solidFill>
-                      <a:srgbClr val="FFFFFF"/>
-                    </a:solidFill>
-                  </a:tcPr>
-                </a:tc>
-                <a:tc>
-                  <a:txBody>
-                    <a:bodyPr/>
-                    <a:lstStyle/>
-                    <a:p>
-                      <a:r>
-                        <a:rPr sz="750">
-                          <a:solidFill>
-                            <a:srgbClr val="2C3E50"/>
-                          </a:solidFill>
-                        </a:rPr>
-                        <a:t>d2vDm__BRF100</a:t>
-                      </a:r>
-                    </a:p>
-                  </a:txBody>
-                  <a:tcPr>
-                    <a:solidFill>
-                      <a:srgbClr val="FFFFFF"/>
-                    </a:solidFill>
-                  </a:tcPr>
-                </a:tc>
-                <a:tc>
-                  <a:txBody>
-                    <a:bodyPr/>
-                    <a:lstStyle/>
-                    <a:p>
-                      <a:r>
-                        <a:rPr sz="750">
-                          <a:solidFill>
-                            <a:srgbClr val="2C3E50"/>
-                          </a:solidFill>
-                        </a:rPr>
-                        <a:t>Doc2Vec</a:t>
-                      </a:r>
-                    </a:p>
-                  </a:txBody>
-                  <a:tcPr>
-                    <a:solidFill>
-                      <a:srgbClr val="FFFFFF"/>
-                    </a:solidFill>
-                  </a:tcPr>
-                </a:tc>
-                <a:tc>
-                  <a:txBody>
-                    <a:bodyPr/>
-                    <a:lstStyle/>
-                    <a:p>
-                      <a:r>
-                        <a:rPr sz="750">
-                          <a:solidFill>
-                            <a:srgbClr val="2C3E50"/>
-                          </a:solidFill>
-                        </a:rPr>
-                        <a:t>DM · doc-vector</a:t>
-                      </a:r>
-                    </a:p>
-                  </a:txBody>
-                  <a:tcPr>
-                    <a:solidFill>
-                      <a:srgbClr val="FFFFFF"/>
-                    </a:solidFill>
-                  </a:tcPr>
-                </a:tc>
-                <a:tc>
-                  <a:txBody>
-                    <a:bodyPr/>
-                    <a:lstStyle/>
-                    <a:p>
-                      <a:r>
-                        <a:rPr sz="750">
-                          <a:solidFill>
-                            <a:srgbClr val="2C3E50"/>
-                          </a:solidFill>
-                        </a:rPr>
-                        <a:t>OvR(BalancedRF)</a:t>
-                      </a:r>
-                    </a:p>
-                  </a:txBody>
-                  <a:tcPr>
-                    <a:solidFill>
-                      <a:srgbClr val="FFFFFF"/>
-                    </a:solidFill>
-                  </a:tcPr>
-                </a:tc>
-                <a:tc>
-                  <a:txBody>
-                    <a:bodyPr/>
-                    <a:lstStyle/>
-                    <a:p>
-                      <a:r>
-                        <a:rPr sz="750">
-                          <a:solidFill>
-                            <a:srgbClr val="2C3E50"/>
-                          </a:solidFill>
-                        </a:rPr>
-                        <a:t>n=100 class_weight=balanced (paper)</a:t>
-                      </a:r>
-                    </a:p>
-                  </a:txBody>
-                  <a:tcPr>
-                    <a:solidFill>
-                      <a:srgbClr val="FFFFFF"/>
-                    </a:solidFill>
-                  </a:tcPr>
-                </a:tc>
-                <a:tc>
-                  <a:txBody>
-                    <a:bodyPr/>
-                    <a:lstStyle/>
-                    <a:p>
-                      <a:r>
-                        <a:rPr sz="750">
-                          <a:solidFill>
-                            <a:srgbClr val="2C3E50"/>
-                          </a:solidFill>
-                        </a:rPr>
-                        <a:t>0.6252 ± 0.0377</a:t>
-                      </a:r>
-                    </a:p>
-                  </a:txBody>
-                  <a:tcPr>
-                    <a:solidFill>
-                      <a:srgbClr val="FFFFFF"/>
                     </a:solidFill>
                   </a:tcPr>
                 </a:tc>
@@ -12574,7 +12723,7 @@
                             <a:srgbClr val="2C3E50"/>
                           </a:solidFill>
                         </a:rPr>
-                        <a:t>0.8734</a:t>
+                        <a:t>0.8877</a:t>
                       </a:r>
                     </a:p>
                   </a:txBody>
@@ -12595,7 +12744,7 @@
                             <a:srgbClr val="2C3E50"/>
                           </a:solidFill>
                         </a:rPr>
-                        <a:t>0.0399</a:t>
+                        <a:t>0.0395</a:t>
                       </a:r>
                     </a:p>
                   </a:txBody>
@@ -12616,7 +12765,7 @@
                             <a:srgbClr val="2C3E50"/>
                           </a:solidFill>
                         </a:rPr>
-                        <a:t>2</a:t>
+                        <a:t>3</a:t>
                       </a:r>
                     </a:p>
                   </a:txBody>
@@ -12637,7 +12786,7 @@
                             <a:srgbClr val="2C3E50"/>
                           </a:solidFill>
                         </a:rPr>
-                        <a:t>50</a:t>
+                        <a:t>75</a:t>
                       </a:r>
                     </a:p>
                   </a:txBody>
@@ -13291,7 +13440,7 @@
                             <a:srgbClr val="2C3E50"/>
                           </a:solidFill>
                         </a:rPr>
-                        <a:t>0.9038</a:t>
+                        <a:t>0.9080</a:t>
                       </a:r>
                     </a:p>
                   </a:txBody>
@@ -13312,7 +13461,7 @@
                             <a:srgbClr val="2C3E50"/>
                           </a:solidFill>
                         </a:rPr>
-                        <a:t>0.0198</a:t>
+                        <a:t>0.0196</a:t>
                       </a:r>
                     </a:p>
                   </a:txBody>
@@ -13333,7 +13482,7 @@
                             <a:srgbClr val="2C3E50"/>
                           </a:solidFill>
                         </a:rPr>
-                        <a:t>2</a:t>
+                        <a:t>3</a:t>
                       </a:r>
                     </a:p>
                   </a:txBody>
@@ -13354,7 +13503,7 @@
                             <a:srgbClr val="2C3E50"/>
                           </a:solidFill>
                         </a:rPr>
-                        <a:t>50</a:t>
+                        <a:t>75</a:t>
                       </a:r>
                     </a:p>
                   </a:txBody>
@@ -14052,7 +14201,7 @@
                   <a:srgbClr val="7F8C8D"/>
                 </a:solidFill>
               </a:rPr>
-              <a:t>Why our shallow winner is cheap. Grand total across all 625 fits: 6982 s = 1.94 h on Apple M4 Max</a:t>
+              <a:t>Why our shallow winner is cheap. Grand total across all 625 fits: 7104 s = 1.97 h on Apple M4 Max</a:t>
             </a:r>
           </a:p>
         </p:txBody>
@@ -16837,8 +16986,8 @@
         </p:blipFill>
         <p:spPr>
           <a:xfrm>
-            <a:off x="2203666" y="1325880"/>
-            <a:ext cx="7784362" cy="4572000"/>
+            <a:off x="1936698" y="1325880"/>
+            <a:ext cx="8318297" cy="4572000"/>
           </a:xfrm>
           <a:prstGeom prst="rect">
             <a:avLst/>
@@ -17022,8 +17171,8 @@
         </p:blipFill>
         <p:spPr>
           <a:xfrm>
-            <a:off x="1823296" y="1371600"/>
-            <a:ext cx="8545101" cy="4572000"/>
+            <a:off x="1736857" y="1371600"/>
+            <a:ext cx="8717979" cy="4572000"/>
           </a:xfrm>
           <a:prstGeom prst="rect">
             <a:avLst/>
@@ -17186,7 +17335,7 @@
                   <a:srgbClr val="7F8C8D"/>
                 </a:solidFill>
               </a:rPr>
-              <a:t>X-axis = Δ accuracy (rep_2 mean − rep_1 mean, should be ≈ 0 for reproducibility). 5×5 RSKF data splits are FIXED across reps; only model-init seed (REPRO_REP_SEED) varies. Restricted to the 25/25 configs with a COMPLETE 25-trial run in both reps.</a:t>
+              <a:t>X-axis = Δ accuracy (rep_2 mean − rep_1 mean, should be ≈ 0 for reproducibility). 5×5 RSKF data splits are FIXED across reps; only model-init seed (REPRO_REP_SEED) varies. Restricted to the 26/25 configs with a COMPLETE 25-trial run in both reps.</a:t>
             </a:r>
           </a:p>
         </p:txBody>
